--- a/细胞治疗与免疫治疗/疾病的细胞治疗与免疫治疗.pptx
+++ b/细胞治疗与免疫治疗/疾病的细胞治疗与免疫治疗.pptx
@@ -3466,7 +3466,7 @@
                 </a:solidFill>
                 <a:latin typeface="SimSun"/>
               </a:rPr>
-              <a:t>组员：姓名1 / 姓名2 / 姓名3</a:t>
+              <a:t>组员：张思成 / 陈浩文 / 程宇轩</a:t>
             </a:r>
           </a:p>
         </p:txBody>

--- a/细胞治疗与免疫治疗/疾病的细胞治疗与免疫治疗.pptx
+++ b/细胞治疗与免疫治疗/疾病的细胞治疗与免疫治疗.pptx
@@ -1,27 +1,27 @@
 
 <file path=ppt/presentation.xml><?xml version="1.0" encoding="utf-8"?>
-<p:presentation xmlns:a="http://schemas.openxmlformats.org/drawingml/2006/main" xmlns:r="http://schemas.openxmlformats.org/officeDocument/2006/relationships" xmlns:p="http://schemas.openxmlformats.org/presentationml/2006/main" saveSubsetFonts="1" autoCompressPictures="0">
+<p:presentation xmlns:a="http://schemas.openxmlformats.org/drawingml/2006/main" xmlns:r="http://schemas.openxmlformats.org/officeDocument/2006/relationships" xmlns:p="http://schemas.openxmlformats.org/presentationml/2006/main" autoCompressPictures="0">
   <p:sldMasterIdLst>
     <p:sldMasterId id="2147483648" r:id="rId1"/>
   </p:sldMasterIdLst>
   <p:sldIdLst>
-    <p:sldId id="256" r:id="rId7"/>
-    <p:sldId id="257" r:id="rId8"/>
-    <p:sldId id="258" r:id="rId9"/>
-    <p:sldId id="259" r:id="rId10"/>
-    <p:sldId id="260" r:id="rId11"/>
-    <p:sldId id="261" r:id="rId12"/>
-    <p:sldId id="262" r:id="rId13"/>
-    <p:sldId id="263" r:id="rId14"/>
-    <p:sldId id="264" r:id="rId15"/>
-    <p:sldId id="265" r:id="rId16"/>
-    <p:sldId id="266" r:id="rId17"/>
-    <p:sldId id="267" r:id="rId18"/>
-    <p:sldId id="268" r:id="rId19"/>
-    <p:sldId id="269" r:id="rId20"/>
-    <p:sldId id="270" r:id="rId21"/>
+    <p:sldId id="256" r:id="rId3"/>
+    <p:sldId id="257" r:id="rId4"/>
+    <p:sldId id="258" r:id="rId5"/>
+    <p:sldId id="259" r:id="rId6"/>
+    <p:sldId id="260" r:id="rId7"/>
+    <p:sldId id="261" r:id="rId8"/>
+    <p:sldId id="262" r:id="rId9"/>
+    <p:sldId id="263" r:id="rId10"/>
+    <p:sldId id="264" r:id="rId11"/>
+    <p:sldId id="265" r:id="rId12"/>
+    <p:sldId id="266" r:id="rId13"/>
+    <p:sldId id="267" r:id="rId14"/>
+    <p:sldId id="268" r:id="rId15"/>
+    <p:sldId id="269" r:id="rId16"/>
+    <p:sldId id="270" r:id="rId17"/>
   </p:sldIdLst>
-  <p:sldSz cx="12191695" cy="6858000" type="screen4x3"/>
+  <p:sldSz cx="12191365" cy="6858000" type="screen4x3"/>
   <p:notesSz cx="6858000" cy="9144000"/>
   <p:defaultTextStyle>
     <a:defPPr>
@@ -118,6 +118,22 @@
       </a:defRPr>
     </a:lvl9pPr>
   </p:defaultTextStyle>
+  <p:extLst>
+    <p:ext uri="{EFAFB233-063F-42B5-8137-9DF3F51BA10A}">
+      <p15:sldGuideLst xmlns:p15="http://schemas.microsoft.com/office/powerpoint/2012/main">
+        <p15:guide id="1" orient="horz" pos="2160" userDrawn="1">
+          <p15:clr>
+            <a:srgbClr val="A4A3A4"/>
+          </p15:clr>
+        </p15:guide>
+        <p15:guide id="2" pos="2880" userDrawn="1">
+          <p15:clr>
+            <a:srgbClr val="A4A3A4"/>
+          </p15:clr>
+        </p15:guide>
+      </p15:sldGuideLst>
+    </p:ext>
+  </p:extLst>
 </p:presentation>
 </file>
 
@@ -302,7 +318,6 @@
           <a:p>
             <a:fld id="{5BCAD085-E8A6-8845-BD4E-CB4CCA059FC4}" type="datetimeFigureOut">
               <a:rPr lang="en-US" smtClean="0"/>
-              <a:t>1/27/13</a:t>
             </a:fld>
             <a:endParaRPr lang="en-US"/>
           </a:p>
@@ -344,18 +359,12 @@
           <a:p>
             <a:fld id="{C1FF6DA9-008F-8B48-92A6-B652298478BF}" type="slidenum">
               <a:rPr lang="en-US" smtClean="0"/>
-              <a:t>‹#›</a:t>
             </a:fld>
             <a:endParaRPr lang="en-US"/>
           </a:p>
         </p:txBody>
       </p:sp>
     </p:spTree>
-    <p:extLst>
-      <p:ext uri="{BB962C8B-B14F-4D97-AF65-F5344CB8AC3E}">
-        <p14:creationId xmlns:p14="http://schemas.microsoft.com/office/powerpoint/2010/main" val="3168075583"/>
-      </p:ext>
-    </p:extLst>
   </p:cSld>
   <p:clrMapOvr>
     <a:masterClrMapping/>
@@ -423,6 +432,7 @@
               <a:rPr lang="en-US" smtClean="0"/>
               <a:t>Click to edit Master text styles</a:t>
             </a:r>
+            <a:endParaRPr lang="en-US" smtClean="0"/>
           </a:p>
           <a:p>
             <a:pPr lvl="1"/>
@@ -430,6 +440,7 @@
               <a:rPr lang="en-US" smtClean="0"/>
               <a:t>Second level</a:t>
             </a:r>
+            <a:endParaRPr lang="en-US" smtClean="0"/>
           </a:p>
           <a:p>
             <a:pPr lvl="2"/>
@@ -437,6 +448,7 @@
               <a:rPr lang="en-US" smtClean="0"/>
               <a:t>Third level</a:t>
             </a:r>
+            <a:endParaRPr lang="en-US" smtClean="0"/>
           </a:p>
           <a:p>
             <a:pPr lvl="3"/>
@@ -444,6 +456,7 @@
               <a:rPr lang="en-US" smtClean="0"/>
               <a:t>Fourth level</a:t>
             </a:r>
+            <a:endParaRPr lang="en-US" smtClean="0"/>
           </a:p>
           <a:p>
             <a:pPr lvl="4"/>
@@ -472,7 +485,6 @@
           <a:p>
             <a:fld id="{5BCAD085-E8A6-8845-BD4E-CB4CCA059FC4}" type="datetimeFigureOut">
               <a:rPr lang="en-US" smtClean="0"/>
-              <a:t>1/27/13</a:t>
             </a:fld>
             <a:endParaRPr lang="en-US"/>
           </a:p>
@@ -514,18 +526,12 @@
           <a:p>
             <a:fld id="{C1FF6DA9-008F-8B48-92A6-B652298478BF}" type="slidenum">
               <a:rPr lang="en-US" smtClean="0"/>
-              <a:t>‹#›</a:t>
             </a:fld>
             <a:endParaRPr lang="en-US"/>
           </a:p>
         </p:txBody>
       </p:sp>
     </p:spTree>
-    <p:extLst>
-      <p:ext uri="{BB962C8B-B14F-4D97-AF65-F5344CB8AC3E}">
-        <p14:creationId xmlns:p14="http://schemas.microsoft.com/office/powerpoint/2010/main" val="2910927964"/>
-      </p:ext>
-    </p:extLst>
   </p:cSld>
   <p:clrMapOvr>
     <a:masterClrMapping/>
@@ -603,6 +609,7 @@
               <a:rPr lang="en-US" smtClean="0"/>
               <a:t>Click to edit Master text styles</a:t>
             </a:r>
+            <a:endParaRPr lang="en-US" smtClean="0"/>
           </a:p>
           <a:p>
             <a:pPr lvl="1"/>
@@ -610,6 +617,7 @@
               <a:rPr lang="en-US" smtClean="0"/>
               <a:t>Second level</a:t>
             </a:r>
+            <a:endParaRPr lang="en-US" smtClean="0"/>
           </a:p>
           <a:p>
             <a:pPr lvl="2"/>
@@ -617,6 +625,7 @@
               <a:rPr lang="en-US" smtClean="0"/>
               <a:t>Third level</a:t>
             </a:r>
+            <a:endParaRPr lang="en-US" smtClean="0"/>
           </a:p>
           <a:p>
             <a:pPr lvl="3"/>
@@ -624,6 +633,7 @@
               <a:rPr lang="en-US" smtClean="0"/>
               <a:t>Fourth level</a:t>
             </a:r>
+            <a:endParaRPr lang="en-US" smtClean="0"/>
           </a:p>
           <a:p>
             <a:pPr lvl="4"/>
@@ -652,7 +662,6 @@
           <a:p>
             <a:fld id="{5BCAD085-E8A6-8845-BD4E-CB4CCA059FC4}" type="datetimeFigureOut">
               <a:rPr lang="en-US" smtClean="0"/>
-              <a:t>1/27/13</a:t>
             </a:fld>
             <a:endParaRPr lang="en-US"/>
           </a:p>
@@ -694,18 +703,12 @@
           <a:p>
             <a:fld id="{C1FF6DA9-008F-8B48-92A6-B652298478BF}" type="slidenum">
               <a:rPr lang="en-US" smtClean="0"/>
-              <a:t>‹#›</a:t>
             </a:fld>
             <a:endParaRPr lang="en-US"/>
           </a:p>
         </p:txBody>
       </p:sp>
     </p:spTree>
-    <p:extLst>
-      <p:ext uri="{BB962C8B-B14F-4D97-AF65-F5344CB8AC3E}">
-        <p14:creationId xmlns:p14="http://schemas.microsoft.com/office/powerpoint/2010/main" val="3612223792"/>
-      </p:ext>
-    </p:extLst>
   </p:cSld>
   <p:clrMapOvr>
     <a:masterClrMapping/>
@@ -773,6 +776,7 @@
               <a:rPr lang="en-US" smtClean="0"/>
               <a:t>Click to edit Master text styles</a:t>
             </a:r>
+            <a:endParaRPr lang="en-US" smtClean="0"/>
           </a:p>
           <a:p>
             <a:pPr lvl="1"/>
@@ -780,6 +784,7 @@
               <a:rPr lang="en-US" smtClean="0"/>
               <a:t>Second level</a:t>
             </a:r>
+            <a:endParaRPr lang="en-US" smtClean="0"/>
           </a:p>
           <a:p>
             <a:pPr lvl="2"/>
@@ -787,6 +792,7 @@
               <a:rPr lang="en-US" smtClean="0"/>
               <a:t>Third level</a:t>
             </a:r>
+            <a:endParaRPr lang="en-US" smtClean="0"/>
           </a:p>
           <a:p>
             <a:pPr lvl="3"/>
@@ -794,6 +800,7 @@
               <a:rPr lang="en-US" smtClean="0"/>
               <a:t>Fourth level</a:t>
             </a:r>
+            <a:endParaRPr lang="en-US" smtClean="0"/>
           </a:p>
           <a:p>
             <a:pPr lvl="4"/>
@@ -822,7 +829,6 @@
           <a:p>
             <a:fld id="{5BCAD085-E8A6-8845-BD4E-CB4CCA059FC4}" type="datetimeFigureOut">
               <a:rPr lang="en-US" smtClean="0"/>
-              <a:t>1/27/13</a:t>
             </a:fld>
             <a:endParaRPr lang="en-US"/>
           </a:p>
@@ -864,18 +870,12 @@
           <a:p>
             <a:fld id="{C1FF6DA9-008F-8B48-92A6-B652298478BF}" type="slidenum">
               <a:rPr lang="en-US" smtClean="0"/>
-              <a:t>‹#›</a:t>
             </a:fld>
             <a:endParaRPr lang="en-US"/>
           </a:p>
         </p:txBody>
       </p:sp>
     </p:spTree>
-    <p:extLst>
-      <p:ext uri="{BB962C8B-B14F-4D97-AF65-F5344CB8AC3E}">
-        <p14:creationId xmlns:p14="http://schemas.microsoft.com/office/powerpoint/2010/main" val="2614314258"/>
-      </p:ext>
-    </p:extLst>
   </p:cSld>
   <p:clrMapOvr>
     <a:masterClrMapping/>
@@ -1048,6 +1048,7 @@
               <a:rPr lang="en-US" smtClean="0"/>
               <a:t>Click to edit Master text styles</a:t>
             </a:r>
+            <a:endParaRPr lang="en-US" smtClean="0"/>
           </a:p>
         </p:txBody>
       </p:sp>
@@ -1068,7 +1069,6 @@
           <a:p>
             <a:fld id="{5BCAD085-E8A6-8845-BD4E-CB4CCA059FC4}" type="datetimeFigureOut">
               <a:rPr lang="en-US" smtClean="0"/>
-              <a:t>1/27/13</a:t>
             </a:fld>
             <a:endParaRPr lang="en-US"/>
           </a:p>
@@ -1110,18 +1110,12 @@
           <a:p>
             <a:fld id="{C1FF6DA9-008F-8B48-92A6-B652298478BF}" type="slidenum">
               <a:rPr lang="en-US" smtClean="0"/>
-              <a:t>‹#›</a:t>
             </a:fld>
             <a:endParaRPr lang="en-US"/>
           </a:p>
         </p:txBody>
       </p:sp>
     </p:spTree>
-    <p:extLst>
-      <p:ext uri="{BB962C8B-B14F-4D97-AF65-F5344CB8AC3E}">
-        <p14:creationId xmlns:p14="http://schemas.microsoft.com/office/powerpoint/2010/main" val="960648375"/>
-      </p:ext>
-    </p:extLst>
   </p:cSld>
   <p:clrMapOvr>
     <a:masterClrMapping/>
@@ -1222,6 +1216,7 @@
               <a:rPr lang="en-US" smtClean="0"/>
               <a:t>Click to edit Master text styles</a:t>
             </a:r>
+            <a:endParaRPr lang="en-US" smtClean="0"/>
           </a:p>
           <a:p>
             <a:pPr lvl="1"/>
@@ -1229,6 +1224,7 @@
               <a:rPr lang="en-US" smtClean="0"/>
               <a:t>Second level</a:t>
             </a:r>
+            <a:endParaRPr lang="en-US" smtClean="0"/>
           </a:p>
           <a:p>
             <a:pPr lvl="2"/>
@@ -1236,6 +1232,7 @@
               <a:rPr lang="en-US" smtClean="0"/>
               <a:t>Third level</a:t>
             </a:r>
+            <a:endParaRPr lang="en-US" smtClean="0"/>
           </a:p>
           <a:p>
             <a:pPr lvl="3"/>
@@ -1243,6 +1240,7 @@
               <a:rPr lang="en-US" smtClean="0"/>
               <a:t>Fourth level</a:t>
             </a:r>
+            <a:endParaRPr lang="en-US" smtClean="0"/>
           </a:p>
           <a:p>
             <a:pPr lvl="4"/>
@@ -1307,6 +1305,7 @@
               <a:rPr lang="en-US" smtClean="0"/>
               <a:t>Click to edit Master text styles</a:t>
             </a:r>
+            <a:endParaRPr lang="en-US" smtClean="0"/>
           </a:p>
           <a:p>
             <a:pPr lvl="1"/>
@@ -1314,6 +1313,7 @@
               <a:rPr lang="en-US" smtClean="0"/>
               <a:t>Second level</a:t>
             </a:r>
+            <a:endParaRPr lang="en-US" smtClean="0"/>
           </a:p>
           <a:p>
             <a:pPr lvl="2"/>
@@ -1321,6 +1321,7 @@
               <a:rPr lang="en-US" smtClean="0"/>
               <a:t>Third level</a:t>
             </a:r>
+            <a:endParaRPr lang="en-US" smtClean="0"/>
           </a:p>
           <a:p>
             <a:pPr lvl="3"/>
@@ -1328,6 +1329,7 @@
               <a:rPr lang="en-US" smtClean="0"/>
               <a:t>Fourth level</a:t>
             </a:r>
+            <a:endParaRPr lang="en-US" smtClean="0"/>
           </a:p>
           <a:p>
             <a:pPr lvl="4"/>
@@ -1356,7 +1358,6 @@
           <a:p>
             <a:fld id="{5BCAD085-E8A6-8845-BD4E-CB4CCA059FC4}" type="datetimeFigureOut">
               <a:rPr lang="en-US" smtClean="0"/>
-              <a:t>1/27/13</a:t>
             </a:fld>
             <a:endParaRPr lang="en-US"/>
           </a:p>
@@ -1398,18 +1399,12 @@
           <a:p>
             <a:fld id="{C1FF6DA9-008F-8B48-92A6-B652298478BF}" type="slidenum">
               <a:rPr lang="en-US" smtClean="0"/>
-              <a:t>‹#›</a:t>
             </a:fld>
             <a:endParaRPr lang="en-US"/>
           </a:p>
         </p:txBody>
       </p:sp>
     </p:spTree>
-    <p:extLst>
-      <p:ext uri="{BB962C8B-B14F-4D97-AF65-F5344CB8AC3E}">
-        <p14:creationId xmlns:p14="http://schemas.microsoft.com/office/powerpoint/2010/main" val="2782244947"/>
-      </p:ext>
-    </p:extLst>
   </p:cSld>
   <p:clrMapOvr>
     <a:masterClrMapping/>
@@ -1523,6 +1518,7 @@
               <a:rPr lang="en-US" smtClean="0"/>
               <a:t>Click to edit Master text styles</a:t>
             </a:r>
+            <a:endParaRPr lang="en-US" smtClean="0"/>
           </a:p>
         </p:txBody>
       </p:sp>
@@ -1579,6 +1575,7 @@
               <a:rPr lang="en-US" smtClean="0"/>
               <a:t>Click to edit Master text styles</a:t>
             </a:r>
+            <a:endParaRPr lang="en-US" smtClean="0"/>
           </a:p>
           <a:p>
             <a:pPr lvl="1"/>
@@ -1586,6 +1583,7 @@
               <a:rPr lang="en-US" smtClean="0"/>
               <a:t>Second level</a:t>
             </a:r>
+            <a:endParaRPr lang="en-US" smtClean="0"/>
           </a:p>
           <a:p>
             <a:pPr lvl="2"/>
@@ -1593,6 +1591,7 @@
               <a:rPr lang="en-US" smtClean="0"/>
               <a:t>Third level</a:t>
             </a:r>
+            <a:endParaRPr lang="en-US" smtClean="0"/>
           </a:p>
           <a:p>
             <a:pPr lvl="3"/>
@@ -1600,6 +1599,7 @@
               <a:rPr lang="en-US" smtClean="0"/>
               <a:t>Fourth level</a:t>
             </a:r>
+            <a:endParaRPr lang="en-US" smtClean="0"/>
           </a:p>
           <a:p>
             <a:pPr lvl="4"/>
@@ -1673,6 +1673,7 @@
               <a:rPr lang="en-US" smtClean="0"/>
               <a:t>Click to edit Master text styles</a:t>
             </a:r>
+            <a:endParaRPr lang="en-US" smtClean="0"/>
           </a:p>
         </p:txBody>
       </p:sp>
@@ -1729,6 +1730,7 @@
               <a:rPr lang="en-US" smtClean="0"/>
               <a:t>Click to edit Master text styles</a:t>
             </a:r>
+            <a:endParaRPr lang="en-US" smtClean="0"/>
           </a:p>
           <a:p>
             <a:pPr lvl="1"/>
@@ -1736,6 +1738,7 @@
               <a:rPr lang="en-US" smtClean="0"/>
               <a:t>Second level</a:t>
             </a:r>
+            <a:endParaRPr lang="en-US" smtClean="0"/>
           </a:p>
           <a:p>
             <a:pPr lvl="2"/>
@@ -1743,6 +1746,7 @@
               <a:rPr lang="en-US" smtClean="0"/>
               <a:t>Third level</a:t>
             </a:r>
+            <a:endParaRPr lang="en-US" smtClean="0"/>
           </a:p>
           <a:p>
             <a:pPr lvl="3"/>
@@ -1750,6 +1754,7 @@
               <a:rPr lang="en-US" smtClean="0"/>
               <a:t>Fourth level</a:t>
             </a:r>
+            <a:endParaRPr lang="en-US" smtClean="0"/>
           </a:p>
           <a:p>
             <a:pPr lvl="4"/>
@@ -1778,7 +1783,6 @@
           <a:p>
             <a:fld id="{5BCAD085-E8A6-8845-BD4E-CB4CCA059FC4}" type="datetimeFigureOut">
               <a:rPr lang="en-US" smtClean="0"/>
-              <a:t>1/27/13</a:t>
             </a:fld>
             <a:endParaRPr lang="en-US"/>
           </a:p>
@@ -1820,18 +1824,12 @@
           <a:p>
             <a:fld id="{C1FF6DA9-008F-8B48-92A6-B652298478BF}" type="slidenum">
               <a:rPr lang="en-US" smtClean="0"/>
-              <a:t>‹#›</a:t>
             </a:fld>
             <a:endParaRPr lang="en-US"/>
           </a:p>
         </p:txBody>
       </p:sp>
     </p:spTree>
-    <p:extLst>
-      <p:ext uri="{BB962C8B-B14F-4D97-AF65-F5344CB8AC3E}">
-        <p14:creationId xmlns:p14="http://schemas.microsoft.com/office/powerpoint/2010/main" val="990158736"/>
-      </p:ext>
-    </p:extLst>
   </p:cSld>
   <p:clrMapOvr>
     <a:masterClrMapping/>
@@ -1896,7 +1894,6 @@
           <a:p>
             <a:fld id="{5BCAD085-E8A6-8845-BD4E-CB4CCA059FC4}" type="datetimeFigureOut">
               <a:rPr lang="en-US" smtClean="0"/>
-              <a:t>1/27/13</a:t>
             </a:fld>
             <a:endParaRPr lang="en-US"/>
           </a:p>
@@ -1938,18 +1935,12 @@
           <a:p>
             <a:fld id="{C1FF6DA9-008F-8B48-92A6-B652298478BF}" type="slidenum">
               <a:rPr lang="en-US" smtClean="0"/>
-              <a:t>‹#›</a:t>
             </a:fld>
             <a:endParaRPr lang="en-US"/>
           </a:p>
         </p:txBody>
       </p:sp>
     </p:spTree>
-    <p:extLst>
-      <p:ext uri="{BB962C8B-B14F-4D97-AF65-F5344CB8AC3E}">
-        <p14:creationId xmlns:p14="http://schemas.microsoft.com/office/powerpoint/2010/main" val="727027711"/>
-      </p:ext>
-    </p:extLst>
   </p:cSld>
   <p:clrMapOvr>
     <a:masterClrMapping/>
@@ -1991,7 +1982,6 @@
           <a:p>
             <a:fld id="{5BCAD085-E8A6-8845-BD4E-CB4CCA059FC4}" type="datetimeFigureOut">
               <a:rPr lang="en-US" smtClean="0"/>
-              <a:t>1/27/13</a:t>
             </a:fld>
             <a:endParaRPr lang="en-US"/>
           </a:p>
@@ -2033,18 +2023,12 @@
           <a:p>
             <a:fld id="{C1FF6DA9-008F-8B48-92A6-B652298478BF}" type="slidenum">
               <a:rPr lang="en-US" smtClean="0"/>
-              <a:t>‹#›</a:t>
             </a:fld>
             <a:endParaRPr lang="en-US"/>
           </a:p>
         </p:txBody>
       </p:sp>
     </p:spTree>
-    <p:extLst>
-      <p:ext uri="{BB962C8B-B14F-4D97-AF65-F5344CB8AC3E}">
-        <p14:creationId xmlns:p14="http://schemas.microsoft.com/office/powerpoint/2010/main" val="1212999818"/>
-      </p:ext>
-    </p:extLst>
   </p:cSld>
   <p:clrMapOvr>
     <a:masterClrMapping/>
@@ -2154,6 +2138,7 @@
               <a:rPr lang="en-US" smtClean="0"/>
               <a:t>Click to edit Master text styles</a:t>
             </a:r>
+            <a:endParaRPr lang="en-US" smtClean="0"/>
           </a:p>
           <a:p>
             <a:pPr lvl="1"/>
@@ -2161,6 +2146,7 @@
               <a:rPr lang="en-US" smtClean="0"/>
               <a:t>Second level</a:t>
             </a:r>
+            <a:endParaRPr lang="en-US" smtClean="0"/>
           </a:p>
           <a:p>
             <a:pPr lvl="2"/>
@@ -2168,6 +2154,7 @@
               <a:rPr lang="en-US" smtClean="0"/>
               <a:t>Third level</a:t>
             </a:r>
+            <a:endParaRPr lang="en-US" smtClean="0"/>
           </a:p>
           <a:p>
             <a:pPr lvl="3"/>
@@ -2175,6 +2162,7 @@
               <a:rPr lang="en-US" smtClean="0"/>
               <a:t>Fourth level</a:t>
             </a:r>
+            <a:endParaRPr lang="en-US" smtClean="0"/>
           </a:p>
           <a:p>
             <a:pPr lvl="4"/>
@@ -2248,6 +2236,7 @@
               <a:rPr lang="en-US" smtClean="0"/>
               <a:t>Click to edit Master text styles</a:t>
             </a:r>
+            <a:endParaRPr lang="en-US" smtClean="0"/>
           </a:p>
         </p:txBody>
       </p:sp>
@@ -2268,7 +2257,6 @@
           <a:p>
             <a:fld id="{5BCAD085-E8A6-8845-BD4E-CB4CCA059FC4}" type="datetimeFigureOut">
               <a:rPr lang="en-US" smtClean="0"/>
-              <a:t>1/27/13</a:t>
             </a:fld>
             <a:endParaRPr lang="en-US"/>
           </a:p>
@@ -2310,18 +2298,12 @@
           <a:p>
             <a:fld id="{C1FF6DA9-008F-8B48-92A6-B652298478BF}" type="slidenum">
               <a:rPr lang="en-US" smtClean="0"/>
-              <a:t>‹#›</a:t>
             </a:fld>
             <a:endParaRPr lang="en-US"/>
           </a:p>
         </p:txBody>
       </p:sp>
     </p:spTree>
-    <p:extLst>
-      <p:ext uri="{BB962C8B-B14F-4D97-AF65-F5344CB8AC3E}">
-        <p14:creationId xmlns:p14="http://schemas.microsoft.com/office/powerpoint/2010/main" val="1840726560"/>
-      </p:ext>
-    </p:extLst>
   </p:cSld>
   <p:clrMapOvr>
     <a:masterClrMapping/>
@@ -2501,6 +2483,7 @@
               <a:rPr lang="en-US" smtClean="0"/>
               <a:t>Click to edit Master text styles</a:t>
             </a:r>
+            <a:endParaRPr lang="en-US" smtClean="0"/>
           </a:p>
         </p:txBody>
       </p:sp>
@@ -2521,7 +2504,6 @@
           <a:p>
             <a:fld id="{5BCAD085-E8A6-8845-BD4E-CB4CCA059FC4}" type="datetimeFigureOut">
               <a:rPr lang="en-US" smtClean="0"/>
-              <a:t>1/27/13</a:t>
             </a:fld>
             <a:endParaRPr lang="en-US"/>
           </a:p>
@@ -2563,18 +2545,12 @@
           <a:p>
             <a:fld id="{C1FF6DA9-008F-8B48-92A6-B652298478BF}" type="slidenum">
               <a:rPr lang="en-US" smtClean="0"/>
-              <a:t>‹#›</a:t>
             </a:fld>
             <a:endParaRPr lang="en-US"/>
           </a:p>
         </p:txBody>
       </p:sp>
     </p:spTree>
-    <p:extLst>
-      <p:ext uri="{BB962C8B-B14F-4D97-AF65-F5344CB8AC3E}">
-        <p14:creationId xmlns:p14="http://schemas.microsoft.com/office/powerpoint/2010/main" val="3889236939"/>
-      </p:ext>
-    </p:extLst>
   </p:cSld>
   <p:clrMapOvr>
     <a:masterClrMapping/>
@@ -2667,6 +2643,7 @@
               <a:rPr lang="en-US" smtClean="0"/>
               <a:t>Click to edit Master text styles</a:t>
             </a:r>
+            <a:endParaRPr lang="en-US" smtClean="0"/>
           </a:p>
           <a:p>
             <a:pPr lvl="1"/>
@@ -2674,6 +2651,7 @@
               <a:rPr lang="en-US" smtClean="0"/>
               <a:t>Second level</a:t>
             </a:r>
+            <a:endParaRPr lang="en-US" smtClean="0"/>
           </a:p>
           <a:p>
             <a:pPr lvl="2"/>
@@ -2681,6 +2659,7 @@
               <a:rPr lang="en-US" smtClean="0"/>
               <a:t>Third level</a:t>
             </a:r>
+            <a:endParaRPr lang="en-US" smtClean="0"/>
           </a:p>
           <a:p>
             <a:pPr lvl="3"/>
@@ -2688,6 +2667,7 @@
               <a:rPr lang="en-US" smtClean="0"/>
               <a:t>Fourth level</a:t>
             </a:r>
+            <a:endParaRPr lang="en-US" smtClean="0"/>
           </a:p>
           <a:p>
             <a:pPr lvl="4"/>
@@ -2734,7 +2714,6 @@
           <a:p>
             <a:fld id="{5BCAD085-E8A6-8845-BD4E-CB4CCA059FC4}" type="datetimeFigureOut">
               <a:rPr lang="en-US" smtClean="0"/>
-              <a:t>1/27/13</a:t>
             </a:fld>
             <a:endParaRPr lang="en-US"/>
           </a:p>
@@ -2812,18 +2791,12 @@
           <a:p>
             <a:fld id="{C1FF6DA9-008F-8B48-92A6-B652298478BF}" type="slidenum">
               <a:rPr lang="en-US" smtClean="0"/>
-              <a:t>‹#›</a:t>
             </a:fld>
             <a:endParaRPr lang="en-US"/>
           </a:p>
         </p:txBody>
       </p:sp>
     </p:spTree>
-    <p:extLst>
-      <p:ext uri="{BB962C8B-B14F-4D97-AF65-F5344CB8AC3E}">
-        <p14:creationId xmlns:p14="http://schemas.microsoft.com/office/powerpoint/2010/main" val="2209977519"/>
-      </p:ext>
-    </p:extLst>
   </p:cSld>
   <p:clrMap bg1="lt1" tx1="dk1" bg2="lt2" tx2="dk2" accent1="accent1" accent2="accent2" accent3="accent3" accent4="accent4" accent5="accent5" accent6="accent6" hlink="hlink" folHlink="folHlink"/>
   <p:sldLayoutIdLst>
@@ -2861,7 +2834,7 @@
         <a:spcBef>
           <a:spcPct val="20000"/>
         </a:spcBef>
-        <a:buFont typeface="Arial"/>
+        <a:buFont typeface="Arial" panose="020B0604020202020204"/>
         <a:buChar char="•"/>
         <a:defRPr sz="3200" kern="1200">
           <a:solidFill>
@@ -2876,7 +2849,7 @@
         <a:spcBef>
           <a:spcPct val="20000"/>
         </a:spcBef>
-        <a:buFont typeface="Arial"/>
+        <a:buFont typeface="Arial" panose="020B0604020202020204"/>
         <a:buChar char="–"/>
         <a:defRPr sz="2800" kern="1200">
           <a:solidFill>
@@ -2891,7 +2864,7 @@
         <a:spcBef>
           <a:spcPct val="20000"/>
         </a:spcBef>
-        <a:buFont typeface="Arial"/>
+        <a:buFont typeface="Arial" panose="020B0604020202020204"/>
         <a:buChar char="•"/>
         <a:defRPr sz="2400" kern="1200">
           <a:solidFill>
@@ -2906,7 +2879,7 @@
         <a:spcBef>
           <a:spcPct val="20000"/>
         </a:spcBef>
-        <a:buFont typeface="Arial"/>
+        <a:buFont typeface="Arial" panose="020B0604020202020204"/>
         <a:buChar char="–"/>
         <a:defRPr sz="2000" kern="1200">
           <a:solidFill>
@@ -2921,7 +2894,7 @@
         <a:spcBef>
           <a:spcPct val="20000"/>
         </a:spcBef>
-        <a:buFont typeface="Arial"/>
+        <a:buFont typeface="Arial" panose="020B0604020202020204"/>
         <a:buChar char="»"/>
         <a:defRPr sz="2000" kern="1200">
           <a:solidFill>
@@ -2936,7 +2909,7 @@
         <a:spcBef>
           <a:spcPct val="20000"/>
         </a:spcBef>
-        <a:buFont typeface="Arial"/>
+        <a:buFont typeface="Arial" panose="020B0604020202020204"/>
         <a:buChar char="•"/>
         <a:defRPr sz="2000" kern="1200">
           <a:solidFill>
@@ -2951,7 +2924,7 @@
         <a:spcBef>
           <a:spcPct val="20000"/>
         </a:spcBef>
-        <a:buFont typeface="Arial"/>
+        <a:buFont typeface="Arial" panose="020B0604020202020204"/>
         <a:buChar char="•"/>
         <a:defRPr sz="2000" kern="1200">
           <a:solidFill>
@@ -2966,7 +2939,7 @@
         <a:spcBef>
           <a:spcPct val="20000"/>
         </a:spcBef>
-        <a:buFont typeface="Arial"/>
+        <a:buFont typeface="Arial" panose="020B0604020202020204"/>
         <a:buChar char="•"/>
         <a:defRPr sz="2000" kern="1200">
           <a:solidFill>
@@ -2981,7 +2954,7 @@
         <a:spcBef>
           <a:spcPct val="20000"/>
         </a:spcBef>
-        <a:buFont typeface="Arial"/>
+        <a:buFont typeface="Arial" panose="020B0604020202020204"/>
         <a:buChar char="•"/>
         <a:defRPr sz="2000" kern="1200">
           <a:solidFill>
@@ -3093,7 +3066,7 @@
 </file>
 
 <file path=ppt/slides/slide1.xml><?xml version="1.0" encoding="utf-8"?>
-<p:sld xmlns:a="http://schemas.openxmlformats.org/drawingml/2006/main" xmlns:p="http://schemas.openxmlformats.org/presentationml/2006/main" xmlns:r="http://schemas.openxmlformats.org/officeDocument/2006/relationships">
+<p:sld xmlns:a="http://schemas.openxmlformats.org/drawingml/2006/main" xmlns:r="http://schemas.openxmlformats.org/officeDocument/2006/relationships" xmlns:p="http://schemas.openxmlformats.org/presentationml/2006/main">
   <p:cSld>
     <p:spTree>
       <p:nvGrpSpPr>
@@ -3111,7 +3084,7 @@
           <p:nvPr/>
         </p:nvPicPr>
         <p:blipFill>
-          <a:blip r:embed="rId2"/>
+          <a:blip r:embed="rId1"/>
           <a:stretch>
             <a:fillRect/>
           </a:stretch>
@@ -3188,21 +3161,27 @@
           <a:noFill/>
         </p:spPr>
         <p:txBody>
-          <a:bodyPr wrap="square" lIns="27432" rIns="27432" tIns="9144" bIns="9144" anchor="t">
+          <a:bodyPr wrap="square" lIns="27432" tIns="9144" rIns="27432" bIns="9144" anchor="t">
             <a:spAutoFit/>
           </a:bodyPr>
           <a:lstStyle/>
           <a:p>
             <a:pPr algn="l"/>
             <a:r>
-              <a:rPr b="1" sz="1400">
+              <a:rPr sz="1400" b="1">
                 <a:solidFill>
                   <a:srgbClr val="C4EBE7"/>
                 </a:solidFill>
-                <a:latin typeface="SimHei"/>
+                <a:latin typeface="黑体" panose="02010609060101010101" charset="-122"/>
               </a:rPr>
               <a:t>医学发展史课程汇报</a:t>
             </a:r>
+            <a:endParaRPr sz="1400" b="1">
+              <a:solidFill>
+                <a:srgbClr val="C4EBE7"/>
+              </a:solidFill>
+              <a:latin typeface="黑体" panose="02010609060101010101" charset="-122"/>
+            </a:endParaRPr>
           </a:p>
         </p:txBody>
       </p:sp>
@@ -3223,21 +3202,27 @@
           <a:noFill/>
         </p:spPr>
         <p:txBody>
-          <a:bodyPr wrap="square" lIns="27432" rIns="27432" tIns="9144" bIns="9144" anchor="t">
+          <a:bodyPr wrap="square" lIns="27432" tIns="9144" rIns="27432" bIns="9144" anchor="t">
             <a:spAutoFit/>
           </a:bodyPr>
           <a:lstStyle/>
           <a:p>
             <a:pPr algn="l"/>
             <a:r>
-              <a:rPr b="1" sz="3300">
+              <a:rPr sz="3300" b="1">
                 <a:solidFill>
                   <a:srgbClr val="FFFFFF"/>
                 </a:solidFill>
-                <a:latin typeface="SimHei"/>
+                <a:latin typeface="黑体" panose="02010609060101010101" charset="-122"/>
               </a:rPr>
               <a:t>疾病的细胞治疗与免疫治疗</a:t>
             </a:r>
+            <a:endParaRPr sz="3300" b="1">
+              <a:solidFill>
+                <a:srgbClr val="FFFFFF"/>
+              </a:solidFill>
+              <a:latin typeface="黑体" panose="02010609060101010101" charset="-122"/>
+            </a:endParaRPr>
           </a:p>
         </p:txBody>
       </p:sp>
@@ -3258,21 +3243,27 @@
           <a:noFill/>
         </p:spPr>
         <p:txBody>
-          <a:bodyPr wrap="square" lIns="27432" rIns="27432" tIns="9144" bIns="9144" anchor="t">
+          <a:bodyPr wrap="square" lIns="27432" tIns="9144" rIns="27432" bIns="9144" anchor="t">
             <a:spAutoFit/>
           </a:bodyPr>
           <a:lstStyle/>
           <a:p>
             <a:pPr algn="l"/>
             <a:r>
-              <a:rPr b="0" sz="1720">
+              <a:rPr sz="1720" b="0">
                 <a:solidFill>
                   <a:srgbClr val="DCEBEE"/>
                 </a:solidFill>
-                <a:latin typeface="SimHei"/>
+                <a:latin typeface="黑体" panose="02010609060101010101" charset="-122"/>
               </a:rPr>
               <a:t>从外部杀伤到免疫重塑：医学治疗逻辑的转变</a:t>
             </a:r>
+            <a:endParaRPr sz="1720" b="0">
+              <a:solidFill>
+                <a:srgbClr val="DCEBEE"/>
+              </a:solidFill>
+              <a:latin typeface="黑体" panose="02010609060101010101" charset="-122"/>
+            </a:endParaRPr>
           </a:p>
         </p:txBody>
       </p:sp>
@@ -3338,21 +3329,27 @@
           <a:noFill/>
         </p:spPr>
         <p:txBody>
-          <a:bodyPr wrap="square" lIns="27432" rIns="27432" tIns="9144" bIns="9144" anchor="t">
+          <a:bodyPr wrap="square" lIns="27432" tIns="9144" rIns="27432" bIns="9144" anchor="t">
             <a:spAutoFit/>
           </a:bodyPr>
           <a:lstStyle/>
           <a:p>
             <a:pPr algn="l"/>
             <a:r>
-              <a:rPr b="1" sz="1260">
+              <a:rPr sz="1260" b="1">
                 <a:solidFill>
                   <a:srgbClr val="C4EBE7"/>
                 </a:solidFill>
-                <a:latin typeface="SimHei"/>
+                <a:latin typeface="黑体" panose="02010609060101010101" charset="-122"/>
               </a:rPr>
               <a:t>核心观点</a:t>
             </a:r>
+            <a:endParaRPr sz="1260" b="1">
+              <a:solidFill>
+                <a:srgbClr val="C4EBE7"/>
+              </a:solidFill>
+              <a:latin typeface="黑体" panose="02010609060101010101" charset="-122"/>
+            </a:endParaRPr>
           </a:p>
         </p:txBody>
       </p:sp>
@@ -3364,30 +3361,36 @@
         </p:nvSpPr>
         <p:spPr>
           <a:xfrm>
-            <a:off x="1097280" y="3493008"/>
-            <a:ext cx="4617720" cy="292608"/>
-          </a:xfrm>
-          <a:prstGeom prst="rect">
-            <a:avLst/>
-          </a:prstGeom>
-          <a:noFill/>
-        </p:spPr>
-        <p:txBody>
-          <a:bodyPr wrap="square" lIns="27432" rIns="27432" tIns="9144" bIns="9144" anchor="t">
-            <a:spAutoFit/>
+            <a:off x="1005840" y="3562985"/>
+            <a:ext cx="5122545" cy="529590"/>
+          </a:xfrm>
+          <a:prstGeom prst="rect">
+            <a:avLst/>
+          </a:prstGeom>
+          <a:noFill/>
+        </p:spPr>
+        <p:txBody>
+          <a:bodyPr wrap="square" lIns="27432" tIns="9144" rIns="27432" bIns="9144" anchor="t">
+            <a:noAutofit/>
           </a:bodyPr>
           <a:lstStyle/>
           <a:p>
             <a:pPr algn="l"/>
             <a:r>
-              <a:rPr b="1" sz="1650">
+              <a:rPr sz="1650" b="1">
                 <a:solidFill>
                   <a:srgbClr val="FFFFFF"/>
                 </a:solidFill>
-                <a:latin typeface="SimHei"/>
+                <a:latin typeface="黑体" panose="02010609060101010101" charset="-122"/>
               </a:rPr>
               <a:t>支持发展，但不神化；用证据、风险和可及性一起判断。</a:t>
             </a:r>
+            <a:endParaRPr sz="1650" b="1">
+              <a:solidFill>
+                <a:srgbClr val="FFFFFF"/>
+              </a:solidFill>
+              <a:latin typeface="黑体" panose="02010609060101010101" charset="-122"/>
+            </a:endParaRPr>
           </a:p>
         </p:txBody>
       </p:sp>
@@ -3400,15 +3403,15 @@
         <p:spPr>
           <a:xfrm>
             <a:off x="932688" y="4462272"/>
-            <a:ext cx="4297680" cy="822960"/>
-          </a:xfrm>
-          <a:prstGeom prst="rect">
-            <a:avLst/>
-          </a:prstGeom>
-          <a:noFill/>
-        </p:spPr>
-        <p:txBody>
-          <a:bodyPr wrap="square" lIns="36576" rIns="36576" tIns="9144" bIns="9144">
+            <a:ext cx="4297680" cy="227330"/>
+          </a:xfrm>
+          <a:prstGeom prst="rect">
+            <a:avLst/>
+          </a:prstGeom>
+          <a:noFill/>
+        </p:spPr>
+        <p:txBody>
+          <a:bodyPr wrap="square" lIns="36576" tIns="9144" rIns="36576" bIns="9144">
             <a:spAutoFit/>
           </a:bodyPr>
           <a:lstStyle/>
@@ -3422,52 +3425,49 @@
               </a:spcAft>
             </a:pPr>
             <a:r>
-              <a:rPr b="0" sz="1300">
+              <a:rPr sz="1300" b="0">
                 <a:solidFill>
                   <a:srgbClr val="E2F2F4"/>
                 </a:solidFill>
-                <a:latin typeface="SimSun"/>
-              </a:rPr>
-              <a:t>10–15 分钟</a:t>
-            </a:r>
-          </a:p>
-          <a:p>
-            <a:pPr>
-              <a:lnSpc>
-                <a:spcPct val="105000"/>
-              </a:lnSpc>
-              <a:spcAft>
-                <a:spcPts val="500"/>
-              </a:spcAft>
-            </a:pPr>
-            <a:r>
-              <a:rPr b="0" sz="1300">
+                <a:latin typeface="宋体" panose="02010600030101010101" pitchFamily="2" charset="-122"/>
+              </a:rPr>
+              <a:t>组员：张思成 </a:t>
+            </a:r>
+            <a:r>
+              <a:rPr sz="1300">
                 <a:solidFill>
                   <a:srgbClr val="E2F2F4"/>
                 </a:solidFill>
-                <a:latin typeface="SimSun"/>
-              </a:rPr>
-              <a:t>2 人展示</a:t>
-            </a:r>
-          </a:p>
-          <a:p>
-            <a:pPr>
-              <a:lnSpc>
-                <a:spcPct val="105000"/>
-              </a:lnSpc>
-              <a:spcAft>
-                <a:spcPts val="500"/>
-              </a:spcAft>
-            </a:pPr>
-            <a:r>
-              <a:rPr b="0" sz="1300">
+                <a:latin typeface="宋体" panose="02010600030101010101" pitchFamily="2" charset="-122"/>
+                <a:sym typeface="+mn-ea"/>
+              </a:rPr>
+              <a:t> / 程宇轩</a:t>
+            </a:r>
+            <a:r>
+              <a:rPr lang="en-US" sz="1300">
                 <a:solidFill>
                   <a:srgbClr val="E2F2F4"/>
                 </a:solidFill>
-                <a:latin typeface="SimSun"/>
-              </a:rPr>
-              <a:t>组员：张思成 / 陈浩文 / 程宇轩</a:t>
-            </a:r>
+                <a:latin typeface="宋体" panose="02010600030101010101" pitchFamily="2" charset="-122"/>
+                <a:sym typeface="+mn-ea"/>
+              </a:rPr>
+              <a:t> </a:t>
+            </a:r>
+            <a:r>
+              <a:rPr sz="1300" b="0">
+                <a:solidFill>
+                  <a:srgbClr val="E2F2F4"/>
+                </a:solidFill>
+                <a:latin typeface="宋体" panose="02010600030101010101" pitchFamily="2" charset="-122"/>
+              </a:rPr>
+              <a:t>/ 陈浩文</a:t>
+            </a:r>
+            <a:endParaRPr sz="1300" b="0">
+              <a:solidFill>
+                <a:srgbClr val="E2F2F4"/>
+              </a:solidFill>
+              <a:latin typeface="宋体" panose="02010600030101010101" pitchFamily="2" charset="-122"/>
+            </a:endParaRPr>
           </a:p>
         </p:txBody>
       </p:sp>
@@ -3488,56 +3488,27 @@
           <a:noFill/>
         </p:spPr>
         <p:txBody>
-          <a:bodyPr wrap="square" lIns="27432" rIns="27432" tIns="9144" bIns="9144" anchor="t">
+          <a:bodyPr wrap="square" lIns="27432" tIns="9144" rIns="27432" bIns="9144" anchor="t">
             <a:spAutoFit/>
           </a:bodyPr>
           <a:lstStyle/>
           <a:p>
             <a:pPr algn="l"/>
             <a:r>
-              <a:rPr b="1" sz="819">
+              <a:rPr sz="820" b="1">
                 <a:solidFill>
                   <a:srgbClr val="586874"/>
                 </a:solidFill>
-                <a:latin typeface="SimHei"/>
+                <a:latin typeface="黑体" panose="02010609060101010101" charset="-122"/>
               </a:rPr>
               <a:t>01/15</a:t>
             </a:r>
-          </a:p>
-        </p:txBody>
-      </p:sp>
-      <p:sp>
-        <p:nvSpPr>
-          <p:cNvPr id="12" name="TextBox 11"/>
-          <p:cNvSpPr txBox="1"/>
-          <p:nvPr/>
-        </p:nvSpPr>
-        <p:spPr>
-          <a:xfrm>
-            <a:off x="1060704" y="6400800"/>
-            <a:ext cx="10332720" cy="228600"/>
-          </a:xfrm>
-          <a:prstGeom prst="rect">
-            <a:avLst/>
-          </a:prstGeom>
-          <a:noFill/>
-        </p:spPr>
-        <p:txBody>
-          <a:bodyPr wrap="square" lIns="27432" rIns="27432" tIns="9144" bIns="9144" anchor="t">
-            <a:spAutoFit/>
-          </a:bodyPr>
-          <a:lstStyle/>
-          <a:p>
-            <a:pPr algn="l"/>
-            <a:r>
-              <a:rPr b="0" sz="800">
-                <a:solidFill>
-                  <a:srgbClr val="586874"/>
-                </a:solidFill>
-                <a:latin typeface="SimSun"/>
-              </a:rPr>
-              <a:t>封面插画为本材料生成示意图；事实来源见各页底部</a:t>
-            </a:r>
+            <a:endParaRPr sz="820" b="1">
+              <a:solidFill>
+                <a:srgbClr val="586874"/>
+              </a:solidFill>
+              <a:latin typeface="黑体" panose="02010609060101010101" charset="-122"/>
+            </a:endParaRPr>
           </a:p>
         </p:txBody>
       </p:sp>
@@ -3550,7 +3521,7 @@
 </file>
 
 <file path=ppt/slides/slide10.xml><?xml version="1.0" encoding="utf-8"?>
-<p:sld xmlns:a="http://schemas.openxmlformats.org/drawingml/2006/main" xmlns:p="http://schemas.openxmlformats.org/presentationml/2006/main" xmlns:r="http://schemas.openxmlformats.org/officeDocument/2006/relationships">
+<p:sld xmlns:a="http://schemas.openxmlformats.org/drawingml/2006/main" xmlns:r="http://schemas.openxmlformats.org/officeDocument/2006/relationships" xmlns:p="http://schemas.openxmlformats.org/presentationml/2006/main">
   <p:cSld>
     <p:spTree>
       <p:nvGrpSpPr>
@@ -3666,21 +3637,27 @@
           <a:noFill/>
         </p:spPr>
         <p:txBody>
-          <a:bodyPr wrap="square" lIns="27432" rIns="27432" tIns="9144" bIns="9144" anchor="t">
+          <a:bodyPr wrap="square" lIns="27432" tIns="9144" rIns="27432" bIns="9144" anchor="t">
             <a:spAutoFit/>
           </a:bodyPr>
           <a:lstStyle/>
           <a:p>
             <a:pPr algn="l"/>
             <a:r>
-              <a:rPr b="1" sz="1100">
+              <a:rPr sz="1100" b="1">
                 <a:solidFill>
                   <a:srgbClr val="1C908B"/>
                 </a:solidFill>
-                <a:latin typeface="SimHei"/>
+                <a:latin typeface="黑体" panose="02010609060101010101" charset="-122"/>
               </a:rPr>
               <a:t>证据</a:t>
             </a:r>
+            <a:endParaRPr sz="1100" b="1">
+              <a:solidFill>
+                <a:srgbClr val="1C908B"/>
+              </a:solidFill>
+              <a:latin typeface="黑体" panose="02010609060101010101" charset="-122"/>
+            </a:endParaRPr>
           </a:p>
         </p:txBody>
       </p:sp>
@@ -3701,21 +3678,27 @@
           <a:noFill/>
         </p:spPr>
         <p:txBody>
-          <a:bodyPr wrap="square" lIns="27432" rIns="27432" tIns="9144" bIns="9144" anchor="t">
+          <a:bodyPr wrap="square" lIns="27432" tIns="9144" rIns="27432" bIns="9144" anchor="t">
             <a:spAutoFit/>
           </a:bodyPr>
           <a:lstStyle/>
           <a:p>
             <a:pPr algn="l"/>
             <a:r>
-              <a:rPr b="1" sz="2550">
+              <a:rPr sz="2550" b="1">
                 <a:solidFill>
                   <a:srgbClr val="12293A"/>
                 </a:solidFill>
-                <a:latin typeface="SimHei"/>
+                <a:latin typeface="黑体" panose="02010609060101010101" charset="-122"/>
               </a:rPr>
               <a:t>证据不能直接横比</a:t>
             </a:r>
+            <a:endParaRPr sz="2550" b="1">
+              <a:solidFill>
+                <a:srgbClr val="12293A"/>
+              </a:solidFill>
+              <a:latin typeface="黑体" panose="02010609060101010101" charset="-122"/>
+            </a:endParaRPr>
           </a:p>
         </p:txBody>
       </p:sp>
@@ -3781,21 +3764,27 @@
           <a:noFill/>
         </p:spPr>
         <p:txBody>
-          <a:bodyPr wrap="square" lIns="27432" rIns="27432" tIns="9144" bIns="9144" anchor="t">
+          <a:bodyPr wrap="square" lIns="27432" tIns="9144" rIns="27432" bIns="9144" anchor="t">
             <a:spAutoFit/>
           </a:bodyPr>
           <a:lstStyle/>
           <a:p>
             <a:pPr algn="l"/>
             <a:r>
-              <a:rPr b="1" sz="1420">
+              <a:rPr sz="1420" b="1">
                 <a:solidFill>
                   <a:srgbClr val="12293A"/>
                 </a:solidFill>
-                <a:latin typeface="SimHei"/>
+                <a:latin typeface="黑体" panose="02010609060101010101" charset="-122"/>
               </a:rPr>
               <a:t>不同病种、终点、患者条件不同，不能用一个数字排名疗法。</a:t>
             </a:r>
+            <a:endParaRPr sz="1420" b="1">
+              <a:solidFill>
+                <a:srgbClr val="12293A"/>
+              </a:solidFill>
+              <a:latin typeface="黑体" panose="02010609060101010101" charset="-122"/>
+            </a:endParaRPr>
           </a:p>
         </p:txBody>
       </p:sp>
@@ -3816,56 +3805,27 @@
           <a:noFill/>
         </p:spPr>
         <p:txBody>
-          <a:bodyPr wrap="square" lIns="27432" rIns="27432" tIns="9144" bIns="9144" anchor="t">
+          <a:bodyPr wrap="square" lIns="27432" tIns="9144" rIns="27432" bIns="9144" anchor="t">
             <a:spAutoFit/>
           </a:bodyPr>
           <a:lstStyle/>
           <a:p>
             <a:pPr algn="l"/>
             <a:r>
-              <a:rPr b="1" sz="819">
+              <a:rPr sz="820" b="1">
                 <a:solidFill>
                   <a:srgbClr val="586874"/>
                 </a:solidFill>
-                <a:latin typeface="SimHei"/>
+                <a:latin typeface="黑体" panose="02010609060101010101" charset="-122"/>
               </a:rPr>
               <a:t>10/15</a:t>
             </a:r>
-          </a:p>
-        </p:txBody>
-      </p:sp>
-      <p:sp>
-        <p:nvSpPr>
-          <p:cNvPr id="9" name="TextBox 8"/>
-          <p:cNvSpPr txBox="1"/>
-          <p:nvPr/>
-        </p:nvSpPr>
-        <p:spPr>
-          <a:xfrm>
-            <a:off x="1060704" y="6400800"/>
-            <a:ext cx="10332720" cy="228600"/>
-          </a:xfrm>
-          <a:prstGeom prst="rect">
-            <a:avLst/>
-          </a:prstGeom>
-          <a:noFill/>
-        </p:spPr>
-        <p:txBody>
-          <a:bodyPr wrap="square" lIns="27432" rIns="27432" tIns="9144" bIns="9144" anchor="t">
-            <a:spAutoFit/>
-          </a:bodyPr>
-          <a:lstStyle/>
-          <a:p>
-            <a:pPr algn="l"/>
-            <a:r>
-              <a:rPr b="0" sz="800">
-                <a:solidFill>
-                  <a:srgbClr val="586874"/>
-                </a:solidFill>
-                <a:latin typeface="SimSun"/>
-              </a:rPr>
-              <a:t>资料：FDA；NCI。说明：疗效终点不同，不能直接横向排名。</a:t>
-            </a:r>
+            <a:endParaRPr sz="820" b="1">
+              <a:solidFill>
+                <a:srgbClr val="586874"/>
+              </a:solidFill>
+              <a:latin typeface="黑体" panose="02010609060101010101" charset="-122"/>
+            </a:endParaRPr>
           </a:p>
         </p:txBody>
       </p:sp>
@@ -3931,21 +3891,27 @@
           <a:noFill/>
         </p:spPr>
         <p:txBody>
-          <a:bodyPr wrap="square" lIns="27432" rIns="27432" tIns="9144" bIns="9144" anchor="t">
-            <a:spAutoFit/>
-          </a:bodyPr>
-          <a:lstStyle/>
-          <a:p>
-            <a:pPr algn="ctr"/>
-            <a:r>
-              <a:rPr b="1" sz="980">
+          <a:bodyPr wrap="square" lIns="27432" tIns="9144" rIns="27432" bIns="9144" anchor="t">
+            <a:spAutoFit/>
+          </a:bodyPr>
+          <a:lstStyle/>
+          <a:p>
+            <a:pPr algn="ctr"/>
+            <a:r>
+              <a:rPr sz="980" b="1">
                 <a:solidFill>
                   <a:srgbClr val="FFFFFF"/>
                 </a:solidFill>
-                <a:latin typeface="SimHei"/>
+                <a:latin typeface="黑体" panose="02010609060101010101" charset="-122"/>
               </a:rPr>
               <a:t>技术</a:t>
             </a:r>
+            <a:endParaRPr sz="980" b="1">
+              <a:solidFill>
+                <a:srgbClr val="FFFFFF"/>
+              </a:solidFill>
+              <a:latin typeface="黑体" panose="02010609060101010101" charset="-122"/>
+            </a:endParaRPr>
           </a:p>
         </p:txBody>
       </p:sp>
@@ -4011,21 +3977,27 @@
           <a:noFill/>
         </p:spPr>
         <p:txBody>
-          <a:bodyPr wrap="square" lIns="27432" rIns="27432" tIns="9144" bIns="9144" anchor="t">
-            <a:spAutoFit/>
-          </a:bodyPr>
-          <a:lstStyle/>
-          <a:p>
-            <a:pPr algn="ctr"/>
-            <a:r>
-              <a:rPr b="1" sz="980">
+          <a:bodyPr wrap="square" lIns="27432" tIns="9144" rIns="27432" bIns="9144" anchor="t">
+            <a:spAutoFit/>
+          </a:bodyPr>
+          <a:lstStyle/>
+          <a:p>
+            <a:pPr algn="ctr"/>
+            <a:r>
+              <a:rPr sz="980" b="1">
                 <a:solidFill>
                   <a:srgbClr val="FFFFFF"/>
                 </a:solidFill>
-                <a:latin typeface="SimHei"/>
+                <a:latin typeface="黑体" panose="02010609060101010101" charset="-122"/>
               </a:rPr>
               <a:t>代表</a:t>
             </a:r>
+            <a:endParaRPr sz="980" b="1">
+              <a:solidFill>
+                <a:srgbClr val="FFFFFF"/>
+              </a:solidFill>
+              <a:latin typeface="黑体" panose="02010609060101010101" charset="-122"/>
+            </a:endParaRPr>
           </a:p>
         </p:txBody>
       </p:sp>
@@ -4091,21 +4063,27 @@
           <a:noFill/>
         </p:spPr>
         <p:txBody>
-          <a:bodyPr wrap="square" lIns="27432" rIns="27432" tIns="9144" bIns="9144" anchor="t">
-            <a:spAutoFit/>
-          </a:bodyPr>
-          <a:lstStyle/>
-          <a:p>
-            <a:pPr algn="ctr"/>
-            <a:r>
-              <a:rPr b="1" sz="980">
+          <a:bodyPr wrap="square" lIns="27432" tIns="9144" rIns="27432" bIns="9144" anchor="t">
+            <a:spAutoFit/>
+          </a:bodyPr>
+          <a:lstStyle/>
+          <a:p>
+            <a:pPr algn="ctr"/>
+            <a:r>
+              <a:rPr sz="980" b="1">
                 <a:solidFill>
                   <a:srgbClr val="FFFFFF"/>
                 </a:solidFill>
-                <a:latin typeface="SimHei"/>
+                <a:latin typeface="黑体" panose="02010609060101010101" charset="-122"/>
               </a:rPr>
               <a:t>适用疾病</a:t>
             </a:r>
+            <a:endParaRPr sz="980" b="1">
+              <a:solidFill>
+                <a:srgbClr val="FFFFFF"/>
+              </a:solidFill>
+              <a:latin typeface="黑体" panose="02010609060101010101" charset="-122"/>
+            </a:endParaRPr>
           </a:p>
         </p:txBody>
       </p:sp>
@@ -4171,21 +4149,27 @@
           <a:noFill/>
         </p:spPr>
         <p:txBody>
-          <a:bodyPr wrap="square" lIns="27432" rIns="27432" tIns="9144" bIns="9144" anchor="t">
-            <a:spAutoFit/>
-          </a:bodyPr>
-          <a:lstStyle/>
-          <a:p>
-            <a:pPr algn="ctr"/>
-            <a:r>
-              <a:rPr b="1" sz="980">
+          <a:bodyPr wrap="square" lIns="27432" tIns="9144" rIns="27432" bIns="9144" anchor="t">
+            <a:spAutoFit/>
+          </a:bodyPr>
+          <a:lstStyle/>
+          <a:p>
+            <a:pPr algn="ctr"/>
+            <a:r>
+              <a:rPr sz="980" b="1">
                 <a:solidFill>
                   <a:srgbClr val="FFFFFF"/>
                 </a:solidFill>
-                <a:latin typeface="SimHei"/>
+                <a:latin typeface="黑体" panose="02010609060101010101" charset="-122"/>
               </a:rPr>
               <a:t>关键指标</a:t>
             </a:r>
+            <a:endParaRPr sz="980" b="1">
+              <a:solidFill>
+                <a:srgbClr val="FFFFFF"/>
+              </a:solidFill>
+              <a:latin typeface="黑体" panose="02010609060101010101" charset="-122"/>
+            </a:endParaRPr>
           </a:p>
         </p:txBody>
       </p:sp>
@@ -4251,21 +4235,27 @@
           <a:noFill/>
         </p:spPr>
         <p:txBody>
-          <a:bodyPr wrap="square" lIns="27432" rIns="27432" tIns="9144" bIns="9144" anchor="t">
-            <a:spAutoFit/>
-          </a:bodyPr>
-          <a:lstStyle/>
-          <a:p>
-            <a:pPr algn="ctr"/>
-            <a:r>
-              <a:rPr b="1" sz="980">
+          <a:bodyPr wrap="square" lIns="27432" tIns="9144" rIns="27432" bIns="9144" anchor="t">
+            <a:spAutoFit/>
+          </a:bodyPr>
+          <a:lstStyle/>
+          <a:p>
+            <a:pPr algn="ctr"/>
+            <a:r>
+              <a:rPr sz="980" b="1">
                 <a:solidFill>
                   <a:srgbClr val="FFFFFF"/>
                 </a:solidFill>
-                <a:latin typeface="SimHei"/>
+                <a:latin typeface="黑体" panose="02010609060101010101" charset="-122"/>
               </a:rPr>
               <a:t>主要风险</a:t>
             </a:r>
+            <a:endParaRPr sz="980" b="1">
+              <a:solidFill>
+                <a:srgbClr val="FFFFFF"/>
+              </a:solidFill>
+              <a:latin typeface="黑体" panose="02010609060101010101" charset="-122"/>
+            </a:endParaRPr>
           </a:p>
         </p:txBody>
       </p:sp>
@@ -4331,21 +4321,27 @@
           <a:noFill/>
         </p:spPr>
         <p:txBody>
-          <a:bodyPr wrap="square" lIns="27432" rIns="27432" tIns="9144" bIns="9144" anchor="t">
-            <a:spAutoFit/>
-          </a:bodyPr>
-          <a:lstStyle/>
-          <a:p>
-            <a:pPr algn="ctr"/>
-            <a:r>
-              <a:rPr b="1" sz="980">
+          <a:bodyPr wrap="square" lIns="27432" tIns="9144" rIns="27432" bIns="9144" anchor="t">
+            <a:spAutoFit/>
+          </a:bodyPr>
+          <a:lstStyle/>
+          <a:p>
+            <a:pPr algn="ctr"/>
+            <a:r>
+              <a:rPr sz="980" b="1">
                 <a:solidFill>
                   <a:srgbClr val="FFFFFF"/>
                 </a:solidFill>
-                <a:latin typeface="SimHei"/>
+                <a:latin typeface="黑体" panose="02010609060101010101" charset="-122"/>
               </a:rPr>
               <a:t>不能横比原因</a:t>
             </a:r>
+            <a:endParaRPr sz="980" b="1">
+              <a:solidFill>
+                <a:srgbClr val="FFFFFF"/>
+              </a:solidFill>
+              <a:latin typeface="黑体" panose="02010609060101010101" charset="-122"/>
+            </a:endParaRPr>
           </a:p>
         </p:txBody>
       </p:sp>
@@ -4411,21 +4407,27 @@
           <a:noFill/>
         </p:spPr>
         <p:txBody>
-          <a:bodyPr wrap="square" lIns="27432" rIns="27432" tIns="9144" bIns="9144" anchor="t">
-            <a:spAutoFit/>
-          </a:bodyPr>
-          <a:lstStyle/>
-          <a:p>
-            <a:pPr algn="ctr"/>
-            <a:r>
-              <a:rPr b="0" sz="840">
+          <a:bodyPr wrap="square" lIns="27432" tIns="9144" rIns="27432" bIns="9144" anchor="t">
+            <a:spAutoFit/>
+          </a:bodyPr>
+          <a:lstStyle/>
+          <a:p>
+            <a:pPr algn="ctr"/>
+            <a:r>
+              <a:rPr sz="840" b="0">
                 <a:solidFill>
                   <a:srgbClr val="141A1F"/>
                 </a:solidFill>
-                <a:latin typeface="SimSun"/>
+                <a:latin typeface="宋体" panose="02010600030101010101" pitchFamily="2" charset="-122"/>
               </a:rPr>
               <a:t>检查点</a:t>
             </a:r>
+            <a:endParaRPr sz="840" b="0">
+              <a:solidFill>
+                <a:srgbClr val="141A1F"/>
+              </a:solidFill>
+              <a:latin typeface="宋体" panose="02010600030101010101" pitchFamily="2" charset="-122"/>
+            </a:endParaRPr>
           </a:p>
         </p:txBody>
       </p:sp>
@@ -4491,21 +4493,27 @@
           <a:noFill/>
         </p:spPr>
         <p:txBody>
-          <a:bodyPr wrap="square" lIns="27432" rIns="27432" tIns="9144" bIns="9144" anchor="t">
-            <a:spAutoFit/>
-          </a:bodyPr>
-          <a:lstStyle/>
-          <a:p>
-            <a:pPr algn="ctr"/>
-            <a:r>
-              <a:rPr b="0" sz="840">
+          <a:bodyPr wrap="square" lIns="27432" tIns="9144" rIns="27432" bIns="9144" anchor="t">
+            <a:spAutoFit/>
+          </a:bodyPr>
+          <a:lstStyle/>
+          <a:p>
+            <a:pPr algn="ctr"/>
+            <a:r>
+              <a:rPr sz="840" b="0">
                 <a:solidFill>
                   <a:srgbClr val="141A1F"/>
                 </a:solidFill>
-                <a:latin typeface="SimSun"/>
+                <a:latin typeface="宋体" panose="02010600030101010101" pitchFamily="2" charset="-122"/>
               </a:rPr>
               <a:t>Pembrolizumab</a:t>
             </a:r>
+            <a:endParaRPr sz="840" b="0">
+              <a:solidFill>
+                <a:srgbClr val="141A1F"/>
+              </a:solidFill>
+              <a:latin typeface="宋体" panose="02010600030101010101" pitchFamily="2" charset="-122"/>
+            </a:endParaRPr>
           </a:p>
         </p:txBody>
       </p:sp>
@@ -4571,21 +4579,27 @@
           <a:noFill/>
         </p:spPr>
         <p:txBody>
-          <a:bodyPr wrap="square" lIns="27432" rIns="27432" tIns="9144" bIns="9144" anchor="t">
-            <a:spAutoFit/>
-          </a:bodyPr>
-          <a:lstStyle/>
-          <a:p>
-            <a:pPr algn="ctr"/>
-            <a:r>
-              <a:rPr b="0" sz="840">
+          <a:bodyPr wrap="square" lIns="27432" tIns="9144" rIns="27432" bIns="9144" anchor="t">
+            <a:spAutoFit/>
+          </a:bodyPr>
+          <a:lstStyle/>
+          <a:p>
+            <a:pPr algn="ctr"/>
+            <a:r>
+              <a:rPr sz="840" b="0">
                 <a:solidFill>
                   <a:srgbClr val="141A1F"/>
                 </a:solidFill>
-                <a:latin typeface="SimSun"/>
+                <a:latin typeface="宋体" panose="02010600030101010101" pitchFamily="2" charset="-122"/>
               </a:rPr>
               <a:t>TMB-H 实体瘤</a:t>
             </a:r>
+            <a:endParaRPr sz="840" b="0">
+              <a:solidFill>
+                <a:srgbClr val="141A1F"/>
+              </a:solidFill>
+              <a:latin typeface="宋体" panose="02010600030101010101" pitchFamily="2" charset="-122"/>
+            </a:endParaRPr>
           </a:p>
         </p:txBody>
       </p:sp>
@@ -4651,21 +4665,27 @@
           <a:noFill/>
         </p:spPr>
         <p:txBody>
-          <a:bodyPr wrap="square" lIns="27432" rIns="27432" tIns="9144" bIns="9144" anchor="t">
-            <a:spAutoFit/>
-          </a:bodyPr>
-          <a:lstStyle/>
-          <a:p>
-            <a:pPr algn="ctr"/>
-            <a:r>
-              <a:rPr b="0" sz="840">
+          <a:bodyPr wrap="square" lIns="27432" tIns="9144" rIns="27432" bIns="9144" anchor="t">
+            <a:spAutoFit/>
+          </a:bodyPr>
+          <a:lstStyle/>
+          <a:p>
+            <a:pPr algn="ctr"/>
+            <a:r>
+              <a:rPr sz="840" b="0">
                 <a:solidFill>
                   <a:srgbClr val="141A1F"/>
                 </a:solidFill>
-                <a:latin typeface="SimSun"/>
+                <a:latin typeface="宋体" panose="02010600030101010101" pitchFamily="2" charset="-122"/>
               </a:rPr>
               <a:t>ORR 29%</a:t>
             </a:r>
+            <a:endParaRPr sz="840" b="0">
+              <a:solidFill>
+                <a:srgbClr val="141A1F"/>
+              </a:solidFill>
+              <a:latin typeface="宋体" panose="02010600030101010101" pitchFamily="2" charset="-122"/>
+            </a:endParaRPr>
           </a:p>
         </p:txBody>
       </p:sp>
@@ -4731,21 +4751,27 @@
           <a:noFill/>
         </p:spPr>
         <p:txBody>
-          <a:bodyPr wrap="square" lIns="27432" rIns="27432" tIns="9144" bIns="9144" anchor="t">
-            <a:spAutoFit/>
-          </a:bodyPr>
-          <a:lstStyle/>
-          <a:p>
-            <a:pPr algn="ctr"/>
-            <a:r>
-              <a:rPr b="0" sz="840">
+          <a:bodyPr wrap="square" lIns="27432" tIns="9144" rIns="27432" bIns="9144" anchor="t">
+            <a:spAutoFit/>
+          </a:bodyPr>
+          <a:lstStyle/>
+          <a:p>
+            <a:pPr algn="ctr"/>
+            <a:r>
+              <a:rPr sz="840" b="0">
                 <a:solidFill>
                   <a:srgbClr val="141A1F"/>
                 </a:solidFill>
-                <a:latin typeface="SimSun"/>
+                <a:latin typeface="宋体" panose="02010600030101010101" pitchFamily="2" charset="-122"/>
               </a:rPr>
               <a:t>免疫相关不良反应</a:t>
             </a:r>
+            <a:endParaRPr sz="840" b="0">
+              <a:solidFill>
+                <a:srgbClr val="141A1F"/>
+              </a:solidFill>
+              <a:latin typeface="宋体" panose="02010600030101010101" pitchFamily="2" charset="-122"/>
+            </a:endParaRPr>
           </a:p>
         </p:txBody>
       </p:sp>
@@ -4811,21 +4837,27 @@
           <a:noFill/>
         </p:spPr>
         <p:txBody>
-          <a:bodyPr wrap="square" lIns="27432" rIns="27432" tIns="9144" bIns="9144" anchor="t">
-            <a:spAutoFit/>
-          </a:bodyPr>
-          <a:lstStyle/>
-          <a:p>
-            <a:pPr algn="ctr"/>
-            <a:r>
-              <a:rPr b="0" sz="840">
+          <a:bodyPr wrap="square" lIns="27432" tIns="9144" rIns="27432" bIns="9144" anchor="t">
+            <a:spAutoFit/>
+          </a:bodyPr>
+          <a:lstStyle/>
+          <a:p>
+            <a:pPr algn="ctr"/>
+            <a:r>
+              <a:rPr sz="840" b="0">
                 <a:solidFill>
                   <a:srgbClr val="141A1F"/>
                 </a:solidFill>
-                <a:latin typeface="SimSun"/>
+                <a:latin typeface="宋体" panose="02010600030101010101" pitchFamily="2" charset="-122"/>
               </a:rPr>
               <a:t>分子特征入组</a:t>
             </a:r>
+            <a:endParaRPr sz="840" b="0">
+              <a:solidFill>
+                <a:srgbClr val="141A1F"/>
+              </a:solidFill>
+              <a:latin typeface="宋体" panose="02010600030101010101" pitchFamily="2" charset="-122"/>
+            </a:endParaRPr>
           </a:p>
         </p:txBody>
       </p:sp>
@@ -4891,21 +4923,27 @@
           <a:noFill/>
         </p:spPr>
         <p:txBody>
-          <a:bodyPr wrap="square" lIns="27432" rIns="27432" tIns="9144" bIns="9144" anchor="t">
-            <a:spAutoFit/>
-          </a:bodyPr>
-          <a:lstStyle/>
-          <a:p>
-            <a:pPr algn="ctr"/>
-            <a:r>
-              <a:rPr b="0" sz="840">
+          <a:bodyPr wrap="square" lIns="27432" tIns="9144" rIns="27432" bIns="9144" anchor="t">
+            <a:spAutoFit/>
+          </a:bodyPr>
+          <a:lstStyle/>
+          <a:p>
+            <a:pPr algn="ctr"/>
+            <a:r>
+              <a:rPr sz="840" b="0">
                 <a:solidFill>
                   <a:srgbClr val="141A1F"/>
                 </a:solidFill>
-                <a:latin typeface="SimSun"/>
+                <a:latin typeface="宋体" panose="02010600030101010101" pitchFamily="2" charset="-122"/>
               </a:rPr>
               <a:t>CAR-T</a:t>
             </a:r>
+            <a:endParaRPr sz="840" b="0">
+              <a:solidFill>
+                <a:srgbClr val="141A1F"/>
+              </a:solidFill>
+              <a:latin typeface="宋体" panose="02010600030101010101" pitchFamily="2" charset="-122"/>
+            </a:endParaRPr>
           </a:p>
         </p:txBody>
       </p:sp>
@@ -4971,21 +5009,27 @@
           <a:noFill/>
         </p:spPr>
         <p:txBody>
-          <a:bodyPr wrap="square" lIns="27432" rIns="27432" tIns="9144" bIns="9144" anchor="t">
-            <a:spAutoFit/>
-          </a:bodyPr>
-          <a:lstStyle/>
-          <a:p>
-            <a:pPr algn="ctr"/>
-            <a:r>
-              <a:rPr b="0" sz="840">
+          <a:bodyPr wrap="square" lIns="27432" tIns="9144" rIns="27432" bIns="9144" anchor="t">
+            <a:spAutoFit/>
+          </a:bodyPr>
+          <a:lstStyle/>
+          <a:p>
+            <a:pPr algn="ctr"/>
+            <a:r>
+              <a:rPr sz="840" b="0">
                 <a:solidFill>
                   <a:srgbClr val="141A1F"/>
                 </a:solidFill>
-                <a:latin typeface="SimSun"/>
+                <a:latin typeface="宋体" panose="02010600030101010101" pitchFamily="2" charset="-122"/>
               </a:rPr>
               <a:t>Kymriah</a:t>
             </a:r>
+            <a:endParaRPr sz="840" b="0">
+              <a:solidFill>
+                <a:srgbClr val="141A1F"/>
+              </a:solidFill>
+              <a:latin typeface="宋体" panose="02010600030101010101" pitchFamily="2" charset="-122"/>
+            </a:endParaRPr>
           </a:p>
         </p:txBody>
       </p:sp>
@@ -5051,21 +5095,27 @@
           <a:noFill/>
         </p:spPr>
         <p:txBody>
-          <a:bodyPr wrap="square" lIns="27432" rIns="27432" tIns="9144" bIns="9144" anchor="t">
-            <a:spAutoFit/>
-          </a:bodyPr>
-          <a:lstStyle/>
-          <a:p>
-            <a:pPr algn="ctr"/>
-            <a:r>
-              <a:rPr b="0" sz="840">
+          <a:bodyPr wrap="square" lIns="27432" tIns="9144" rIns="27432" bIns="9144" anchor="t">
+            <a:spAutoFit/>
+          </a:bodyPr>
+          <a:lstStyle/>
+          <a:p>
+            <a:pPr algn="ctr"/>
+            <a:r>
+              <a:rPr sz="840" b="0">
                 <a:solidFill>
                   <a:srgbClr val="141A1F"/>
                 </a:solidFill>
-                <a:latin typeface="SimSun"/>
+                <a:latin typeface="宋体" panose="02010600030101010101" pitchFamily="2" charset="-122"/>
               </a:rPr>
               <a:t>儿童/青年 B-ALL</a:t>
             </a:r>
+            <a:endParaRPr sz="840" b="0">
+              <a:solidFill>
+                <a:srgbClr val="141A1F"/>
+              </a:solidFill>
+              <a:latin typeface="宋体" panose="02010600030101010101" pitchFamily="2" charset="-122"/>
+            </a:endParaRPr>
           </a:p>
         </p:txBody>
       </p:sp>
@@ -5131,21 +5181,27 @@
           <a:noFill/>
         </p:spPr>
         <p:txBody>
-          <a:bodyPr wrap="square" lIns="27432" rIns="27432" tIns="9144" bIns="9144" anchor="t">
-            <a:spAutoFit/>
-          </a:bodyPr>
-          <a:lstStyle/>
-          <a:p>
-            <a:pPr algn="ctr"/>
-            <a:r>
-              <a:rPr b="0" sz="840">
+          <a:bodyPr wrap="square" lIns="27432" tIns="9144" rIns="27432" bIns="9144" anchor="t">
+            <a:spAutoFit/>
+          </a:bodyPr>
+          <a:lstStyle/>
+          <a:p>
+            <a:pPr algn="ctr"/>
+            <a:r>
+              <a:rPr sz="840" b="0">
                 <a:solidFill>
                   <a:srgbClr val="141A1F"/>
                 </a:solidFill>
-                <a:latin typeface="SimSun"/>
+                <a:latin typeface="宋体" panose="02010600030101010101" pitchFamily="2" charset="-122"/>
               </a:rPr>
               <a:t>缓解率 83%</a:t>
             </a:r>
+            <a:endParaRPr sz="840" b="0">
+              <a:solidFill>
+                <a:srgbClr val="141A1F"/>
+              </a:solidFill>
+              <a:latin typeface="宋体" panose="02010600030101010101" pitchFamily="2" charset="-122"/>
+            </a:endParaRPr>
           </a:p>
         </p:txBody>
       </p:sp>
@@ -5211,21 +5267,27 @@
           <a:noFill/>
         </p:spPr>
         <p:txBody>
-          <a:bodyPr wrap="square" lIns="27432" rIns="27432" tIns="9144" bIns="9144" anchor="t">
-            <a:spAutoFit/>
-          </a:bodyPr>
-          <a:lstStyle/>
-          <a:p>
-            <a:pPr algn="ctr"/>
-            <a:r>
-              <a:rPr b="0" sz="840">
+          <a:bodyPr wrap="square" lIns="27432" tIns="9144" rIns="27432" bIns="9144" anchor="t">
+            <a:spAutoFit/>
+          </a:bodyPr>
+          <a:lstStyle/>
+          <a:p>
+            <a:pPr algn="ctr"/>
+            <a:r>
+              <a:rPr sz="840" b="0">
                 <a:solidFill>
                   <a:srgbClr val="141A1F"/>
                 </a:solidFill>
-                <a:latin typeface="SimSun"/>
+                <a:latin typeface="宋体" panose="02010600030101010101" pitchFamily="2" charset="-122"/>
               </a:rPr>
               <a:t>CRS / ICANS</a:t>
             </a:r>
+            <a:endParaRPr sz="840" b="0">
+              <a:solidFill>
+                <a:srgbClr val="141A1F"/>
+              </a:solidFill>
+              <a:latin typeface="宋体" panose="02010600030101010101" pitchFamily="2" charset="-122"/>
+            </a:endParaRPr>
           </a:p>
         </p:txBody>
       </p:sp>
@@ -5291,21 +5353,27 @@
           <a:noFill/>
         </p:spPr>
         <p:txBody>
-          <a:bodyPr wrap="square" lIns="27432" rIns="27432" tIns="9144" bIns="9144" anchor="t">
-            <a:spAutoFit/>
-          </a:bodyPr>
-          <a:lstStyle/>
-          <a:p>
-            <a:pPr algn="ctr"/>
-            <a:r>
-              <a:rPr b="0" sz="840">
+          <a:bodyPr wrap="square" lIns="27432" tIns="9144" rIns="27432" bIns="9144" anchor="t">
+            <a:spAutoFit/>
+          </a:bodyPr>
+          <a:lstStyle/>
+          <a:p>
+            <a:pPr algn="ctr"/>
+            <a:r>
+              <a:rPr sz="840" b="0">
                 <a:solidFill>
                   <a:srgbClr val="141A1F"/>
                 </a:solidFill>
-                <a:latin typeface="SimSun"/>
+                <a:latin typeface="宋体" panose="02010600030101010101" pitchFamily="2" charset="-122"/>
               </a:rPr>
               <a:t>血液肿瘤场景</a:t>
             </a:r>
+            <a:endParaRPr sz="840" b="0">
+              <a:solidFill>
+                <a:srgbClr val="141A1F"/>
+              </a:solidFill>
+              <a:latin typeface="宋体" panose="02010600030101010101" pitchFamily="2" charset="-122"/>
+            </a:endParaRPr>
           </a:p>
         </p:txBody>
       </p:sp>
@@ -5371,21 +5439,27 @@
           <a:noFill/>
         </p:spPr>
         <p:txBody>
-          <a:bodyPr wrap="square" lIns="27432" rIns="27432" tIns="9144" bIns="9144" anchor="t">
-            <a:spAutoFit/>
-          </a:bodyPr>
-          <a:lstStyle/>
-          <a:p>
-            <a:pPr algn="ctr"/>
-            <a:r>
-              <a:rPr b="0" sz="840">
+          <a:bodyPr wrap="square" lIns="27432" tIns="9144" rIns="27432" bIns="9144" anchor="t">
+            <a:spAutoFit/>
+          </a:bodyPr>
+          <a:lstStyle/>
+          <a:p>
+            <a:pPr algn="ctr"/>
+            <a:r>
+              <a:rPr sz="840" b="0">
                 <a:solidFill>
                   <a:srgbClr val="141A1F"/>
                 </a:solidFill>
-                <a:latin typeface="SimSun"/>
+                <a:latin typeface="宋体" panose="02010600030101010101" pitchFamily="2" charset="-122"/>
               </a:rPr>
               <a:t>CAR-T</a:t>
             </a:r>
+            <a:endParaRPr sz="840" b="0">
+              <a:solidFill>
+                <a:srgbClr val="141A1F"/>
+              </a:solidFill>
+              <a:latin typeface="宋体" panose="02010600030101010101" pitchFamily="2" charset="-122"/>
+            </a:endParaRPr>
           </a:p>
         </p:txBody>
       </p:sp>
@@ -5451,21 +5525,27 @@
           <a:noFill/>
         </p:spPr>
         <p:txBody>
-          <a:bodyPr wrap="square" lIns="27432" rIns="27432" tIns="9144" bIns="9144" anchor="t">
-            <a:spAutoFit/>
-          </a:bodyPr>
-          <a:lstStyle/>
-          <a:p>
-            <a:pPr algn="ctr"/>
-            <a:r>
-              <a:rPr b="0" sz="840">
+          <a:bodyPr wrap="square" lIns="27432" tIns="9144" rIns="27432" bIns="9144" anchor="t">
+            <a:spAutoFit/>
+          </a:bodyPr>
+          <a:lstStyle/>
+          <a:p>
+            <a:pPr algn="ctr"/>
+            <a:r>
+              <a:rPr sz="840" b="0">
                 <a:solidFill>
                   <a:srgbClr val="141A1F"/>
                 </a:solidFill>
-                <a:latin typeface="SimSun"/>
+                <a:latin typeface="宋体" panose="02010600030101010101" pitchFamily="2" charset="-122"/>
               </a:rPr>
               <a:t>Aucatzyl</a:t>
             </a:r>
+            <a:endParaRPr sz="840" b="0">
+              <a:solidFill>
+                <a:srgbClr val="141A1F"/>
+              </a:solidFill>
+              <a:latin typeface="宋体" panose="02010600030101010101" pitchFamily="2" charset="-122"/>
+            </a:endParaRPr>
           </a:p>
         </p:txBody>
       </p:sp>
@@ -5531,21 +5611,27 @@
           <a:noFill/>
         </p:spPr>
         <p:txBody>
-          <a:bodyPr wrap="square" lIns="27432" rIns="27432" tIns="9144" bIns="9144" anchor="t">
-            <a:spAutoFit/>
-          </a:bodyPr>
-          <a:lstStyle/>
-          <a:p>
-            <a:pPr algn="ctr"/>
-            <a:r>
-              <a:rPr b="0" sz="840">
+          <a:bodyPr wrap="square" lIns="27432" tIns="9144" rIns="27432" bIns="9144" anchor="t">
+            <a:spAutoFit/>
+          </a:bodyPr>
+          <a:lstStyle/>
+          <a:p>
+            <a:pPr algn="ctr"/>
+            <a:r>
+              <a:rPr sz="840" b="0">
                 <a:solidFill>
                   <a:srgbClr val="141A1F"/>
                 </a:solidFill>
-                <a:latin typeface="SimSun"/>
+                <a:latin typeface="宋体" panose="02010600030101010101" pitchFamily="2" charset="-122"/>
               </a:rPr>
               <a:t>成人 B-ALL</a:t>
             </a:r>
+            <a:endParaRPr sz="840" b="0">
+              <a:solidFill>
+                <a:srgbClr val="141A1F"/>
+              </a:solidFill>
+              <a:latin typeface="宋体" panose="02010600030101010101" pitchFamily="2" charset="-122"/>
+            </a:endParaRPr>
           </a:p>
         </p:txBody>
       </p:sp>
@@ -5611,21 +5697,27 @@
           <a:noFill/>
         </p:spPr>
         <p:txBody>
-          <a:bodyPr wrap="square" lIns="27432" rIns="27432" tIns="9144" bIns="9144" anchor="t">
-            <a:spAutoFit/>
-          </a:bodyPr>
-          <a:lstStyle/>
-          <a:p>
-            <a:pPr algn="ctr"/>
-            <a:r>
-              <a:rPr b="0" sz="840">
+          <a:bodyPr wrap="square" lIns="27432" tIns="9144" rIns="27432" bIns="9144" anchor="t">
+            <a:spAutoFit/>
+          </a:bodyPr>
+          <a:lstStyle/>
+          <a:p>
+            <a:pPr algn="ctr"/>
+            <a:r>
+              <a:rPr sz="840" b="0">
                 <a:solidFill>
                   <a:srgbClr val="141A1F"/>
                 </a:solidFill>
-                <a:latin typeface="SimSun"/>
+                <a:latin typeface="宋体" panose="02010600030101010101" pitchFamily="2" charset="-122"/>
               </a:rPr>
               <a:t>CR 42%</a:t>
             </a:r>
+            <a:endParaRPr sz="840" b="0">
+              <a:solidFill>
+                <a:srgbClr val="141A1F"/>
+              </a:solidFill>
+              <a:latin typeface="宋体" panose="02010600030101010101" pitchFamily="2" charset="-122"/>
+            </a:endParaRPr>
           </a:p>
         </p:txBody>
       </p:sp>
@@ -5691,21 +5783,27 @@
           <a:noFill/>
         </p:spPr>
         <p:txBody>
-          <a:bodyPr wrap="square" lIns="27432" rIns="27432" tIns="9144" bIns="9144" anchor="t">
-            <a:spAutoFit/>
-          </a:bodyPr>
-          <a:lstStyle/>
-          <a:p>
-            <a:pPr algn="ctr"/>
-            <a:r>
-              <a:rPr b="0" sz="840">
+          <a:bodyPr wrap="square" lIns="27432" tIns="9144" rIns="27432" bIns="9144" anchor="t">
+            <a:spAutoFit/>
+          </a:bodyPr>
+          <a:lstStyle/>
+          <a:p>
+            <a:pPr algn="ctr"/>
+            <a:r>
+              <a:rPr sz="840" b="0">
                 <a:solidFill>
                   <a:srgbClr val="141A1F"/>
                 </a:solidFill>
-                <a:latin typeface="SimSun"/>
+                <a:latin typeface="宋体" panose="02010600030101010101" pitchFamily="2" charset="-122"/>
               </a:rPr>
               <a:t>CRS 75%</a:t>
             </a:r>
+            <a:endParaRPr sz="840" b="0">
+              <a:solidFill>
+                <a:srgbClr val="141A1F"/>
+              </a:solidFill>
+              <a:latin typeface="宋体" panose="02010600030101010101" pitchFamily="2" charset="-122"/>
+            </a:endParaRPr>
           </a:p>
         </p:txBody>
       </p:sp>
@@ -5771,21 +5869,27 @@
           <a:noFill/>
         </p:spPr>
         <p:txBody>
-          <a:bodyPr wrap="square" lIns="27432" rIns="27432" tIns="9144" bIns="9144" anchor="t">
-            <a:spAutoFit/>
-          </a:bodyPr>
-          <a:lstStyle/>
-          <a:p>
-            <a:pPr algn="ctr"/>
-            <a:r>
-              <a:rPr b="0" sz="840">
+          <a:bodyPr wrap="square" lIns="27432" tIns="9144" rIns="27432" bIns="9144" anchor="t">
+            <a:spAutoFit/>
+          </a:bodyPr>
+          <a:lstStyle/>
+          <a:p>
+            <a:pPr algn="ctr"/>
+            <a:r>
+              <a:rPr sz="840" b="0">
                 <a:solidFill>
                   <a:srgbClr val="141A1F"/>
                 </a:solidFill>
-                <a:latin typeface="SimSun"/>
+                <a:latin typeface="宋体" panose="02010600030101010101" pitchFamily="2" charset="-122"/>
               </a:rPr>
               <a:t>终点为 CR</a:t>
             </a:r>
+            <a:endParaRPr sz="840" b="0">
+              <a:solidFill>
+                <a:srgbClr val="141A1F"/>
+              </a:solidFill>
+              <a:latin typeface="宋体" panose="02010600030101010101" pitchFamily="2" charset="-122"/>
+            </a:endParaRPr>
           </a:p>
         </p:txBody>
       </p:sp>
@@ -5851,21 +5955,27 @@
           <a:noFill/>
         </p:spPr>
         <p:txBody>
-          <a:bodyPr wrap="square" lIns="27432" rIns="27432" tIns="9144" bIns="9144" anchor="t">
-            <a:spAutoFit/>
-          </a:bodyPr>
-          <a:lstStyle/>
-          <a:p>
-            <a:pPr algn="ctr"/>
-            <a:r>
-              <a:rPr b="0" sz="840">
+          <a:bodyPr wrap="square" lIns="27432" tIns="9144" rIns="27432" bIns="9144" anchor="t">
+            <a:spAutoFit/>
+          </a:bodyPr>
+          <a:lstStyle/>
+          <a:p>
+            <a:pPr algn="ctr"/>
+            <a:r>
+              <a:rPr sz="840" b="0">
                 <a:solidFill>
                   <a:srgbClr val="141A1F"/>
                 </a:solidFill>
-                <a:latin typeface="SimSun"/>
+                <a:latin typeface="宋体" panose="02010600030101010101" pitchFamily="2" charset="-122"/>
               </a:rPr>
               <a:t>TIL</a:t>
             </a:r>
+            <a:endParaRPr sz="840" b="0">
+              <a:solidFill>
+                <a:srgbClr val="141A1F"/>
+              </a:solidFill>
+              <a:latin typeface="宋体" panose="02010600030101010101" pitchFamily="2" charset="-122"/>
+            </a:endParaRPr>
           </a:p>
         </p:txBody>
       </p:sp>
@@ -5931,21 +6041,27 @@
           <a:noFill/>
         </p:spPr>
         <p:txBody>
-          <a:bodyPr wrap="square" lIns="27432" rIns="27432" tIns="9144" bIns="9144" anchor="t">
-            <a:spAutoFit/>
-          </a:bodyPr>
-          <a:lstStyle/>
-          <a:p>
-            <a:pPr algn="ctr"/>
-            <a:r>
-              <a:rPr b="0" sz="840">
+          <a:bodyPr wrap="square" lIns="27432" tIns="9144" rIns="27432" bIns="9144" anchor="t">
+            <a:spAutoFit/>
+          </a:bodyPr>
+          <a:lstStyle/>
+          <a:p>
+            <a:pPr algn="ctr"/>
+            <a:r>
+              <a:rPr sz="840" b="0">
                 <a:solidFill>
                   <a:srgbClr val="141A1F"/>
                 </a:solidFill>
-                <a:latin typeface="SimSun"/>
+                <a:latin typeface="宋体" panose="02010600030101010101" pitchFamily="2" charset="-122"/>
               </a:rPr>
               <a:t>Amtagvi</a:t>
             </a:r>
+            <a:endParaRPr sz="840" b="0">
+              <a:solidFill>
+                <a:srgbClr val="141A1F"/>
+              </a:solidFill>
+              <a:latin typeface="宋体" panose="02010600030101010101" pitchFamily="2" charset="-122"/>
+            </a:endParaRPr>
           </a:p>
         </p:txBody>
       </p:sp>
@@ -6011,21 +6127,27 @@
           <a:noFill/>
         </p:spPr>
         <p:txBody>
-          <a:bodyPr wrap="square" lIns="27432" rIns="27432" tIns="9144" bIns="9144" anchor="t">
-            <a:spAutoFit/>
-          </a:bodyPr>
-          <a:lstStyle/>
-          <a:p>
-            <a:pPr algn="ctr"/>
-            <a:r>
-              <a:rPr b="0" sz="840">
+          <a:bodyPr wrap="square" lIns="27432" tIns="9144" rIns="27432" bIns="9144" anchor="t">
+            <a:spAutoFit/>
+          </a:bodyPr>
+          <a:lstStyle/>
+          <a:p>
+            <a:pPr algn="ctr"/>
+            <a:r>
+              <a:rPr sz="840" b="0">
                 <a:solidFill>
                   <a:srgbClr val="141A1F"/>
                 </a:solidFill>
-                <a:latin typeface="SimSun"/>
+                <a:latin typeface="宋体" panose="02010600030101010101" pitchFamily="2" charset="-122"/>
               </a:rPr>
               <a:t>晚期黑色素瘤</a:t>
             </a:r>
+            <a:endParaRPr sz="840" b="0">
+              <a:solidFill>
+                <a:srgbClr val="141A1F"/>
+              </a:solidFill>
+              <a:latin typeface="宋体" panose="02010600030101010101" pitchFamily="2" charset="-122"/>
+            </a:endParaRPr>
           </a:p>
         </p:txBody>
       </p:sp>
@@ -6091,21 +6213,27 @@
           <a:noFill/>
         </p:spPr>
         <p:txBody>
-          <a:bodyPr wrap="square" lIns="27432" rIns="27432" tIns="9144" bIns="9144" anchor="t">
-            <a:spAutoFit/>
-          </a:bodyPr>
-          <a:lstStyle/>
-          <a:p>
-            <a:pPr algn="ctr"/>
-            <a:r>
-              <a:rPr b="0" sz="840">
+          <a:bodyPr wrap="square" lIns="27432" tIns="9144" rIns="27432" bIns="9144" anchor="t">
+            <a:spAutoFit/>
+          </a:bodyPr>
+          <a:lstStyle/>
+          <a:p>
+            <a:pPr algn="ctr"/>
+            <a:r>
+              <a:rPr sz="840" b="0">
                 <a:solidFill>
                   <a:srgbClr val="141A1F"/>
                 </a:solidFill>
-                <a:latin typeface="SimSun"/>
+                <a:latin typeface="宋体" panose="02010600030101010101" pitchFamily="2" charset="-122"/>
               </a:rPr>
               <a:t>ORR 31.5%</a:t>
             </a:r>
+            <a:endParaRPr sz="840" b="0">
+              <a:solidFill>
+                <a:srgbClr val="141A1F"/>
+              </a:solidFill>
+              <a:latin typeface="宋体" panose="02010600030101010101" pitchFamily="2" charset="-122"/>
+            </a:endParaRPr>
           </a:p>
         </p:txBody>
       </p:sp>
@@ -6171,21 +6299,27 @@
           <a:noFill/>
         </p:spPr>
         <p:txBody>
-          <a:bodyPr wrap="square" lIns="27432" rIns="27432" tIns="9144" bIns="9144" anchor="t">
-            <a:spAutoFit/>
-          </a:bodyPr>
-          <a:lstStyle/>
-          <a:p>
-            <a:pPr algn="ctr"/>
-            <a:r>
-              <a:rPr b="0" sz="840">
+          <a:bodyPr wrap="square" lIns="27432" tIns="9144" rIns="27432" bIns="9144" anchor="t">
+            <a:spAutoFit/>
+          </a:bodyPr>
+          <a:lstStyle/>
+          <a:p>
+            <a:pPr algn="ctr"/>
+            <a:r>
+              <a:rPr sz="840" b="0">
                 <a:solidFill>
                   <a:srgbClr val="141A1F"/>
                 </a:solidFill>
-                <a:latin typeface="SimSun"/>
+                <a:latin typeface="宋体" panose="02010600030101010101" pitchFamily="2" charset="-122"/>
               </a:rPr>
               <a:t>治疗相关毒性</a:t>
             </a:r>
+            <a:endParaRPr sz="840" b="0">
+              <a:solidFill>
+                <a:srgbClr val="141A1F"/>
+              </a:solidFill>
+              <a:latin typeface="宋体" panose="02010600030101010101" pitchFamily="2" charset="-122"/>
+            </a:endParaRPr>
           </a:p>
         </p:txBody>
       </p:sp>
@@ -6251,21 +6385,27 @@
           <a:noFill/>
         </p:spPr>
         <p:txBody>
-          <a:bodyPr wrap="square" lIns="27432" rIns="27432" tIns="9144" bIns="9144" anchor="t">
-            <a:spAutoFit/>
-          </a:bodyPr>
-          <a:lstStyle/>
-          <a:p>
-            <a:pPr algn="ctr"/>
-            <a:r>
-              <a:rPr b="0" sz="840">
+          <a:bodyPr wrap="square" lIns="27432" tIns="9144" rIns="27432" bIns="9144" anchor="t">
+            <a:spAutoFit/>
+          </a:bodyPr>
+          <a:lstStyle/>
+          <a:p>
+            <a:pPr algn="ctr"/>
+            <a:r>
+              <a:rPr sz="840" b="0">
                 <a:solidFill>
                   <a:srgbClr val="141A1F"/>
                 </a:solidFill>
-                <a:latin typeface="SimSun"/>
+                <a:latin typeface="宋体" panose="02010600030101010101" pitchFamily="2" charset="-122"/>
               </a:rPr>
               <a:t>加速批准人群</a:t>
             </a:r>
+            <a:endParaRPr sz="840" b="0">
+              <a:solidFill>
+                <a:srgbClr val="141A1F"/>
+              </a:solidFill>
+              <a:latin typeface="宋体" panose="02010600030101010101" pitchFamily="2" charset="-122"/>
+            </a:endParaRPr>
           </a:p>
         </p:txBody>
       </p:sp>
@@ -6331,21 +6471,27 @@
           <a:noFill/>
         </p:spPr>
         <p:txBody>
-          <a:bodyPr wrap="square" lIns="27432" rIns="27432" tIns="9144" bIns="9144" anchor="t">
-            <a:spAutoFit/>
-          </a:bodyPr>
-          <a:lstStyle/>
-          <a:p>
-            <a:pPr algn="ctr"/>
-            <a:r>
-              <a:rPr b="1" sz="1520">
+          <a:bodyPr wrap="square" lIns="27432" tIns="9144" rIns="27432" bIns="9144" anchor="t">
+            <a:spAutoFit/>
+          </a:bodyPr>
+          <a:lstStyle/>
+          <a:p>
+            <a:pPr algn="ctr"/>
+            <a:r>
+              <a:rPr sz="1520" b="1">
                 <a:solidFill>
                   <a:srgbClr val="FFFFFF"/>
                 </a:solidFill>
-                <a:latin typeface="SimHei"/>
+                <a:latin typeface="黑体" panose="02010609060101010101" charset="-122"/>
               </a:rPr>
               <a:t>读法：这些数据证明“有真实证据”，不证明“百分比最高的疗法最好”。</a:t>
             </a:r>
+            <a:endParaRPr sz="1520" b="1">
+              <a:solidFill>
+                <a:srgbClr val="FFFFFF"/>
+              </a:solidFill>
+              <a:latin typeface="黑体" panose="02010609060101010101" charset="-122"/>
+            </a:endParaRPr>
           </a:p>
         </p:txBody>
       </p:sp>
@@ -6358,7 +6504,7 @@
 </file>
 
 <file path=ppt/slides/slide11.xml><?xml version="1.0" encoding="utf-8"?>
-<p:sld xmlns:a="http://schemas.openxmlformats.org/drawingml/2006/main" xmlns:p="http://schemas.openxmlformats.org/presentationml/2006/main" xmlns:r="http://schemas.openxmlformats.org/officeDocument/2006/relationships">
+<p:sld xmlns:a="http://schemas.openxmlformats.org/drawingml/2006/main" xmlns:r="http://schemas.openxmlformats.org/officeDocument/2006/relationships" xmlns:p="http://schemas.openxmlformats.org/presentationml/2006/main">
   <p:cSld>
     <p:spTree>
       <p:nvGrpSpPr>
@@ -6474,21 +6620,27 @@
           <a:noFill/>
         </p:spPr>
         <p:txBody>
-          <a:bodyPr wrap="square" lIns="27432" rIns="27432" tIns="9144" bIns="9144" anchor="t">
+          <a:bodyPr wrap="square" lIns="27432" tIns="9144" rIns="27432" bIns="9144" anchor="t">
             <a:spAutoFit/>
           </a:bodyPr>
           <a:lstStyle/>
           <a:p>
             <a:pPr algn="l"/>
             <a:r>
-              <a:rPr b="1" sz="1100">
+              <a:rPr sz="1100" b="1">
                 <a:solidFill>
                   <a:srgbClr val="1C908B"/>
                 </a:solidFill>
-                <a:latin typeface="SimHei"/>
+                <a:latin typeface="黑体" panose="02010609060101010101" charset="-122"/>
               </a:rPr>
               <a:t>路径</a:t>
             </a:r>
+            <a:endParaRPr sz="1100" b="1">
+              <a:solidFill>
+                <a:srgbClr val="1C908B"/>
+              </a:solidFill>
+              <a:latin typeface="黑体" panose="02010609060101010101" charset="-122"/>
+            </a:endParaRPr>
           </a:p>
         </p:txBody>
       </p:sp>
@@ -6509,21 +6661,27 @@
           <a:noFill/>
         </p:spPr>
         <p:txBody>
-          <a:bodyPr wrap="square" lIns="27432" rIns="27432" tIns="9144" bIns="9144" anchor="t">
+          <a:bodyPr wrap="square" lIns="27432" tIns="9144" rIns="27432" bIns="9144" anchor="t">
             <a:spAutoFit/>
           </a:bodyPr>
           <a:lstStyle/>
           <a:p>
             <a:pPr algn="l"/>
             <a:r>
-              <a:rPr b="1" sz="2550">
+              <a:rPr sz="2550" b="1">
                 <a:solidFill>
                   <a:srgbClr val="12293A"/>
                 </a:solidFill>
-                <a:latin typeface="SimHei"/>
+                <a:latin typeface="黑体" panose="02010609060101010101" charset="-122"/>
               </a:rPr>
               <a:t>从开药到医疗工程</a:t>
             </a:r>
+            <a:endParaRPr sz="2550" b="1">
+              <a:solidFill>
+                <a:srgbClr val="12293A"/>
+              </a:solidFill>
+              <a:latin typeface="黑体" panose="02010609060101010101" charset="-122"/>
+            </a:endParaRPr>
           </a:p>
         </p:txBody>
       </p:sp>
@@ -6589,21 +6747,27 @@
           <a:noFill/>
         </p:spPr>
         <p:txBody>
-          <a:bodyPr wrap="square" lIns="27432" rIns="27432" tIns="9144" bIns="9144" anchor="t">
+          <a:bodyPr wrap="square" lIns="27432" tIns="9144" rIns="27432" bIns="9144" anchor="t">
             <a:spAutoFit/>
           </a:bodyPr>
           <a:lstStyle/>
           <a:p>
             <a:pPr algn="l"/>
             <a:r>
-              <a:rPr b="1" sz="1420">
+              <a:rPr sz="1420" b="1">
                 <a:solidFill>
                   <a:srgbClr val="12293A"/>
                 </a:solidFill>
-                <a:latin typeface="SimHei"/>
+                <a:latin typeface="黑体" panose="02010609060101010101" charset="-122"/>
               </a:rPr>
               <a:t>细胞治疗依赖完整医疗系统，而不是单一药品。</a:t>
             </a:r>
+            <a:endParaRPr sz="1420" b="1">
+              <a:solidFill>
+                <a:srgbClr val="12293A"/>
+              </a:solidFill>
+              <a:latin typeface="黑体" panose="02010609060101010101" charset="-122"/>
+            </a:endParaRPr>
           </a:p>
         </p:txBody>
       </p:sp>
@@ -6624,56 +6788,27 @@
           <a:noFill/>
         </p:spPr>
         <p:txBody>
-          <a:bodyPr wrap="square" lIns="27432" rIns="27432" tIns="9144" bIns="9144" anchor="t">
+          <a:bodyPr wrap="square" lIns="27432" tIns="9144" rIns="27432" bIns="9144" anchor="t">
             <a:spAutoFit/>
           </a:bodyPr>
           <a:lstStyle/>
           <a:p>
             <a:pPr algn="l"/>
             <a:r>
-              <a:rPr b="1" sz="819">
+              <a:rPr sz="820" b="1">
                 <a:solidFill>
                   <a:srgbClr val="586874"/>
                 </a:solidFill>
-                <a:latin typeface="SimHei"/>
+                <a:latin typeface="黑体" panose="02010609060101010101" charset="-122"/>
               </a:rPr>
               <a:t>11/15</a:t>
             </a:r>
-          </a:p>
-        </p:txBody>
-      </p:sp>
-      <p:sp>
-        <p:nvSpPr>
-          <p:cNvPr id="9" name="TextBox 8"/>
-          <p:cNvSpPr txBox="1"/>
-          <p:nvPr/>
-        </p:nvSpPr>
-        <p:spPr>
-          <a:xfrm>
-            <a:off x="1060704" y="6400800"/>
-            <a:ext cx="10332720" cy="228600"/>
-          </a:xfrm>
-          <a:prstGeom prst="rect">
-            <a:avLst/>
-          </a:prstGeom>
-          <a:noFill/>
-        </p:spPr>
-        <p:txBody>
-          <a:bodyPr wrap="square" lIns="27432" rIns="27432" tIns="9144" bIns="9144" anchor="t">
-            <a:spAutoFit/>
-          </a:bodyPr>
-          <a:lstStyle/>
-          <a:p>
-            <a:pPr algn="l"/>
-            <a:r>
-              <a:rPr b="0" sz="800">
-                <a:solidFill>
-                  <a:srgbClr val="586874"/>
-                </a:solidFill>
-                <a:latin typeface="SimSun"/>
-              </a:rPr>
-              <a:t>资料：NCI CAR T Cells；FDA 相关批准文件</a:t>
-            </a:r>
+            <a:endParaRPr sz="820" b="1">
+              <a:solidFill>
+                <a:srgbClr val="586874"/>
+              </a:solidFill>
+              <a:latin typeface="黑体" panose="02010609060101010101" charset="-122"/>
+            </a:endParaRPr>
           </a:p>
         </p:txBody>
       </p:sp>
@@ -6739,21 +6874,27 @@
           <a:noFill/>
         </p:spPr>
         <p:txBody>
-          <a:bodyPr wrap="square" lIns="27432" rIns="27432" tIns="9144" bIns="9144" anchor="t">
-            <a:spAutoFit/>
-          </a:bodyPr>
-          <a:lstStyle/>
-          <a:p>
-            <a:pPr algn="ctr"/>
-            <a:r>
-              <a:rPr b="1" sz="1120">
+          <a:bodyPr wrap="square" lIns="27432" tIns="9144" rIns="27432" bIns="9144" anchor="t">
+            <a:spAutoFit/>
+          </a:bodyPr>
+          <a:lstStyle/>
+          <a:p>
+            <a:pPr algn="ctr"/>
+            <a:r>
+              <a:rPr sz="1120" b="1">
                 <a:solidFill>
                   <a:srgbClr val="FFFFFF"/>
                 </a:solidFill>
-                <a:latin typeface="SimHei"/>
+                <a:latin typeface="黑体" panose="02010609060101010101" charset="-122"/>
               </a:rPr>
               <a:t>患者筛选</a:t>
             </a:r>
+            <a:endParaRPr sz="1120" b="1">
+              <a:solidFill>
+                <a:srgbClr val="FFFFFF"/>
+              </a:solidFill>
+              <a:latin typeface="黑体" panose="02010609060101010101" charset="-122"/>
+            </a:endParaRPr>
           </a:p>
         </p:txBody>
       </p:sp>
@@ -6774,21 +6915,27 @@
           <a:noFill/>
         </p:spPr>
         <p:txBody>
-          <a:bodyPr wrap="square" lIns="27432" rIns="27432" tIns="9144" bIns="9144" anchor="t">
-            <a:spAutoFit/>
-          </a:bodyPr>
-          <a:lstStyle/>
-          <a:p>
-            <a:pPr algn="ctr"/>
-            <a:r>
-              <a:rPr b="1" sz="1800">
+          <a:bodyPr wrap="square" lIns="27432" tIns="9144" rIns="27432" bIns="9144" anchor="t">
+            <a:spAutoFit/>
+          </a:bodyPr>
+          <a:lstStyle/>
+          <a:p>
+            <a:pPr algn="ctr"/>
+            <a:r>
+              <a:rPr sz="1800" b="1">
                 <a:solidFill>
                   <a:srgbClr val="586874"/>
                 </a:solidFill>
-                <a:latin typeface="SimHei"/>
+                <a:latin typeface="黑体" panose="02010609060101010101" charset="-122"/>
               </a:rPr>
               <a:t>→</a:t>
             </a:r>
+            <a:endParaRPr sz="1800" b="1">
+              <a:solidFill>
+                <a:srgbClr val="586874"/>
+              </a:solidFill>
+              <a:latin typeface="黑体" panose="02010609060101010101" charset="-122"/>
+            </a:endParaRPr>
           </a:p>
         </p:txBody>
       </p:sp>
@@ -6854,22 +7001,28 @@
           <a:noFill/>
         </p:spPr>
         <p:txBody>
-          <a:bodyPr wrap="square" lIns="27432" rIns="27432" tIns="9144" bIns="9144" anchor="t">
-            <a:spAutoFit/>
-          </a:bodyPr>
-          <a:lstStyle/>
-          <a:p>
-            <a:pPr algn="ctr"/>
-            <a:r>
-              <a:rPr b="1" sz="1120">
+          <a:bodyPr wrap="square" lIns="27432" tIns="9144" rIns="27432" bIns="9144" anchor="t">
+            <a:spAutoFit/>
+          </a:bodyPr>
+          <a:lstStyle/>
+          <a:p>
+            <a:pPr algn="ctr"/>
+            <a:r>
+              <a:rPr sz="1120" b="1">
                 <a:solidFill>
                   <a:srgbClr val="FFFFFF"/>
                 </a:solidFill>
-                <a:latin typeface="SimHei"/>
+                <a:latin typeface="黑体" panose="02010609060101010101" charset="-122"/>
               </a:rPr>
               <a:t>细胞采集/
 组织获取</a:t>
             </a:r>
+            <a:endParaRPr sz="1120" b="1">
+              <a:solidFill>
+                <a:srgbClr val="FFFFFF"/>
+              </a:solidFill>
+              <a:latin typeface="黑体" panose="02010609060101010101" charset="-122"/>
+            </a:endParaRPr>
           </a:p>
         </p:txBody>
       </p:sp>
@@ -6890,21 +7043,27 @@
           <a:noFill/>
         </p:spPr>
         <p:txBody>
-          <a:bodyPr wrap="square" lIns="27432" rIns="27432" tIns="9144" bIns="9144" anchor="t">
-            <a:spAutoFit/>
-          </a:bodyPr>
-          <a:lstStyle/>
-          <a:p>
-            <a:pPr algn="ctr"/>
-            <a:r>
-              <a:rPr b="1" sz="1800">
+          <a:bodyPr wrap="square" lIns="27432" tIns="9144" rIns="27432" bIns="9144" anchor="t">
+            <a:spAutoFit/>
+          </a:bodyPr>
+          <a:lstStyle/>
+          <a:p>
+            <a:pPr algn="ctr"/>
+            <a:r>
+              <a:rPr sz="1800" b="1">
                 <a:solidFill>
                   <a:srgbClr val="586874"/>
                 </a:solidFill>
-                <a:latin typeface="SimHei"/>
+                <a:latin typeface="黑体" panose="02010609060101010101" charset="-122"/>
               </a:rPr>
               <a:t>→</a:t>
             </a:r>
+            <a:endParaRPr sz="1800" b="1">
+              <a:solidFill>
+                <a:srgbClr val="586874"/>
+              </a:solidFill>
+              <a:latin typeface="黑体" panose="02010609060101010101" charset="-122"/>
+            </a:endParaRPr>
           </a:p>
         </p:txBody>
       </p:sp>
@@ -6970,21 +7129,27 @@
           <a:noFill/>
         </p:spPr>
         <p:txBody>
-          <a:bodyPr wrap="square" lIns="27432" rIns="27432" tIns="9144" bIns="9144" anchor="t">
-            <a:spAutoFit/>
-          </a:bodyPr>
-          <a:lstStyle/>
-          <a:p>
-            <a:pPr algn="ctr"/>
-            <a:r>
-              <a:rPr b="1" sz="1120">
+          <a:bodyPr wrap="square" lIns="27432" tIns="9144" rIns="27432" bIns="9144" anchor="t">
+            <a:spAutoFit/>
+          </a:bodyPr>
+          <a:lstStyle/>
+          <a:p>
+            <a:pPr algn="ctr"/>
+            <a:r>
+              <a:rPr sz="1120" b="1">
                 <a:solidFill>
                   <a:srgbClr val="FFFFFF"/>
                 </a:solidFill>
-                <a:latin typeface="SimHei"/>
+                <a:latin typeface="黑体" panose="02010609060101010101" charset="-122"/>
               </a:rPr>
               <a:t>实验室制造</a:t>
             </a:r>
+            <a:endParaRPr sz="1120" b="1">
+              <a:solidFill>
+                <a:srgbClr val="FFFFFF"/>
+              </a:solidFill>
+              <a:latin typeface="黑体" panose="02010609060101010101" charset="-122"/>
+            </a:endParaRPr>
           </a:p>
         </p:txBody>
       </p:sp>
@@ -7005,21 +7170,27 @@
           <a:noFill/>
         </p:spPr>
         <p:txBody>
-          <a:bodyPr wrap="square" lIns="27432" rIns="27432" tIns="9144" bIns="9144" anchor="t">
-            <a:spAutoFit/>
-          </a:bodyPr>
-          <a:lstStyle/>
-          <a:p>
-            <a:pPr algn="ctr"/>
-            <a:r>
-              <a:rPr b="1" sz="1800">
+          <a:bodyPr wrap="square" lIns="27432" tIns="9144" rIns="27432" bIns="9144" anchor="t">
+            <a:spAutoFit/>
+          </a:bodyPr>
+          <a:lstStyle/>
+          <a:p>
+            <a:pPr algn="ctr"/>
+            <a:r>
+              <a:rPr sz="1800" b="1">
                 <a:solidFill>
                   <a:srgbClr val="586874"/>
                 </a:solidFill>
-                <a:latin typeface="SimHei"/>
+                <a:latin typeface="黑体" panose="02010609060101010101" charset="-122"/>
               </a:rPr>
               <a:t>→</a:t>
             </a:r>
+            <a:endParaRPr sz="1800" b="1">
+              <a:solidFill>
+                <a:srgbClr val="586874"/>
+              </a:solidFill>
+              <a:latin typeface="黑体" panose="02010609060101010101" charset="-122"/>
+            </a:endParaRPr>
           </a:p>
         </p:txBody>
       </p:sp>
@@ -7085,21 +7256,27 @@
           <a:noFill/>
         </p:spPr>
         <p:txBody>
-          <a:bodyPr wrap="square" lIns="27432" rIns="27432" tIns="9144" bIns="9144" anchor="t">
-            <a:spAutoFit/>
-          </a:bodyPr>
-          <a:lstStyle/>
-          <a:p>
-            <a:pPr algn="ctr"/>
-            <a:r>
-              <a:rPr b="1" sz="1120">
+          <a:bodyPr wrap="square" lIns="27432" tIns="9144" rIns="27432" bIns="9144" anchor="t">
+            <a:spAutoFit/>
+          </a:bodyPr>
+          <a:lstStyle/>
+          <a:p>
+            <a:pPr algn="ctr"/>
+            <a:r>
+              <a:rPr sz="1120" b="1">
                 <a:solidFill>
                   <a:srgbClr val="FFFFFF"/>
                 </a:solidFill>
-                <a:latin typeface="SimHei"/>
+                <a:latin typeface="黑体" panose="02010609060101010101" charset="-122"/>
               </a:rPr>
               <a:t>质控运输</a:t>
             </a:r>
+            <a:endParaRPr sz="1120" b="1">
+              <a:solidFill>
+                <a:srgbClr val="FFFFFF"/>
+              </a:solidFill>
+              <a:latin typeface="黑体" panose="02010609060101010101" charset="-122"/>
+            </a:endParaRPr>
           </a:p>
         </p:txBody>
       </p:sp>
@@ -7120,21 +7297,27 @@
           <a:noFill/>
         </p:spPr>
         <p:txBody>
-          <a:bodyPr wrap="square" lIns="27432" rIns="27432" tIns="9144" bIns="9144" anchor="t">
-            <a:spAutoFit/>
-          </a:bodyPr>
-          <a:lstStyle/>
-          <a:p>
-            <a:pPr algn="ctr"/>
-            <a:r>
-              <a:rPr b="1" sz="1800">
+          <a:bodyPr wrap="square" lIns="27432" tIns="9144" rIns="27432" bIns="9144" anchor="t">
+            <a:spAutoFit/>
+          </a:bodyPr>
+          <a:lstStyle/>
+          <a:p>
+            <a:pPr algn="ctr"/>
+            <a:r>
+              <a:rPr sz="1800" b="1">
                 <a:solidFill>
                   <a:srgbClr val="586874"/>
                 </a:solidFill>
-                <a:latin typeface="SimHei"/>
+                <a:latin typeface="黑体" panose="02010609060101010101" charset="-122"/>
               </a:rPr>
               <a:t>→</a:t>
             </a:r>
+            <a:endParaRPr sz="1800" b="1">
+              <a:solidFill>
+                <a:srgbClr val="586874"/>
+              </a:solidFill>
+              <a:latin typeface="黑体" panose="02010609060101010101" charset="-122"/>
+            </a:endParaRPr>
           </a:p>
         </p:txBody>
       </p:sp>
@@ -7200,21 +7383,27 @@
           <a:noFill/>
         </p:spPr>
         <p:txBody>
-          <a:bodyPr wrap="square" lIns="27432" rIns="27432" tIns="9144" bIns="9144" anchor="t">
-            <a:spAutoFit/>
-          </a:bodyPr>
-          <a:lstStyle/>
-          <a:p>
-            <a:pPr algn="ctr"/>
-            <a:r>
-              <a:rPr b="1" sz="1120">
+          <a:bodyPr wrap="square" lIns="27432" tIns="9144" rIns="27432" bIns="9144" anchor="t">
+            <a:spAutoFit/>
+          </a:bodyPr>
+          <a:lstStyle/>
+          <a:p>
+            <a:pPr algn="ctr"/>
+            <a:r>
+              <a:rPr sz="1120" b="1">
                 <a:solidFill>
                   <a:srgbClr val="FFFFFF"/>
                 </a:solidFill>
-                <a:latin typeface="SimHei"/>
+                <a:latin typeface="黑体" panose="02010609060101010101" charset="-122"/>
               </a:rPr>
               <a:t>回输</a:t>
             </a:r>
+            <a:endParaRPr sz="1120" b="1">
+              <a:solidFill>
+                <a:srgbClr val="FFFFFF"/>
+              </a:solidFill>
+              <a:latin typeface="黑体" panose="02010609060101010101" charset="-122"/>
+            </a:endParaRPr>
           </a:p>
         </p:txBody>
       </p:sp>
@@ -7235,21 +7424,27 @@
           <a:noFill/>
         </p:spPr>
         <p:txBody>
-          <a:bodyPr wrap="square" lIns="27432" rIns="27432" tIns="9144" bIns="9144" anchor="t">
-            <a:spAutoFit/>
-          </a:bodyPr>
-          <a:lstStyle/>
-          <a:p>
-            <a:pPr algn="ctr"/>
-            <a:r>
-              <a:rPr b="1" sz="1800">
+          <a:bodyPr wrap="square" lIns="27432" tIns="9144" rIns="27432" bIns="9144" anchor="t">
+            <a:spAutoFit/>
+          </a:bodyPr>
+          <a:lstStyle/>
+          <a:p>
+            <a:pPr algn="ctr"/>
+            <a:r>
+              <a:rPr sz="1800" b="1">
                 <a:solidFill>
                   <a:srgbClr val="586874"/>
                 </a:solidFill>
-                <a:latin typeface="SimHei"/>
+                <a:latin typeface="黑体" panose="02010609060101010101" charset="-122"/>
               </a:rPr>
               <a:t>→</a:t>
             </a:r>
+            <a:endParaRPr sz="1800" b="1">
+              <a:solidFill>
+                <a:srgbClr val="586874"/>
+              </a:solidFill>
+              <a:latin typeface="黑体" panose="02010609060101010101" charset="-122"/>
+            </a:endParaRPr>
           </a:p>
         </p:txBody>
       </p:sp>
@@ -7315,21 +7510,27 @@
           <a:noFill/>
         </p:spPr>
         <p:txBody>
-          <a:bodyPr wrap="square" lIns="27432" rIns="27432" tIns="9144" bIns="9144" anchor="t">
-            <a:spAutoFit/>
-          </a:bodyPr>
-          <a:lstStyle/>
-          <a:p>
-            <a:pPr algn="ctr"/>
-            <a:r>
-              <a:rPr b="1" sz="1120">
+          <a:bodyPr wrap="square" lIns="27432" tIns="9144" rIns="27432" bIns="9144" anchor="t">
+            <a:spAutoFit/>
+          </a:bodyPr>
+          <a:lstStyle/>
+          <a:p>
+            <a:pPr algn="ctr"/>
+            <a:r>
+              <a:rPr sz="1120" b="1">
                 <a:solidFill>
                   <a:srgbClr val="FFFFFF"/>
                 </a:solidFill>
-                <a:latin typeface="SimHei"/>
+                <a:latin typeface="黑体" panose="02010609060101010101" charset="-122"/>
               </a:rPr>
               <a:t>毒性管理</a:t>
             </a:r>
+            <a:endParaRPr sz="1120" b="1">
+              <a:solidFill>
+                <a:srgbClr val="FFFFFF"/>
+              </a:solidFill>
+              <a:latin typeface="黑体" panose="02010609060101010101" charset="-122"/>
+            </a:endParaRPr>
           </a:p>
         </p:txBody>
       </p:sp>
@@ -7350,21 +7551,27 @@
           <a:noFill/>
         </p:spPr>
         <p:txBody>
-          <a:bodyPr wrap="square" lIns="27432" rIns="27432" tIns="9144" bIns="9144" anchor="t">
-            <a:spAutoFit/>
-          </a:bodyPr>
-          <a:lstStyle/>
-          <a:p>
-            <a:pPr algn="ctr"/>
-            <a:r>
-              <a:rPr b="1" sz="1800">
+          <a:bodyPr wrap="square" lIns="27432" tIns="9144" rIns="27432" bIns="9144" anchor="t">
+            <a:spAutoFit/>
+          </a:bodyPr>
+          <a:lstStyle/>
+          <a:p>
+            <a:pPr algn="ctr"/>
+            <a:r>
+              <a:rPr sz="1800" b="1">
                 <a:solidFill>
                   <a:srgbClr val="586874"/>
                 </a:solidFill>
-                <a:latin typeface="SimHei"/>
+                <a:latin typeface="黑体" panose="02010609060101010101" charset="-122"/>
               </a:rPr>
               <a:t>→</a:t>
             </a:r>
+            <a:endParaRPr sz="1800" b="1">
+              <a:solidFill>
+                <a:srgbClr val="586874"/>
+              </a:solidFill>
+              <a:latin typeface="黑体" panose="02010609060101010101" charset="-122"/>
+            </a:endParaRPr>
           </a:p>
         </p:txBody>
       </p:sp>
@@ -7430,21 +7637,27 @@
           <a:noFill/>
         </p:spPr>
         <p:txBody>
-          <a:bodyPr wrap="square" lIns="27432" rIns="27432" tIns="9144" bIns="9144" anchor="t">
-            <a:spAutoFit/>
-          </a:bodyPr>
-          <a:lstStyle/>
-          <a:p>
-            <a:pPr algn="ctr"/>
-            <a:r>
-              <a:rPr b="1" sz="1120">
+          <a:bodyPr wrap="square" lIns="27432" tIns="9144" rIns="27432" bIns="9144" anchor="t">
+            <a:spAutoFit/>
+          </a:bodyPr>
+          <a:lstStyle/>
+          <a:p>
+            <a:pPr algn="ctr"/>
+            <a:r>
+              <a:rPr sz="1120" b="1">
                 <a:solidFill>
                   <a:srgbClr val="FFFFFF"/>
                 </a:solidFill>
-                <a:latin typeface="SimHei"/>
+                <a:latin typeface="黑体" panose="02010609060101010101" charset="-122"/>
               </a:rPr>
               <a:t>长期随访</a:t>
             </a:r>
+            <a:endParaRPr sz="1120" b="1">
+              <a:solidFill>
+                <a:srgbClr val="FFFFFF"/>
+              </a:solidFill>
+              <a:latin typeface="黑体" panose="02010609060101010101" charset="-122"/>
+            </a:endParaRPr>
           </a:p>
         </p:txBody>
       </p:sp>
@@ -7510,21 +7723,27 @@
           <a:noFill/>
         </p:spPr>
         <p:txBody>
-          <a:bodyPr wrap="square" lIns="27432" rIns="27432" tIns="9144" bIns="9144" anchor="t">
-            <a:spAutoFit/>
-          </a:bodyPr>
-          <a:lstStyle/>
-          <a:p>
-            <a:pPr algn="ctr"/>
-            <a:r>
-              <a:rPr b="1" sz="1540">
+          <a:bodyPr wrap="square" lIns="27432" tIns="9144" rIns="27432" bIns="9144" anchor="t">
+            <a:spAutoFit/>
+          </a:bodyPr>
+          <a:lstStyle/>
+          <a:p>
+            <a:pPr algn="ctr"/>
+            <a:r>
+              <a:rPr sz="1540" b="1">
                 <a:solidFill>
                   <a:srgbClr val="12293A"/>
                 </a:solidFill>
-                <a:latin typeface="SimHei"/>
+                <a:latin typeface="黑体" panose="02010609060101010101" charset="-122"/>
               </a:rPr>
               <a:t>历史变化：治疗不再只是“药物进入身体”，而是临床、制造、监管和随访共同完成。</a:t>
             </a:r>
+            <a:endParaRPr sz="1540" b="1">
+              <a:solidFill>
+                <a:srgbClr val="12293A"/>
+              </a:solidFill>
+              <a:latin typeface="黑体" panose="02010609060101010101" charset="-122"/>
+            </a:endParaRPr>
           </a:p>
         </p:txBody>
       </p:sp>
@@ -7537,7 +7756,7 @@
 </file>
 
 <file path=ppt/slides/slide12.xml><?xml version="1.0" encoding="utf-8"?>
-<p:sld xmlns:a="http://schemas.openxmlformats.org/drawingml/2006/main" xmlns:p="http://schemas.openxmlformats.org/presentationml/2006/main" xmlns:r="http://schemas.openxmlformats.org/officeDocument/2006/relationships">
+<p:sld xmlns:a="http://schemas.openxmlformats.org/drawingml/2006/main" xmlns:r="http://schemas.openxmlformats.org/officeDocument/2006/relationships" xmlns:p="http://schemas.openxmlformats.org/presentationml/2006/main">
   <p:cSld>
     <p:spTree>
       <p:nvGrpSpPr>
@@ -7653,21 +7872,27 @@
           <a:noFill/>
         </p:spPr>
         <p:txBody>
-          <a:bodyPr wrap="square" lIns="27432" rIns="27432" tIns="9144" bIns="9144" anchor="t">
+          <a:bodyPr wrap="square" lIns="27432" tIns="9144" rIns="27432" bIns="9144" anchor="t">
             <a:spAutoFit/>
           </a:bodyPr>
           <a:lstStyle/>
           <a:p>
             <a:pPr algn="l"/>
             <a:r>
-              <a:rPr b="1" sz="1100">
+              <a:rPr sz="1100" b="1">
                 <a:solidFill>
                   <a:srgbClr val="1C908B"/>
                 </a:solidFill>
-                <a:latin typeface="SimHei"/>
+                <a:latin typeface="黑体" panose="02010609060101010101" charset="-122"/>
               </a:rPr>
               <a:t>风险</a:t>
             </a:r>
+            <a:endParaRPr sz="1100" b="1">
+              <a:solidFill>
+                <a:srgbClr val="1C908B"/>
+              </a:solidFill>
+              <a:latin typeface="黑体" panose="02010609060101010101" charset="-122"/>
+            </a:endParaRPr>
           </a:p>
         </p:txBody>
       </p:sp>
@@ -7688,21 +7913,27 @@
           <a:noFill/>
         </p:spPr>
         <p:txBody>
-          <a:bodyPr wrap="square" lIns="27432" rIns="27432" tIns="9144" bIns="9144" anchor="t">
+          <a:bodyPr wrap="square" lIns="27432" tIns="9144" rIns="27432" bIns="9144" anchor="t">
             <a:spAutoFit/>
           </a:bodyPr>
           <a:lstStyle/>
           <a:p>
             <a:pPr algn="l"/>
             <a:r>
-              <a:rPr b="1" sz="2550">
+              <a:rPr sz="2550" b="1">
                 <a:solidFill>
                   <a:srgbClr val="12293A"/>
                 </a:solidFill>
-                <a:latin typeface="SimHei"/>
+                <a:latin typeface="黑体" panose="02010609060101010101" charset="-122"/>
               </a:rPr>
               <a:t>疗效越强，越需要边界和监管</a:t>
             </a:r>
+            <a:endParaRPr sz="2550" b="1">
+              <a:solidFill>
+                <a:srgbClr val="12293A"/>
+              </a:solidFill>
+              <a:latin typeface="黑体" panose="02010609060101010101" charset="-122"/>
+            </a:endParaRPr>
           </a:p>
         </p:txBody>
       </p:sp>
@@ -7768,21 +7999,27 @@
           <a:noFill/>
         </p:spPr>
         <p:txBody>
-          <a:bodyPr wrap="square" lIns="27432" rIns="27432" tIns="9144" bIns="9144" anchor="t">
+          <a:bodyPr wrap="square" lIns="27432" tIns="9144" rIns="27432" bIns="9144" anchor="t">
             <a:spAutoFit/>
           </a:bodyPr>
           <a:lstStyle/>
           <a:p>
             <a:pPr algn="l"/>
             <a:r>
-              <a:rPr b="1" sz="1420">
+              <a:rPr sz="1420" b="1">
                 <a:solidFill>
                   <a:srgbClr val="12293A"/>
                 </a:solidFill>
-                <a:latin typeface="SimHei"/>
+                <a:latin typeface="黑体" panose="02010609060101010101" charset="-122"/>
               </a:rPr>
               <a:t>强疗效必须配套适应证、毒性管理和长期监测。</a:t>
             </a:r>
+            <a:endParaRPr sz="1420" b="1">
+              <a:solidFill>
+                <a:srgbClr val="12293A"/>
+              </a:solidFill>
+              <a:latin typeface="黑体" panose="02010609060101010101" charset="-122"/>
+            </a:endParaRPr>
           </a:p>
         </p:txBody>
       </p:sp>
@@ -7803,56 +8040,27 @@
           <a:noFill/>
         </p:spPr>
         <p:txBody>
-          <a:bodyPr wrap="square" lIns="27432" rIns="27432" tIns="9144" bIns="9144" anchor="t">
+          <a:bodyPr wrap="square" lIns="27432" tIns="9144" rIns="27432" bIns="9144" anchor="t">
             <a:spAutoFit/>
           </a:bodyPr>
           <a:lstStyle/>
           <a:p>
             <a:pPr algn="l"/>
             <a:r>
-              <a:rPr b="1" sz="819">
+              <a:rPr sz="820" b="1">
                 <a:solidFill>
                   <a:srgbClr val="586874"/>
                 </a:solidFill>
-                <a:latin typeface="SimHei"/>
+                <a:latin typeface="黑体" panose="02010609060101010101" charset="-122"/>
               </a:rPr>
               <a:t>12/15</a:t>
             </a:r>
-          </a:p>
-        </p:txBody>
-      </p:sp>
-      <p:sp>
-        <p:nvSpPr>
-          <p:cNvPr id="9" name="TextBox 8"/>
-          <p:cNvSpPr txBox="1"/>
-          <p:nvPr/>
-        </p:nvSpPr>
-        <p:spPr>
-          <a:xfrm>
-            <a:off x="1060704" y="6400800"/>
-            <a:ext cx="10332720" cy="228600"/>
-          </a:xfrm>
-          <a:prstGeom prst="rect">
-            <a:avLst/>
-          </a:prstGeom>
-          <a:noFill/>
-        </p:spPr>
-        <p:txBody>
-          <a:bodyPr wrap="square" lIns="27432" rIns="27432" tIns="9144" bIns="9144" anchor="t">
-            <a:spAutoFit/>
-          </a:bodyPr>
-          <a:lstStyle/>
-          <a:p>
-            <a:pPr algn="l"/>
-            <a:r>
-              <a:rPr b="0" sz="800">
-                <a:solidFill>
-                  <a:srgbClr val="586874"/>
-                </a:solidFill>
-                <a:latin typeface="SimSun"/>
-              </a:rPr>
-              <a:t>资料：NCI CAR T Cells；FDA Boxed Warning</a:t>
-            </a:r>
+            <a:endParaRPr sz="820" b="1">
+              <a:solidFill>
+                <a:srgbClr val="586874"/>
+              </a:solidFill>
+              <a:latin typeface="黑体" panose="02010609060101010101" charset="-122"/>
+            </a:endParaRPr>
           </a:p>
         </p:txBody>
       </p:sp>
@@ -7963,21 +8171,27 @@
           <a:noFill/>
         </p:spPr>
         <p:txBody>
-          <a:bodyPr wrap="square" lIns="27432" rIns="27432" tIns="9144" bIns="9144" anchor="t">
-            <a:spAutoFit/>
-          </a:bodyPr>
-          <a:lstStyle/>
-          <a:p>
-            <a:pPr algn="ctr"/>
-            <a:r>
-              <a:rPr b="1" sz="1580">
+          <a:bodyPr wrap="square" lIns="27432" tIns="9144" rIns="27432" bIns="9144" anchor="t">
+            <a:spAutoFit/>
+          </a:bodyPr>
+          <a:lstStyle/>
+          <a:p>
+            <a:pPr algn="ctr"/>
+            <a:r>
+              <a:rPr sz="1580" b="1">
                 <a:solidFill>
                   <a:srgbClr val="FFFFFF"/>
                 </a:solidFill>
-                <a:latin typeface="SimHei"/>
+                <a:latin typeface="黑体" panose="02010609060101010101" charset="-122"/>
               </a:rPr>
               <a:t>实体瘤难题</a:t>
             </a:r>
+            <a:endParaRPr sz="1580" b="1">
+              <a:solidFill>
+                <a:srgbClr val="FFFFFF"/>
+              </a:solidFill>
+              <a:latin typeface="黑体" panose="02010609060101010101" charset="-122"/>
+            </a:endParaRPr>
           </a:p>
         </p:txBody>
       </p:sp>
@@ -7998,23 +8212,29 @@
           <a:noFill/>
         </p:spPr>
         <p:txBody>
-          <a:bodyPr wrap="square" lIns="27432" rIns="27432" tIns="9144" bIns="9144" anchor="t">
-            <a:spAutoFit/>
-          </a:bodyPr>
-          <a:lstStyle/>
-          <a:p>
-            <a:pPr algn="ctr"/>
-            <a:r>
-              <a:rPr b="0" sz="1300">
+          <a:bodyPr wrap="square" lIns="27432" tIns="9144" rIns="27432" bIns="9144" anchor="t">
+            <a:spAutoFit/>
+          </a:bodyPr>
+          <a:lstStyle/>
+          <a:p>
+            <a:pPr algn="ctr"/>
+            <a:r>
+              <a:rPr sz="1300" b="0">
                 <a:solidFill>
                   <a:srgbClr val="141A1F"/>
                 </a:solidFill>
-                <a:latin typeface="SimSun"/>
+                <a:latin typeface="宋体" panose="02010600030101010101" pitchFamily="2" charset="-122"/>
               </a:rPr>
               <a:t>靶抗原
 免疫抑制微环境
 肿瘤异质性</a:t>
             </a:r>
+            <a:endParaRPr sz="1300" b="0">
+              <a:solidFill>
+                <a:srgbClr val="141A1F"/>
+              </a:solidFill>
+              <a:latin typeface="宋体" panose="02010600030101010101" pitchFamily="2" charset="-122"/>
+            </a:endParaRPr>
           </a:p>
         </p:txBody>
       </p:sp>
@@ -8125,21 +8345,27 @@
           <a:noFill/>
         </p:spPr>
         <p:txBody>
-          <a:bodyPr wrap="square" lIns="27432" rIns="27432" tIns="9144" bIns="9144" anchor="t">
-            <a:spAutoFit/>
-          </a:bodyPr>
-          <a:lstStyle/>
-          <a:p>
-            <a:pPr algn="ctr"/>
-            <a:r>
-              <a:rPr b="1" sz="1580">
+          <a:bodyPr wrap="square" lIns="27432" tIns="9144" rIns="27432" bIns="9144" anchor="t">
+            <a:spAutoFit/>
+          </a:bodyPr>
+          <a:lstStyle/>
+          <a:p>
+            <a:pPr algn="ctr"/>
+            <a:r>
+              <a:rPr sz="1580" b="1">
                 <a:solidFill>
                   <a:srgbClr val="FFFFFF"/>
                 </a:solidFill>
-                <a:latin typeface="SimHei"/>
+                <a:latin typeface="黑体" panose="02010609060101010101" charset="-122"/>
               </a:rPr>
               <a:t>急性毒性</a:t>
             </a:r>
+            <a:endParaRPr sz="1580" b="1">
+              <a:solidFill>
+                <a:srgbClr val="FFFFFF"/>
+              </a:solidFill>
+              <a:latin typeface="黑体" panose="02010609060101010101" charset="-122"/>
+            </a:endParaRPr>
           </a:p>
         </p:txBody>
       </p:sp>
@@ -8160,23 +8386,29 @@
           <a:noFill/>
         </p:spPr>
         <p:txBody>
-          <a:bodyPr wrap="square" lIns="27432" rIns="27432" tIns="9144" bIns="9144" anchor="t">
-            <a:spAutoFit/>
-          </a:bodyPr>
-          <a:lstStyle/>
-          <a:p>
-            <a:pPr algn="ctr"/>
-            <a:r>
-              <a:rPr b="0" sz="1300">
+          <a:bodyPr wrap="square" lIns="27432" tIns="9144" rIns="27432" bIns="9144" anchor="t">
+            <a:spAutoFit/>
+          </a:bodyPr>
+          <a:lstStyle/>
+          <a:p>
+            <a:pPr algn="ctr"/>
+            <a:r>
+              <a:rPr sz="1300" b="0">
                 <a:solidFill>
                   <a:srgbClr val="141A1F"/>
                 </a:solidFill>
-                <a:latin typeface="SimSun"/>
+                <a:latin typeface="宋体" panose="02010600030101010101" pitchFamily="2" charset="-122"/>
               </a:rPr>
               <a:t>CRS
 ICANS
 需快速处理</a:t>
             </a:r>
+            <a:endParaRPr sz="1300" b="0">
+              <a:solidFill>
+                <a:srgbClr val="141A1F"/>
+              </a:solidFill>
+              <a:latin typeface="宋体" panose="02010600030101010101" pitchFamily="2" charset="-122"/>
+            </a:endParaRPr>
           </a:p>
         </p:txBody>
       </p:sp>
@@ -8287,21 +8519,27 @@
           <a:noFill/>
         </p:spPr>
         <p:txBody>
-          <a:bodyPr wrap="square" lIns="27432" rIns="27432" tIns="9144" bIns="9144" anchor="t">
-            <a:spAutoFit/>
-          </a:bodyPr>
-          <a:lstStyle/>
-          <a:p>
-            <a:pPr algn="ctr"/>
-            <a:r>
-              <a:rPr b="1" sz="1580">
+          <a:bodyPr wrap="square" lIns="27432" tIns="9144" rIns="27432" bIns="9144" anchor="t">
+            <a:spAutoFit/>
+          </a:bodyPr>
+          <a:lstStyle/>
+          <a:p>
+            <a:pPr algn="ctr"/>
+            <a:r>
+              <a:rPr sz="1580" b="1">
                 <a:solidFill>
                   <a:srgbClr val="FFFFFF"/>
                 </a:solidFill>
-                <a:latin typeface="SimHei"/>
+                <a:latin typeface="黑体" panose="02010609060101010101" charset="-122"/>
               </a:rPr>
               <a:t>长期风险</a:t>
             </a:r>
+            <a:endParaRPr sz="1580" b="1">
+              <a:solidFill>
+                <a:srgbClr val="FFFFFF"/>
+              </a:solidFill>
+              <a:latin typeface="黑体" panose="02010609060101010101" charset="-122"/>
+            </a:endParaRPr>
           </a:p>
         </p:txBody>
       </p:sp>
@@ -8322,23 +8560,29 @@
           <a:noFill/>
         </p:spPr>
         <p:txBody>
-          <a:bodyPr wrap="square" lIns="27432" rIns="27432" tIns="9144" bIns="9144" anchor="t">
-            <a:spAutoFit/>
-          </a:bodyPr>
-          <a:lstStyle/>
-          <a:p>
-            <a:pPr algn="ctr"/>
-            <a:r>
-              <a:rPr b="0" sz="1300">
+          <a:bodyPr wrap="square" lIns="27432" tIns="9144" rIns="27432" bIns="9144" anchor="t">
+            <a:spAutoFit/>
+          </a:bodyPr>
+          <a:lstStyle/>
+          <a:p>
+            <a:pPr algn="ctr"/>
+            <a:r>
+              <a:rPr sz="1300" b="0">
                 <a:solidFill>
                   <a:srgbClr val="141A1F"/>
                 </a:solidFill>
-                <a:latin typeface="SimSun"/>
+                <a:latin typeface="宋体" panose="02010600030101010101" pitchFamily="2" charset="-122"/>
               </a:rPr>
               <a:t>继发恶性肿瘤风险
 长期监测
 风险告知</a:t>
             </a:r>
+            <a:endParaRPr sz="1300" b="0">
+              <a:solidFill>
+                <a:srgbClr val="141A1F"/>
+              </a:solidFill>
+              <a:latin typeface="宋体" panose="02010600030101010101" pitchFamily="2" charset="-122"/>
+            </a:endParaRPr>
           </a:p>
         </p:txBody>
       </p:sp>
@@ -8359,21 +8603,27 @@
           <a:noFill/>
         </p:spPr>
         <p:txBody>
-          <a:bodyPr wrap="square" lIns="27432" rIns="27432" tIns="9144" bIns="9144" anchor="t">
-            <a:spAutoFit/>
-          </a:bodyPr>
-          <a:lstStyle/>
-          <a:p>
-            <a:pPr algn="ctr"/>
-            <a:r>
-              <a:rPr b="1" sz="1750">
+          <a:bodyPr wrap="square" lIns="27432" tIns="9144" rIns="27432" bIns="9144" anchor="t">
+            <a:spAutoFit/>
+          </a:bodyPr>
+          <a:lstStyle/>
+          <a:p>
+            <a:pPr algn="ctr"/>
+            <a:r>
+              <a:rPr sz="1750" b="1">
                 <a:solidFill>
                   <a:srgbClr val="12293A"/>
                 </a:solidFill>
-                <a:latin typeface="SimHei"/>
+                <a:latin typeface="黑体" panose="02010609060101010101" charset="-122"/>
               </a:rPr>
               <a:t>态度：不因风险否定技术，也不因疗效忽略风险。</a:t>
             </a:r>
+            <a:endParaRPr sz="1750" b="1">
+              <a:solidFill>
+                <a:srgbClr val="12293A"/>
+              </a:solidFill>
+              <a:latin typeface="黑体" panose="02010609060101010101" charset="-122"/>
+            </a:endParaRPr>
           </a:p>
         </p:txBody>
       </p:sp>
@@ -8386,7 +8636,7 @@
 </file>
 
 <file path=ppt/slides/slide13.xml><?xml version="1.0" encoding="utf-8"?>
-<p:sld xmlns:a="http://schemas.openxmlformats.org/drawingml/2006/main" xmlns:p="http://schemas.openxmlformats.org/presentationml/2006/main" xmlns:r="http://schemas.openxmlformats.org/officeDocument/2006/relationships">
+<p:sld xmlns:a="http://schemas.openxmlformats.org/drawingml/2006/main" xmlns:r="http://schemas.openxmlformats.org/officeDocument/2006/relationships" xmlns:p="http://schemas.openxmlformats.org/presentationml/2006/main">
   <p:cSld>
     <p:spTree>
       <p:nvGrpSpPr>
@@ -8502,21 +8752,27 @@
           <a:noFill/>
         </p:spPr>
         <p:txBody>
-          <a:bodyPr wrap="square" lIns="27432" rIns="27432" tIns="9144" bIns="9144" anchor="t">
+          <a:bodyPr wrap="square" lIns="27432" tIns="9144" rIns="27432" bIns="9144" anchor="t">
             <a:spAutoFit/>
           </a:bodyPr>
           <a:lstStyle/>
           <a:p>
             <a:pPr algn="l"/>
             <a:r>
-              <a:rPr b="1" sz="1100">
+              <a:rPr sz="1100" b="1">
                 <a:solidFill>
                   <a:srgbClr val="1C908B"/>
                 </a:solidFill>
-                <a:latin typeface="SimHei"/>
+                <a:latin typeface="黑体" panose="02010609060101010101" charset="-122"/>
               </a:rPr>
               <a:t>伦理</a:t>
             </a:r>
+            <a:endParaRPr sz="1100" b="1">
+              <a:solidFill>
+                <a:srgbClr val="1C908B"/>
+              </a:solidFill>
+              <a:latin typeface="黑体" panose="02010609060101010101" charset="-122"/>
+            </a:endParaRPr>
           </a:p>
         </p:txBody>
       </p:sp>
@@ -8537,21 +8793,27 @@
           <a:noFill/>
         </p:spPr>
         <p:txBody>
-          <a:bodyPr wrap="square" lIns="27432" rIns="27432" tIns="9144" bIns="9144" anchor="t">
+          <a:bodyPr wrap="square" lIns="27432" tIns="9144" rIns="27432" bIns="9144" anchor="t">
             <a:spAutoFit/>
           </a:bodyPr>
           <a:lstStyle/>
           <a:p>
             <a:pPr algn="l"/>
             <a:r>
-              <a:rPr b="1" sz="2550">
+              <a:rPr sz="2550" b="1">
                 <a:solidFill>
                   <a:srgbClr val="12293A"/>
                 </a:solidFill>
-                <a:latin typeface="SimHei"/>
+                <a:latin typeface="黑体" panose="02010609060101010101" charset="-122"/>
               </a:rPr>
               <a:t>技术突破不等于公共价值自动实现</a:t>
             </a:r>
+            <a:endParaRPr sz="2550" b="1">
+              <a:solidFill>
+                <a:srgbClr val="12293A"/>
+              </a:solidFill>
+              <a:latin typeface="黑体" panose="02010609060101010101" charset="-122"/>
+            </a:endParaRPr>
           </a:p>
         </p:txBody>
       </p:sp>
@@ -8617,21 +8879,27 @@
           <a:noFill/>
         </p:spPr>
         <p:txBody>
-          <a:bodyPr wrap="square" lIns="27432" rIns="27432" tIns="9144" bIns="9144" anchor="t">
+          <a:bodyPr wrap="square" lIns="27432" tIns="9144" rIns="27432" bIns="9144" anchor="t">
             <a:spAutoFit/>
           </a:bodyPr>
           <a:lstStyle/>
           <a:p>
             <a:pPr algn="l"/>
             <a:r>
-              <a:rPr b="1" sz="1420">
+              <a:rPr sz="1420" b="1">
                 <a:solidFill>
                   <a:srgbClr val="12293A"/>
                 </a:solidFill>
-                <a:latin typeface="SimHei"/>
+                <a:latin typeface="黑体" panose="02010609060101010101" charset="-122"/>
               </a:rPr>
               <a:t>谁能用、谁承担风险、谁获得收益，决定公共价值。</a:t>
             </a:r>
+            <a:endParaRPr sz="1420" b="1">
+              <a:solidFill>
+                <a:srgbClr val="12293A"/>
+              </a:solidFill>
+              <a:latin typeface="黑体" panose="02010609060101010101" charset="-122"/>
+            </a:endParaRPr>
           </a:p>
         </p:txBody>
       </p:sp>
@@ -8652,56 +8920,27 @@
           <a:noFill/>
         </p:spPr>
         <p:txBody>
-          <a:bodyPr wrap="square" lIns="27432" rIns="27432" tIns="9144" bIns="9144" anchor="t">
+          <a:bodyPr wrap="square" lIns="27432" tIns="9144" rIns="27432" bIns="9144" anchor="t">
             <a:spAutoFit/>
           </a:bodyPr>
           <a:lstStyle/>
           <a:p>
             <a:pPr algn="l"/>
             <a:r>
-              <a:rPr b="1" sz="819">
+              <a:rPr sz="820" b="1">
                 <a:solidFill>
                   <a:srgbClr val="586874"/>
                 </a:solidFill>
-                <a:latin typeface="SimHei"/>
+                <a:latin typeface="黑体" panose="02010609060101010101" charset="-122"/>
               </a:rPr>
               <a:t>13/15</a:t>
             </a:r>
-          </a:p>
-        </p:txBody>
-      </p:sp>
-      <p:sp>
-        <p:nvSpPr>
-          <p:cNvPr id="9" name="TextBox 8"/>
-          <p:cNvSpPr txBox="1"/>
-          <p:nvPr/>
-        </p:nvSpPr>
-        <p:spPr>
-          <a:xfrm>
-            <a:off x="1060704" y="6400800"/>
-            <a:ext cx="10332720" cy="228600"/>
-          </a:xfrm>
-          <a:prstGeom prst="rect">
-            <a:avLst/>
-          </a:prstGeom>
-          <a:noFill/>
-        </p:spPr>
-        <p:txBody>
-          <a:bodyPr wrap="square" lIns="27432" rIns="27432" tIns="9144" bIns="9144" anchor="t">
-            <a:spAutoFit/>
-          </a:bodyPr>
-          <a:lstStyle/>
-          <a:p>
-            <a:pPr algn="l"/>
-            <a:r>
-              <a:rPr b="0" sz="800">
-                <a:solidFill>
-                  <a:srgbClr val="586874"/>
-                </a:solidFill>
-                <a:latin typeface="SimSun"/>
-              </a:rPr>
-              <a:t>资料：NCI TIL therapy article；FDA</a:t>
-            </a:r>
+            <a:endParaRPr sz="820" b="1">
+              <a:solidFill>
+                <a:srgbClr val="586874"/>
+              </a:solidFill>
+              <a:latin typeface="黑体" panose="02010609060101010101" charset="-122"/>
+            </a:endParaRPr>
           </a:p>
         </p:txBody>
       </p:sp>
@@ -8767,21 +9006,27 @@
           <a:noFill/>
         </p:spPr>
         <p:txBody>
-          <a:bodyPr wrap="square" lIns="27432" rIns="27432" tIns="9144" bIns="9144" anchor="t">
+          <a:bodyPr wrap="square" lIns="27432" tIns="9144" rIns="27432" bIns="9144" anchor="t">
             <a:spAutoFit/>
           </a:bodyPr>
           <a:lstStyle/>
           <a:p>
             <a:pPr algn="l"/>
             <a:r>
-              <a:rPr b="1" sz="1550">
+              <a:rPr sz="1550" b="1">
                 <a:solidFill>
                   <a:srgbClr val="C04A43"/>
                 </a:solidFill>
-                <a:latin typeface="SimHei"/>
+                <a:latin typeface="黑体" panose="02010609060101010101" charset="-122"/>
               </a:rPr>
               <a:t>高价</a:t>
             </a:r>
+            <a:endParaRPr sz="1550" b="1">
+              <a:solidFill>
+                <a:srgbClr val="C04A43"/>
+              </a:solidFill>
+              <a:latin typeface="黑体" panose="02010609060101010101" charset="-122"/>
+            </a:endParaRPr>
           </a:p>
         </p:txBody>
       </p:sp>
@@ -8802,22 +9047,28 @@
           <a:noFill/>
         </p:spPr>
         <p:txBody>
-          <a:bodyPr wrap="square" lIns="27432" rIns="27432" tIns="9144" bIns="9144" anchor="t">
+          <a:bodyPr wrap="square" lIns="27432" tIns="9144" rIns="27432" bIns="9144" anchor="t">
             <a:spAutoFit/>
           </a:bodyPr>
           <a:lstStyle/>
           <a:p>
             <a:pPr algn="l"/>
             <a:r>
-              <a:rPr b="0" sz="1220">
+              <a:rPr sz="1220" b="0">
                 <a:solidFill>
                   <a:srgbClr val="141A1F"/>
                 </a:solidFill>
-                <a:latin typeface="SimSun"/>
+                <a:latin typeface="宋体" panose="02010600030101010101" pitchFamily="2" charset="-122"/>
               </a:rPr>
               <a:t>$515,000
 NCI 报道公司宣布的单次治疗价格</a:t>
             </a:r>
+            <a:endParaRPr sz="1220" b="0">
+              <a:solidFill>
+                <a:srgbClr val="141A1F"/>
+              </a:solidFill>
+              <a:latin typeface="宋体" panose="02010600030101010101" pitchFamily="2" charset="-122"/>
+            </a:endParaRPr>
           </a:p>
         </p:txBody>
       </p:sp>
@@ -8883,21 +9134,27 @@
           <a:noFill/>
         </p:spPr>
         <p:txBody>
-          <a:bodyPr wrap="square" lIns="27432" rIns="27432" tIns="9144" bIns="9144" anchor="t">
+          <a:bodyPr wrap="square" lIns="27432" tIns="9144" rIns="27432" bIns="9144" anchor="t">
             <a:spAutoFit/>
           </a:bodyPr>
           <a:lstStyle/>
           <a:p>
             <a:pPr algn="l"/>
             <a:r>
-              <a:rPr b="1" sz="1550">
+              <a:rPr sz="1550" b="1">
                 <a:solidFill>
                   <a:srgbClr val="1C908B"/>
                 </a:solidFill>
-                <a:latin typeface="SimHei"/>
+                <a:latin typeface="黑体" panose="02010609060101010101" charset="-122"/>
               </a:rPr>
               <a:t>中心限制</a:t>
             </a:r>
+            <a:endParaRPr sz="1550" b="1">
+              <a:solidFill>
+                <a:srgbClr val="1C908B"/>
+              </a:solidFill>
+              <a:latin typeface="黑体" panose="02010609060101010101" charset="-122"/>
+            </a:endParaRPr>
           </a:p>
         </p:txBody>
       </p:sp>
@@ -8918,22 +9175,28 @@
           <a:noFill/>
         </p:spPr>
         <p:txBody>
-          <a:bodyPr wrap="square" lIns="27432" rIns="27432" tIns="9144" bIns="9144" anchor="t">
+          <a:bodyPr wrap="square" lIns="27432" tIns="9144" rIns="27432" bIns="9144" anchor="t">
             <a:spAutoFit/>
           </a:bodyPr>
           <a:lstStyle/>
           <a:p>
             <a:pPr algn="l"/>
             <a:r>
-              <a:rPr b="0" sz="1220">
+              <a:rPr sz="1220" b="0">
                 <a:solidFill>
                   <a:srgbClr val="141A1F"/>
                 </a:solidFill>
-                <a:latin typeface="SimSun"/>
+                <a:latin typeface="宋体" panose="02010600030101010101" pitchFamily="2" charset="-122"/>
               </a:rPr>
               <a:t>需要规范治疗中心
 采集、制造、回输能力</a:t>
             </a:r>
+            <a:endParaRPr sz="1220" b="0">
+              <a:solidFill>
+                <a:srgbClr val="141A1F"/>
+              </a:solidFill>
+              <a:latin typeface="宋体" panose="02010600030101010101" pitchFamily="2" charset="-122"/>
+            </a:endParaRPr>
           </a:p>
         </p:txBody>
       </p:sp>
@@ -8999,21 +9262,27 @@
           <a:noFill/>
         </p:spPr>
         <p:txBody>
-          <a:bodyPr wrap="square" lIns="27432" rIns="27432" tIns="9144" bIns="9144" anchor="t">
+          <a:bodyPr wrap="square" lIns="27432" tIns="9144" rIns="27432" bIns="9144" anchor="t">
             <a:spAutoFit/>
           </a:bodyPr>
           <a:lstStyle/>
           <a:p>
             <a:pPr algn="l"/>
             <a:r>
-              <a:rPr b="1" sz="1550">
+              <a:rPr sz="1550" b="1">
                 <a:solidFill>
                   <a:srgbClr val="E59E3A"/>
                 </a:solidFill>
-                <a:latin typeface="SimHei"/>
+                <a:latin typeface="黑体" panose="02010609060101010101" charset="-122"/>
               </a:rPr>
               <a:t>支付与转诊</a:t>
             </a:r>
+            <a:endParaRPr sz="1550" b="1">
+              <a:solidFill>
+                <a:srgbClr val="E59E3A"/>
+              </a:solidFill>
+              <a:latin typeface="黑体" panose="02010609060101010101" charset="-122"/>
+            </a:endParaRPr>
           </a:p>
         </p:txBody>
       </p:sp>
@@ -9034,23 +9303,29 @@
           <a:noFill/>
         </p:spPr>
         <p:txBody>
-          <a:bodyPr wrap="square" lIns="27432" rIns="27432" tIns="9144" bIns="9144" anchor="t">
+          <a:bodyPr wrap="square" lIns="27432" tIns="9144" rIns="27432" bIns="9144" anchor="t">
             <a:spAutoFit/>
           </a:bodyPr>
           <a:lstStyle/>
           <a:p>
             <a:pPr algn="l"/>
             <a:r>
-              <a:rPr b="0" sz="1220">
+              <a:rPr sz="1220" b="0">
                 <a:solidFill>
                   <a:srgbClr val="141A1F"/>
                 </a:solidFill>
-                <a:latin typeface="SimSun"/>
+                <a:latin typeface="宋体" panose="02010600030101010101" pitchFamily="2" charset="-122"/>
               </a:rPr>
               <a:t>保险支付
 跨区域转诊
 等待周期</a:t>
             </a:r>
+            <a:endParaRPr sz="1220" b="0">
+              <a:solidFill>
+                <a:srgbClr val="141A1F"/>
+              </a:solidFill>
+              <a:latin typeface="宋体" panose="02010600030101010101" pitchFamily="2" charset="-122"/>
+            </a:endParaRPr>
           </a:p>
         </p:txBody>
       </p:sp>
@@ -9116,21 +9391,27 @@
           <a:noFill/>
         </p:spPr>
         <p:txBody>
-          <a:bodyPr wrap="square" lIns="27432" rIns="27432" tIns="9144" bIns="9144" anchor="t">
+          <a:bodyPr wrap="square" lIns="27432" tIns="9144" rIns="27432" bIns="9144" anchor="t">
             <a:spAutoFit/>
           </a:bodyPr>
           <a:lstStyle/>
           <a:p>
             <a:pPr algn="l"/>
             <a:r>
-              <a:rPr b="1" sz="1550">
+              <a:rPr sz="1550" b="1">
                 <a:solidFill>
                   <a:srgbClr val="1C3848"/>
                 </a:solidFill>
-                <a:latin typeface="SimHei"/>
+                <a:latin typeface="黑体" panose="02010609060101010101" charset="-122"/>
               </a:rPr>
               <a:t>知情同意</a:t>
             </a:r>
+            <a:endParaRPr sz="1550" b="1">
+              <a:solidFill>
+                <a:srgbClr val="1C3848"/>
+              </a:solidFill>
+              <a:latin typeface="黑体" panose="02010609060101010101" charset="-122"/>
+            </a:endParaRPr>
           </a:p>
         </p:txBody>
       </p:sp>
@@ -9151,23 +9432,29 @@
           <a:noFill/>
         </p:spPr>
         <p:txBody>
-          <a:bodyPr wrap="square" lIns="27432" rIns="27432" tIns="9144" bIns="9144" anchor="t">
+          <a:bodyPr wrap="square" lIns="27432" tIns="9144" rIns="27432" bIns="9144" anchor="t">
             <a:spAutoFit/>
           </a:bodyPr>
           <a:lstStyle/>
           <a:p>
             <a:pPr algn="l"/>
             <a:r>
-              <a:rPr b="0" sz="1220">
+              <a:rPr sz="1220" b="0">
                 <a:solidFill>
                   <a:srgbClr val="141A1F"/>
                 </a:solidFill>
-                <a:latin typeface="SimSun"/>
+                <a:latin typeface="宋体" panose="02010600030101010101" pitchFamily="2" charset="-122"/>
               </a:rPr>
               <a:t>长期风险
 替代方案
 随访数据公开</a:t>
             </a:r>
+            <a:endParaRPr sz="1220" b="0">
+              <a:solidFill>
+                <a:srgbClr val="141A1F"/>
+              </a:solidFill>
+              <a:latin typeface="宋体" panose="02010600030101010101" pitchFamily="2" charset="-122"/>
+            </a:endParaRPr>
           </a:p>
         </p:txBody>
       </p:sp>
@@ -9188,21 +9475,27 @@
           <a:noFill/>
         </p:spPr>
         <p:txBody>
-          <a:bodyPr wrap="square" lIns="27432" rIns="27432" tIns="9144" bIns="9144" anchor="t">
-            <a:spAutoFit/>
-          </a:bodyPr>
-          <a:lstStyle/>
-          <a:p>
-            <a:pPr algn="ctr"/>
-            <a:r>
-              <a:rPr b="1" sz="1900">
+          <a:bodyPr wrap="square" lIns="27432" tIns="9144" rIns="27432" bIns="9144" anchor="t">
+            <a:spAutoFit/>
+          </a:bodyPr>
+          <a:lstStyle/>
+          <a:p>
+            <a:pPr algn="ctr"/>
+            <a:r>
+              <a:rPr sz="1900" b="1">
                 <a:solidFill>
                   <a:srgbClr val="12293A"/>
                 </a:solidFill>
-                <a:latin typeface="SimHei"/>
+                <a:latin typeface="黑体" panose="02010609060101010101" charset="-122"/>
               </a:rPr>
               <a:t>公共价值 = 临床获益 × 风险透明 × 可及性。</a:t>
             </a:r>
+            <a:endParaRPr sz="1900" b="1">
+              <a:solidFill>
+                <a:srgbClr val="12293A"/>
+              </a:solidFill>
+              <a:latin typeface="黑体" panose="02010609060101010101" charset="-122"/>
+            </a:endParaRPr>
           </a:p>
         </p:txBody>
       </p:sp>
@@ -9215,7 +9508,7 @@
 </file>
 
 <file path=ppt/slides/slide14.xml><?xml version="1.0" encoding="utf-8"?>
-<p:sld xmlns:a="http://schemas.openxmlformats.org/drawingml/2006/main" xmlns:p="http://schemas.openxmlformats.org/presentationml/2006/main" xmlns:r="http://schemas.openxmlformats.org/officeDocument/2006/relationships">
+<p:sld xmlns:a="http://schemas.openxmlformats.org/drawingml/2006/main" xmlns:r="http://schemas.openxmlformats.org/officeDocument/2006/relationships" xmlns:p="http://schemas.openxmlformats.org/presentationml/2006/main">
   <p:cSld>
     <p:spTree>
       <p:nvGrpSpPr>
@@ -9331,21 +9624,27 @@
           <a:noFill/>
         </p:spPr>
         <p:txBody>
-          <a:bodyPr wrap="square" lIns="27432" rIns="27432" tIns="9144" bIns="9144" anchor="t">
+          <a:bodyPr wrap="square" lIns="27432" tIns="9144" rIns="27432" bIns="9144" anchor="t">
             <a:spAutoFit/>
           </a:bodyPr>
           <a:lstStyle/>
           <a:p>
             <a:pPr algn="l"/>
             <a:r>
-              <a:rPr b="1" sz="1100">
+              <a:rPr sz="1100" b="1">
                 <a:solidFill>
                   <a:srgbClr val="1C908B"/>
                 </a:solidFill>
-                <a:latin typeface="SimHei"/>
+                <a:latin typeface="黑体" panose="02010609060101010101" charset="-122"/>
               </a:rPr>
               <a:t>未来</a:t>
             </a:r>
+            <a:endParaRPr sz="1100" b="1">
+              <a:solidFill>
+                <a:srgbClr val="1C908B"/>
+              </a:solidFill>
+              <a:latin typeface="黑体" panose="02010609060101010101" charset="-122"/>
+            </a:endParaRPr>
           </a:p>
         </p:txBody>
       </p:sp>
@@ -9366,21 +9665,27 @@
           <a:noFill/>
         </p:spPr>
         <p:txBody>
-          <a:bodyPr wrap="square" lIns="27432" rIns="27432" tIns="9144" bIns="9144" anchor="t">
+          <a:bodyPr wrap="square" lIns="27432" tIns="9144" rIns="27432" bIns="9144" anchor="t">
             <a:spAutoFit/>
           </a:bodyPr>
           <a:lstStyle/>
           <a:p>
             <a:pPr algn="l"/>
             <a:r>
-              <a:rPr b="1" sz="2550">
+              <a:rPr sz="2550" b="1">
                 <a:solidFill>
                   <a:srgbClr val="12293A"/>
                 </a:solidFill>
-                <a:latin typeface="SimHei"/>
+                <a:latin typeface="黑体" panose="02010609060101010101" charset="-122"/>
               </a:rPr>
               <a:t>下一步不是更神奇，而是更可控、更公平</a:t>
             </a:r>
+            <a:endParaRPr sz="2550" b="1">
+              <a:solidFill>
+                <a:srgbClr val="12293A"/>
+              </a:solidFill>
+              <a:latin typeface="黑体" panose="02010609060101010101" charset="-122"/>
+            </a:endParaRPr>
           </a:p>
         </p:txBody>
       </p:sp>
@@ -9446,21 +9751,27 @@
           <a:noFill/>
         </p:spPr>
         <p:txBody>
-          <a:bodyPr wrap="square" lIns="27432" rIns="27432" tIns="9144" bIns="9144" anchor="t">
+          <a:bodyPr wrap="square" lIns="27432" tIns="9144" rIns="27432" bIns="9144" anchor="t">
             <a:spAutoFit/>
           </a:bodyPr>
           <a:lstStyle/>
           <a:p>
             <a:pPr algn="l"/>
             <a:r>
-              <a:rPr b="1" sz="1420">
+              <a:rPr sz="1420" b="1">
                 <a:solidFill>
                   <a:srgbClr val="12293A"/>
                 </a:solidFill>
-                <a:latin typeface="SimHei"/>
+                <a:latin typeface="黑体" panose="02010609060101010101" charset="-122"/>
               </a:rPr>
               <a:t>未来重点是精准筛选、安全管理和可及性改善。</a:t>
             </a:r>
+            <a:endParaRPr sz="1420" b="1">
+              <a:solidFill>
+                <a:srgbClr val="12293A"/>
+              </a:solidFill>
+              <a:latin typeface="黑体" panose="02010609060101010101" charset="-122"/>
+            </a:endParaRPr>
           </a:p>
         </p:txBody>
       </p:sp>
@@ -9481,56 +9792,27 @@
           <a:noFill/>
         </p:spPr>
         <p:txBody>
-          <a:bodyPr wrap="square" lIns="27432" rIns="27432" tIns="9144" bIns="9144" anchor="t">
+          <a:bodyPr wrap="square" lIns="27432" tIns="9144" rIns="27432" bIns="9144" anchor="t">
             <a:spAutoFit/>
           </a:bodyPr>
           <a:lstStyle/>
           <a:p>
             <a:pPr algn="l"/>
             <a:r>
-              <a:rPr b="1" sz="819">
+              <a:rPr sz="820" b="1">
                 <a:solidFill>
                   <a:srgbClr val="586874"/>
                 </a:solidFill>
-                <a:latin typeface="SimHei"/>
+                <a:latin typeface="黑体" panose="02010609060101010101" charset="-122"/>
               </a:rPr>
               <a:t>14/15</a:t>
             </a:r>
-          </a:p>
-        </p:txBody>
-      </p:sp>
-      <p:sp>
-        <p:nvSpPr>
-          <p:cNvPr id="9" name="TextBox 8"/>
-          <p:cNvSpPr txBox="1"/>
-          <p:nvPr/>
-        </p:nvSpPr>
-        <p:spPr>
-          <a:xfrm>
-            <a:off x="1060704" y="6400800"/>
-            <a:ext cx="10332720" cy="228600"/>
-          </a:xfrm>
-          <a:prstGeom prst="rect">
-            <a:avLst/>
-          </a:prstGeom>
-          <a:noFill/>
-        </p:spPr>
-        <p:txBody>
-          <a:bodyPr wrap="square" lIns="27432" rIns="27432" tIns="9144" bIns="9144" anchor="t">
-            <a:spAutoFit/>
-          </a:bodyPr>
-          <a:lstStyle/>
-          <a:p>
-            <a:pPr algn="l"/>
-            <a:r>
-              <a:rPr b="0" sz="800">
-                <a:solidFill>
-                  <a:srgbClr val="586874"/>
-                </a:solidFill>
-                <a:latin typeface="SimSun"/>
-              </a:rPr>
-              <a:t>综合资料：NCI；FDA</a:t>
-            </a:r>
+            <a:endParaRPr sz="820" b="1">
+              <a:solidFill>
+                <a:srgbClr val="586874"/>
+              </a:solidFill>
+              <a:latin typeface="黑体" panose="02010609060101010101" charset="-122"/>
+            </a:endParaRPr>
           </a:p>
         </p:txBody>
       </p:sp>
@@ -9596,21 +9878,27 @@
           <a:noFill/>
         </p:spPr>
         <p:txBody>
-          <a:bodyPr wrap="square" lIns="27432" rIns="27432" tIns="9144" bIns="9144" anchor="t">
-            <a:spAutoFit/>
-          </a:bodyPr>
-          <a:lstStyle/>
-          <a:p>
-            <a:pPr algn="ctr"/>
-            <a:r>
-              <a:rPr b="1" sz="2500">
+          <a:bodyPr wrap="square" lIns="27432" tIns="9144" rIns="27432" bIns="9144" anchor="t">
+            <a:spAutoFit/>
+          </a:bodyPr>
+          <a:lstStyle/>
+          <a:p>
+            <a:pPr algn="ctr"/>
+            <a:r>
+              <a:rPr sz="2500" b="1">
                 <a:solidFill>
                   <a:srgbClr val="12293A"/>
                 </a:solidFill>
-                <a:latin typeface="SimHei"/>
+                <a:latin typeface="黑体" panose="02010609060101010101" charset="-122"/>
               </a:rPr>
               <a:t>更准</a:t>
             </a:r>
+            <a:endParaRPr sz="2500" b="1">
+              <a:solidFill>
+                <a:srgbClr val="12293A"/>
+              </a:solidFill>
+              <a:latin typeface="黑体" panose="02010609060101010101" charset="-122"/>
+            </a:endParaRPr>
           </a:p>
         </p:txBody>
       </p:sp>
@@ -9631,22 +9919,28 @@
           <a:noFill/>
         </p:spPr>
         <p:txBody>
-          <a:bodyPr wrap="square" lIns="27432" rIns="27432" tIns="9144" bIns="9144" anchor="t">
-            <a:spAutoFit/>
-          </a:bodyPr>
-          <a:lstStyle/>
-          <a:p>
-            <a:pPr algn="ctr"/>
-            <a:r>
-              <a:rPr b="0" sz="1430">
+          <a:bodyPr wrap="square" lIns="27432" tIns="9144" rIns="27432" bIns="9144" anchor="t">
+            <a:spAutoFit/>
+          </a:bodyPr>
+          <a:lstStyle/>
+          <a:p>
+            <a:pPr algn="ctr"/>
+            <a:r>
+              <a:rPr sz="1430" b="0">
                 <a:solidFill>
                   <a:srgbClr val="141A1F"/>
                 </a:solidFill>
-                <a:latin typeface="SimSun"/>
+                <a:latin typeface="宋体" panose="02010600030101010101" pitchFamily="2" charset="-122"/>
               </a:rPr>
               <a:t>生物标志物筛选患者
 减少无效治疗</a:t>
             </a:r>
+            <a:endParaRPr sz="1430" b="0">
+              <a:solidFill>
+                <a:srgbClr val="141A1F"/>
+              </a:solidFill>
+              <a:latin typeface="宋体" panose="02010600030101010101" pitchFamily="2" charset="-122"/>
+            </a:endParaRPr>
           </a:p>
         </p:txBody>
       </p:sp>
@@ -9712,21 +10006,27 @@
           <a:noFill/>
         </p:spPr>
         <p:txBody>
-          <a:bodyPr wrap="square" lIns="27432" rIns="27432" tIns="9144" bIns="9144" anchor="t">
-            <a:spAutoFit/>
-          </a:bodyPr>
-          <a:lstStyle/>
-          <a:p>
-            <a:pPr algn="ctr"/>
-            <a:r>
-              <a:rPr b="1" sz="2500">
+          <a:bodyPr wrap="square" lIns="27432" tIns="9144" rIns="27432" bIns="9144" anchor="t">
+            <a:spAutoFit/>
+          </a:bodyPr>
+          <a:lstStyle/>
+          <a:p>
+            <a:pPr algn="ctr"/>
+            <a:r>
+              <a:rPr sz="2500" b="1">
                 <a:solidFill>
                   <a:srgbClr val="12293A"/>
                 </a:solidFill>
-                <a:latin typeface="SimHei"/>
+                <a:latin typeface="黑体" panose="02010609060101010101" charset="-122"/>
               </a:rPr>
               <a:t>更安全</a:t>
             </a:r>
+            <a:endParaRPr sz="2500" b="1">
+              <a:solidFill>
+                <a:srgbClr val="12293A"/>
+              </a:solidFill>
+              <a:latin typeface="黑体" panose="02010609060101010101" charset="-122"/>
+            </a:endParaRPr>
           </a:p>
         </p:txBody>
       </p:sp>
@@ -9747,22 +10047,28 @@
           <a:noFill/>
         </p:spPr>
         <p:txBody>
-          <a:bodyPr wrap="square" lIns="27432" rIns="27432" tIns="9144" bIns="9144" anchor="t">
-            <a:spAutoFit/>
-          </a:bodyPr>
-          <a:lstStyle/>
-          <a:p>
-            <a:pPr algn="ctr"/>
-            <a:r>
-              <a:rPr b="0" sz="1430">
+          <a:bodyPr wrap="square" lIns="27432" tIns="9144" rIns="27432" bIns="9144" anchor="t">
+            <a:spAutoFit/>
+          </a:bodyPr>
+          <a:lstStyle/>
+          <a:p>
+            <a:pPr algn="ctr"/>
+            <a:r>
+              <a:rPr sz="1430" b="0">
                 <a:solidFill>
                   <a:srgbClr val="141A1F"/>
                 </a:solidFill>
-                <a:latin typeface="SimSun"/>
+                <a:latin typeface="宋体" panose="02010600030101010101" pitchFamily="2" charset="-122"/>
               </a:rPr>
               <a:t>降低 CRS / ICANS
 强化长期登记</a:t>
             </a:r>
+            <a:endParaRPr sz="1430" b="0">
+              <a:solidFill>
+                <a:srgbClr val="141A1F"/>
+              </a:solidFill>
+              <a:latin typeface="宋体" panose="02010600030101010101" pitchFamily="2" charset="-122"/>
+            </a:endParaRPr>
           </a:p>
         </p:txBody>
       </p:sp>
@@ -9828,21 +10134,27 @@
           <a:noFill/>
         </p:spPr>
         <p:txBody>
-          <a:bodyPr wrap="square" lIns="27432" rIns="27432" tIns="9144" bIns="9144" anchor="t">
-            <a:spAutoFit/>
-          </a:bodyPr>
-          <a:lstStyle/>
-          <a:p>
-            <a:pPr algn="ctr"/>
-            <a:r>
-              <a:rPr b="1" sz="2500">
+          <a:bodyPr wrap="square" lIns="27432" tIns="9144" rIns="27432" bIns="9144" anchor="t">
+            <a:spAutoFit/>
+          </a:bodyPr>
+          <a:lstStyle/>
+          <a:p>
+            <a:pPr algn="ctr"/>
+            <a:r>
+              <a:rPr sz="2500" b="1">
                 <a:solidFill>
                   <a:srgbClr val="12293A"/>
                 </a:solidFill>
-                <a:latin typeface="SimHei"/>
+                <a:latin typeface="黑体" panose="02010609060101010101" charset="-122"/>
               </a:rPr>
               <a:t>更可及</a:t>
             </a:r>
+            <a:endParaRPr sz="2500" b="1">
+              <a:solidFill>
+                <a:srgbClr val="12293A"/>
+              </a:solidFill>
+              <a:latin typeface="黑体" panose="02010609060101010101" charset="-122"/>
+            </a:endParaRPr>
           </a:p>
         </p:txBody>
       </p:sp>
@@ -9863,22 +10175,28 @@
           <a:noFill/>
         </p:spPr>
         <p:txBody>
-          <a:bodyPr wrap="square" lIns="27432" rIns="27432" tIns="9144" bIns="9144" anchor="t">
-            <a:spAutoFit/>
-          </a:bodyPr>
-          <a:lstStyle/>
-          <a:p>
-            <a:pPr algn="ctr"/>
-            <a:r>
-              <a:rPr b="0" sz="1430">
+          <a:bodyPr wrap="square" lIns="27432" tIns="9144" rIns="27432" bIns="9144" anchor="t">
+            <a:spAutoFit/>
+          </a:bodyPr>
+          <a:lstStyle/>
+          <a:p>
+            <a:pPr algn="ctr"/>
+            <a:r>
+              <a:rPr sz="1430" b="0">
                 <a:solidFill>
                   <a:srgbClr val="141A1F"/>
                 </a:solidFill>
-                <a:latin typeface="SimSun"/>
+                <a:latin typeface="宋体" panose="02010600030101010101" pitchFamily="2" charset="-122"/>
               </a:rPr>
               <a:t>缩短制造周期
 改善支付和转诊</a:t>
             </a:r>
+            <a:endParaRPr sz="1430" b="0">
+              <a:solidFill>
+                <a:srgbClr val="141A1F"/>
+              </a:solidFill>
+              <a:latin typeface="宋体" panose="02010600030101010101" pitchFamily="2" charset="-122"/>
+            </a:endParaRPr>
           </a:p>
         </p:txBody>
       </p:sp>
@@ -9899,21 +10217,27 @@
           <a:noFill/>
         </p:spPr>
         <p:txBody>
-          <a:bodyPr wrap="square" lIns="27432" rIns="27432" tIns="9144" bIns="9144" anchor="t">
-            <a:spAutoFit/>
-          </a:bodyPr>
-          <a:lstStyle/>
-          <a:p>
-            <a:pPr algn="ctr"/>
-            <a:r>
-              <a:rPr b="1" sz="1720">
+          <a:bodyPr wrap="square" lIns="27432" tIns="9144" rIns="27432" bIns="9144" anchor="t">
+            <a:spAutoFit/>
+          </a:bodyPr>
+          <a:lstStyle/>
+          <a:p>
+            <a:pPr algn="ctr"/>
+            <a:r>
+              <a:rPr sz="1720" b="1">
                 <a:solidFill>
                   <a:srgbClr val="12293A"/>
                 </a:solidFill>
-                <a:latin typeface="SimHei"/>
+                <a:latin typeface="黑体" panose="02010609060101010101" charset="-122"/>
               </a:rPr>
               <a:t>历史方向：从“能不能做”走向“能否规范、安全、公平地做”。</a:t>
             </a:r>
+            <a:endParaRPr sz="1720" b="1">
+              <a:solidFill>
+                <a:srgbClr val="12293A"/>
+              </a:solidFill>
+              <a:latin typeface="黑体" panose="02010609060101010101" charset="-122"/>
+            </a:endParaRPr>
           </a:p>
         </p:txBody>
       </p:sp>
@@ -9926,7 +10250,7 @@
 </file>
 
 <file path=ppt/slides/slide15.xml><?xml version="1.0" encoding="utf-8"?>
-<p:sld xmlns:a="http://schemas.openxmlformats.org/drawingml/2006/main" xmlns:p="http://schemas.openxmlformats.org/presentationml/2006/main" xmlns:r="http://schemas.openxmlformats.org/officeDocument/2006/relationships">
+<p:sld xmlns:a="http://schemas.openxmlformats.org/drawingml/2006/main" xmlns:r="http://schemas.openxmlformats.org/officeDocument/2006/relationships" xmlns:p="http://schemas.openxmlformats.org/presentationml/2006/main">
   <p:cSld>
     <p:spTree>
       <p:nvGrpSpPr>
@@ -10042,21 +10366,27 @@
           <a:noFill/>
         </p:spPr>
         <p:txBody>
-          <a:bodyPr wrap="square" lIns="27432" rIns="27432" tIns="9144" bIns="9144" anchor="t">
+          <a:bodyPr wrap="square" lIns="27432" tIns="9144" rIns="27432" bIns="9144" anchor="t">
             <a:spAutoFit/>
           </a:bodyPr>
           <a:lstStyle/>
           <a:p>
             <a:pPr algn="l"/>
             <a:r>
-              <a:rPr b="1" sz="1100">
+              <a:rPr sz="1100" b="1">
                 <a:solidFill>
                   <a:srgbClr val="1C908B"/>
                 </a:solidFill>
-                <a:latin typeface="SimHei"/>
+                <a:latin typeface="黑体" panose="02010609060101010101" charset="-122"/>
               </a:rPr>
               <a:t>结论</a:t>
             </a:r>
+            <a:endParaRPr sz="1100" b="1">
+              <a:solidFill>
+                <a:srgbClr val="1C908B"/>
+              </a:solidFill>
+              <a:latin typeface="黑体" panose="02010609060101010101" charset="-122"/>
+            </a:endParaRPr>
           </a:p>
         </p:txBody>
       </p:sp>
@@ -10077,21 +10407,27 @@
           <a:noFill/>
         </p:spPr>
         <p:txBody>
-          <a:bodyPr wrap="square" lIns="27432" rIns="27432" tIns="9144" bIns="9144" anchor="t">
+          <a:bodyPr wrap="square" lIns="27432" tIns="9144" rIns="27432" bIns="9144" anchor="t">
             <a:spAutoFit/>
           </a:bodyPr>
           <a:lstStyle/>
           <a:p>
             <a:pPr algn="l"/>
             <a:r>
-              <a:rPr b="1" sz="2550">
+              <a:rPr sz="2550" b="1">
                 <a:solidFill>
                   <a:srgbClr val="12293A"/>
                 </a:solidFill>
-                <a:latin typeface="SimHei"/>
+                <a:latin typeface="黑体" panose="02010609060101010101" charset="-122"/>
               </a:rPr>
               <a:t>支持发展，但不神化</a:t>
             </a:r>
+            <a:endParaRPr sz="2550" b="1">
+              <a:solidFill>
+                <a:srgbClr val="12293A"/>
+              </a:solidFill>
+              <a:latin typeface="黑体" panose="02010609060101010101" charset="-122"/>
+            </a:endParaRPr>
           </a:p>
         </p:txBody>
       </p:sp>
@@ -10157,21 +10493,27 @@
           <a:noFill/>
         </p:spPr>
         <p:txBody>
-          <a:bodyPr wrap="square" lIns="27432" rIns="27432" tIns="9144" bIns="9144" anchor="t">
+          <a:bodyPr wrap="square" lIns="27432" tIns="9144" rIns="27432" bIns="9144" anchor="t">
             <a:spAutoFit/>
           </a:bodyPr>
           <a:lstStyle/>
           <a:p>
             <a:pPr algn="l"/>
             <a:r>
-              <a:rPr b="1" sz="1420">
+              <a:rPr sz="1420" b="1">
                 <a:solidFill>
                   <a:srgbClr val="12293A"/>
                 </a:solidFill>
-                <a:latin typeface="SimHei"/>
+                <a:latin typeface="黑体" panose="02010609060101010101" charset="-122"/>
               </a:rPr>
               <a:t>历史意义、临床价值、审慎边界必须同时成立。</a:t>
             </a:r>
+            <a:endParaRPr sz="1420" b="1">
+              <a:solidFill>
+                <a:srgbClr val="12293A"/>
+              </a:solidFill>
+              <a:latin typeface="黑体" panose="02010609060101010101" charset="-122"/>
+            </a:endParaRPr>
           </a:p>
         </p:txBody>
       </p:sp>
@@ -10192,56 +10534,27 @@
           <a:noFill/>
         </p:spPr>
         <p:txBody>
-          <a:bodyPr wrap="square" lIns="27432" rIns="27432" tIns="9144" bIns="9144" anchor="t">
+          <a:bodyPr wrap="square" lIns="27432" tIns="9144" rIns="27432" bIns="9144" anchor="t">
             <a:spAutoFit/>
           </a:bodyPr>
           <a:lstStyle/>
           <a:p>
             <a:pPr algn="l"/>
             <a:r>
-              <a:rPr b="1" sz="819">
+              <a:rPr sz="820" b="1">
                 <a:solidFill>
                   <a:srgbClr val="586874"/>
                 </a:solidFill>
-                <a:latin typeface="SimHei"/>
+                <a:latin typeface="黑体" panose="02010609060101010101" charset="-122"/>
               </a:rPr>
               <a:t>15/15</a:t>
             </a:r>
-          </a:p>
-        </p:txBody>
-      </p:sp>
-      <p:sp>
-        <p:nvSpPr>
-          <p:cNvPr id="9" name="TextBox 8"/>
-          <p:cNvSpPr txBox="1"/>
-          <p:nvPr/>
-        </p:nvSpPr>
-        <p:spPr>
-          <a:xfrm>
-            <a:off x="1060704" y="6400800"/>
-            <a:ext cx="10332720" cy="228600"/>
-          </a:xfrm>
-          <a:prstGeom prst="rect">
-            <a:avLst/>
-          </a:prstGeom>
-          <a:noFill/>
-        </p:spPr>
-        <p:txBody>
-          <a:bodyPr wrap="square" lIns="27432" rIns="27432" tIns="9144" bIns="9144" anchor="t">
-            <a:spAutoFit/>
-          </a:bodyPr>
-          <a:lstStyle/>
-          <a:p>
-            <a:pPr algn="l"/>
-            <a:r>
-              <a:rPr b="0" sz="800">
-                <a:solidFill>
-                  <a:srgbClr val="586874"/>
-                </a:solidFill>
-                <a:latin typeface="SimSun"/>
-              </a:rPr>
-              <a:t>综合资料：ACS；NCI；FDA；Nobel Prize</a:t>
-            </a:r>
+            <a:endParaRPr sz="820" b="1">
+              <a:solidFill>
+                <a:srgbClr val="586874"/>
+              </a:solidFill>
+              <a:latin typeface="黑体" panose="02010609060101010101" charset="-122"/>
+            </a:endParaRPr>
           </a:p>
         </p:txBody>
       </p:sp>
@@ -10307,21 +10620,27 @@
           <a:noFill/>
         </p:spPr>
         <p:txBody>
-          <a:bodyPr wrap="square" lIns="27432" rIns="27432" tIns="9144" bIns="9144" anchor="t">
+          <a:bodyPr wrap="square" lIns="27432" tIns="9144" rIns="27432" bIns="9144" anchor="t">
             <a:spAutoFit/>
           </a:bodyPr>
           <a:lstStyle/>
           <a:p>
             <a:pPr algn="l"/>
             <a:r>
-              <a:rPr b="1" sz="1460">
+              <a:rPr sz="1460" b="1">
                 <a:solidFill>
                   <a:srgbClr val="1C908B"/>
                 </a:solidFill>
-                <a:latin typeface="SimHei"/>
+                <a:latin typeface="黑体" panose="02010609060101010101" charset="-122"/>
               </a:rPr>
               <a:t>历史意义</a:t>
             </a:r>
+            <a:endParaRPr sz="1460" b="1">
+              <a:solidFill>
+                <a:srgbClr val="1C908B"/>
+              </a:solidFill>
+              <a:latin typeface="黑体" panose="02010609060101010101" charset="-122"/>
+            </a:endParaRPr>
           </a:p>
         </p:txBody>
       </p:sp>
@@ -10342,21 +10661,27 @@
           <a:noFill/>
         </p:spPr>
         <p:txBody>
-          <a:bodyPr wrap="square" lIns="27432" rIns="27432" tIns="9144" bIns="9144" anchor="t">
+          <a:bodyPr wrap="square" lIns="27432" tIns="9144" rIns="27432" bIns="9144" anchor="t">
             <a:spAutoFit/>
           </a:bodyPr>
           <a:lstStyle/>
           <a:p>
             <a:pPr algn="l"/>
             <a:r>
-              <a:rPr b="1" sz="1500">
+              <a:rPr sz="1500" b="1">
                 <a:solidFill>
                   <a:srgbClr val="12293A"/>
                 </a:solidFill>
-                <a:latin typeface="SimSun"/>
+                <a:latin typeface="宋体" panose="02010600030101010101" pitchFamily="2" charset="-122"/>
               </a:rPr>
               <a:t>细胞治疗与免疫治疗改变了医学对疾病的干预对象。</a:t>
             </a:r>
+            <a:endParaRPr sz="1500" b="1">
+              <a:solidFill>
+                <a:srgbClr val="12293A"/>
+              </a:solidFill>
+              <a:latin typeface="宋体" panose="02010600030101010101" pitchFamily="2" charset="-122"/>
+            </a:endParaRPr>
           </a:p>
         </p:txBody>
       </p:sp>
@@ -10422,21 +10747,27 @@
           <a:noFill/>
         </p:spPr>
         <p:txBody>
-          <a:bodyPr wrap="square" lIns="27432" rIns="27432" tIns="9144" bIns="9144" anchor="t">
+          <a:bodyPr wrap="square" lIns="27432" tIns="9144" rIns="27432" bIns="9144" anchor="t">
             <a:spAutoFit/>
           </a:bodyPr>
           <a:lstStyle/>
           <a:p>
             <a:pPr algn="l"/>
             <a:r>
-              <a:rPr b="1" sz="1460">
+              <a:rPr sz="1460" b="1">
                 <a:solidFill>
                   <a:srgbClr val="E59E3A"/>
                 </a:solidFill>
-                <a:latin typeface="SimHei"/>
+                <a:latin typeface="黑体" panose="02010609060101010101" charset="-122"/>
               </a:rPr>
               <a:t>临床价值</a:t>
             </a:r>
+            <a:endParaRPr sz="1460" b="1">
+              <a:solidFill>
+                <a:srgbClr val="E59E3A"/>
+              </a:solidFill>
+              <a:latin typeface="黑体" panose="02010609060101010101" charset="-122"/>
+            </a:endParaRPr>
           </a:p>
         </p:txBody>
       </p:sp>
@@ -10457,21 +10788,27 @@
           <a:noFill/>
         </p:spPr>
         <p:txBody>
-          <a:bodyPr wrap="square" lIns="27432" rIns="27432" tIns="9144" bIns="9144" anchor="t">
+          <a:bodyPr wrap="square" lIns="27432" tIns="9144" rIns="27432" bIns="9144" anchor="t">
             <a:spAutoFit/>
           </a:bodyPr>
           <a:lstStyle/>
           <a:p>
             <a:pPr algn="l"/>
             <a:r>
-              <a:rPr b="1" sz="1500">
+              <a:rPr sz="1500" b="1">
                 <a:solidFill>
                   <a:srgbClr val="12293A"/>
                 </a:solidFill>
-                <a:latin typeface="SimSun"/>
+                <a:latin typeface="宋体" panose="02010600030101010101" pitchFamily="2" charset="-122"/>
               </a:rPr>
               <a:t>已在部分血液肿瘤、TMB-H 实体瘤和特定黑色素瘤中显示真实证据。</a:t>
             </a:r>
+            <a:endParaRPr sz="1500" b="1">
+              <a:solidFill>
+                <a:srgbClr val="12293A"/>
+              </a:solidFill>
+              <a:latin typeface="宋体" panose="02010600030101010101" pitchFamily="2" charset="-122"/>
+            </a:endParaRPr>
           </a:p>
         </p:txBody>
       </p:sp>
@@ -10537,21 +10874,27 @@
           <a:noFill/>
         </p:spPr>
         <p:txBody>
-          <a:bodyPr wrap="square" lIns="27432" rIns="27432" tIns="9144" bIns="9144" anchor="t">
+          <a:bodyPr wrap="square" lIns="27432" tIns="9144" rIns="27432" bIns="9144" anchor="t">
             <a:spAutoFit/>
           </a:bodyPr>
           <a:lstStyle/>
           <a:p>
             <a:pPr algn="l"/>
             <a:r>
-              <a:rPr b="1" sz="1460">
+              <a:rPr sz="1460" b="1">
                 <a:solidFill>
                   <a:srgbClr val="C04A43"/>
                 </a:solidFill>
-                <a:latin typeface="SimHei"/>
+                <a:latin typeface="黑体" panose="02010609060101010101" charset="-122"/>
               </a:rPr>
               <a:t>审慎边界</a:t>
             </a:r>
+            <a:endParaRPr sz="1460" b="1">
+              <a:solidFill>
+                <a:srgbClr val="C04A43"/>
+              </a:solidFill>
+              <a:latin typeface="黑体" panose="02010609060101010101" charset="-122"/>
+            </a:endParaRPr>
           </a:p>
         </p:txBody>
       </p:sp>
@@ -10572,21 +10915,27 @@
           <a:noFill/>
         </p:spPr>
         <p:txBody>
-          <a:bodyPr wrap="square" lIns="27432" rIns="27432" tIns="9144" bIns="9144" anchor="t">
+          <a:bodyPr wrap="square" lIns="27432" tIns="9144" rIns="27432" bIns="9144" anchor="t">
             <a:spAutoFit/>
           </a:bodyPr>
           <a:lstStyle/>
           <a:p>
             <a:pPr algn="l"/>
             <a:r>
-              <a:rPr b="1" sz="1500">
+              <a:rPr sz="1500" b="1">
                 <a:solidFill>
                   <a:srgbClr val="12293A"/>
                 </a:solidFill>
-                <a:latin typeface="SimSun"/>
+                <a:latin typeface="宋体" panose="02010600030101010101" pitchFamily="2" charset="-122"/>
               </a:rPr>
               <a:t>适应证、毒性、长期风险、制造流程和费用可及性决定了它不能被神化。</a:t>
             </a:r>
+            <a:endParaRPr sz="1500" b="1">
+              <a:solidFill>
+                <a:srgbClr val="12293A"/>
+              </a:solidFill>
+              <a:latin typeface="宋体" panose="02010600030101010101" pitchFamily="2" charset="-122"/>
+            </a:endParaRPr>
           </a:p>
         </p:txBody>
       </p:sp>
@@ -10652,21 +11001,27 @@
           <a:noFill/>
         </p:spPr>
         <p:txBody>
-          <a:bodyPr wrap="square" lIns="27432" rIns="27432" tIns="9144" bIns="9144" anchor="t">
-            <a:spAutoFit/>
-          </a:bodyPr>
-          <a:lstStyle/>
-          <a:p>
-            <a:pPr algn="ctr"/>
-            <a:r>
-              <a:rPr b="1" sz="1450">
+          <a:bodyPr wrap="square" lIns="27432" tIns="9144" rIns="27432" bIns="9144" anchor="t">
+            <a:spAutoFit/>
+          </a:bodyPr>
+          <a:lstStyle/>
+          <a:p>
+            <a:pPr algn="ctr"/>
+            <a:r>
+              <a:rPr sz="1450" b="1">
                 <a:solidFill>
                   <a:srgbClr val="FFFFFF"/>
                 </a:solidFill>
-                <a:latin typeface="SimHei"/>
+                <a:latin typeface="黑体" panose="02010609060101010101" charset="-122"/>
               </a:rPr>
               <a:t>支持发展，但不神化；用证据、风险和可及性一起判断。</a:t>
             </a:r>
+            <a:endParaRPr sz="1450" b="1">
+              <a:solidFill>
+                <a:srgbClr val="FFFFFF"/>
+              </a:solidFill>
+              <a:latin typeface="黑体" panose="02010609060101010101" charset="-122"/>
+            </a:endParaRPr>
           </a:p>
         </p:txBody>
       </p:sp>
@@ -10679,7 +11034,7 @@
 </file>
 
 <file path=ppt/slides/slide2.xml><?xml version="1.0" encoding="utf-8"?>
-<p:sld xmlns:a="http://schemas.openxmlformats.org/drawingml/2006/main" xmlns:p="http://schemas.openxmlformats.org/presentationml/2006/main" xmlns:r="http://schemas.openxmlformats.org/officeDocument/2006/relationships">
+<p:sld xmlns:a="http://schemas.openxmlformats.org/drawingml/2006/main" xmlns:r="http://schemas.openxmlformats.org/officeDocument/2006/relationships" xmlns:p="http://schemas.openxmlformats.org/presentationml/2006/main">
   <p:cSld>
     <p:spTree>
       <p:nvGrpSpPr>
@@ -10795,21 +11150,27 @@
           <a:noFill/>
         </p:spPr>
         <p:txBody>
-          <a:bodyPr wrap="square" lIns="27432" rIns="27432" tIns="9144" bIns="9144" anchor="t">
+          <a:bodyPr wrap="square" lIns="27432" tIns="9144" rIns="27432" bIns="9144" anchor="t">
             <a:spAutoFit/>
           </a:bodyPr>
           <a:lstStyle/>
           <a:p>
             <a:pPr algn="l"/>
             <a:r>
-              <a:rPr b="1" sz="1100">
+              <a:rPr sz="1100" b="1">
                 <a:solidFill>
                   <a:srgbClr val="1C908B"/>
                 </a:solidFill>
-                <a:latin typeface="SimHei"/>
+                <a:latin typeface="黑体" panose="02010609060101010101" charset="-122"/>
               </a:rPr>
               <a:t>主线</a:t>
             </a:r>
+            <a:endParaRPr sz="1100" b="1">
+              <a:solidFill>
+                <a:srgbClr val="1C908B"/>
+              </a:solidFill>
+              <a:latin typeface="黑体" panose="02010609060101010101" charset="-122"/>
+            </a:endParaRPr>
           </a:p>
         </p:txBody>
       </p:sp>
@@ -10830,21 +11191,27 @@
           <a:noFill/>
         </p:spPr>
         <p:txBody>
-          <a:bodyPr wrap="square" lIns="27432" rIns="27432" tIns="9144" bIns="9144" anchor="t">
+          <a:bodyPr wrap="square" lIns="27432" tIns="9144" rIns="27432" bIns="9144" anchor="t">
             <a:spAutoFit/>
           </a:bodyPr>
           <a:lstStyle/>
           <a:p>
             <a:pPr algn="l"/>
             <a:r>
-              <a:rPr b="1" sz="2550">
+              <a:rPr sz="2550" b="1">
                 <a:solidFill>
                   <a:srgbClr val="12293A"/>
                 </a:solidFill>
-                <a:latin typeface="SimHei"/>
+                <a:latin typeface="黑体" panose="02010609060101010101" charset="-122"/>
               </a:rPr>
               <a:t>为什么这是医学史问题</a:t>
             </a:r>
+            <a:endParaRPr sz="2550" b="1">
+              <a:solidFill>
+                <a:srgbClr val="12293A"/>
+              </a:solidFill>
+              <a:latin typeface="黑体" panose="02010609060101010101" charset="-122"/>
+            </a:endParaRPr>
           </a:p>
         </p:txBody>
       </p:sp>
@@ -10910,21 +11277,27 @@
           <a:noFill/>
         </p:spPr>
         <p:txBody>
-          <a:bodyPr wrap="square" lIns="27432" rIns="27432" tIns="9144" bIns="9144" anchor="t">
+          <a:bodyPr wrap="square" lIns="27432" tIns="9144" rIns="27432" bIns="9144" anchor="t">
             <a:spAutoFit/>
           </a:bodyPr>
           <a:lstStyle/>
           <a:p>
             <a:pPr algn="l"/>
             <a:r>
-              <a:rPr b="1" sz="1420">
+              <a:rPr sz="1420" b="1">
                 <a:solidFill>
                   <a:srgbClr val="12293A"/>
                 </a:solidFill>
-                <a:latin typeface="SimHei"/>
+                <a:latin typeface="黑体" panose="02010609060101010101" charset="-122"/>
               </a:rPr>
               <a:t>它不是一种新药的出现，而是一种治疗范式的变化。</a:t>
             </a:r>
+            <a:endParaRPr sz="1420" b="1">
+              <a:solidFill>
+                <a:srgbClr val="12293A"/>
+              </a:solidFill>
+              <a:latin typeface="黑体" panose="02010609060101010101" charset="-122"/>
+            </a:endParaRPr>
           </a:p>
         </p:txBody>
       </p:sp>
@@ -10945,56 +11318,27 @@
           <a:noFill/>
         </p:spPr>
         <p:txBody>
-          <a:bodyPr wrap="square" lIns="27432" rIns="27432" tIns="9144" bIns="9144" anchor="t">
+          <a:bodyPr wrap="square" lIns="27432" tIns="9144" rIns="27432" bIns="9144" anchor="t">
             <a:spAutoFit/>
           </a:bodyPr>
           <a:lstStyle/>
           <a:p>
             <a:pPr algn="l"/>
             <a:r>
-              <a:rPr b="1" sz="819">
+              <a:rPr sz="820" b="1">
                 <a:solidFill>
                   <a:srgbClr val="586874"/>
                 </a:solidFill>
-                <a:latin typeface="SimHei"/>
+                <a:latin typeface="黑体" panose="02010609060101010101" charset="-122"/>
               </a:rPr>
               <a:t>02/15</a:t>
             </a:r>
-          </a:p>
-        </p:txBody>
-      </p:sp>
-      <p:sp>
-        <p:nvSpPr>
-          <p:cNvPr id="9" name="TextBox 8"/>
-          <p:cNvSpPr txBox="1"/>
-          <p:nvPr/>
-        </p:nvSpPr>
-        <p:spPr>
-          <a:xfrm>
-            <a:off x="1060704" y="6400800"/>
-            <a:ext cx="10332720" cy="228600"/>
-          </a:xfrm>
-          <a:prstGeom prst="rect">
-            <a:avLst/>
-          </a:prstGeom>
-          <a:noFill/>
-        </p:spPr>
-        <p:txBody>
-          <a:bodyPr wrap="square" lIns="27432" rIns="27432" tIns="9144" bIns="9144" anchor="t">
-            <a:spAutoFit/>
-          </a:bodyPr>
-          <a:lstStyle/>
-          <a:p>
-            <a:pPr algn="l"/>
-            <a:r>
-              <a:rPr b="0" sz="800">
-                <a:solidFill>
-                  <a:srgbClr val="586874"/>
-                </a:solidFill>
-                <a:latin typeface="SimSun"/>
-              </a:rPr>
-              <a:t>资料：NCI Methotrexate history；NCI Immunotherapy</a:t>
-            </a:r>
+            <a:endParaRPr sz="820" b="1">
+              <a:solidFill>
+                <a:srgbClr val="586874"/>
+              </a:solidFill>
+              <a:latin typeface="黑体" panose="02010609060101010101" charset="-122"/>
+            </a:endParaRPr>
           </a:p>
         </p:txBody>
       </p:sp>
@@ -11060,21 +11404,27 @@
           <a:noFill/>
         </p:spPr>
         <p:txBody>
-          <a:bodyPr wrap="square" lIns="27432" rIns="27432" tIns="9144" bIns="9144" anchor="t">
+          <a:bodyPr wrap="square" lIns="27432" tIns="9144" rIns="27432" bIns="9144" anchor="t">
             <a:spAutoFit/>
           </a:bodyPr>
           <a:lstStyle/>
           <a:p>
             <a:pPr algn="l"/>
             <a:r>
-              <a:rPr b="1" sz="2000">
+              <a:rPr sz="2000" b="1">
                 <a:solidFill>
                   <a:srgbClr val="C04A43"/>
                 </a:solidFill>
-                <a:latin typeface="SimHei"/>
+                <a:latin typeface="黑体" panose="02010609060101010101" charset="-122"/>
               </a:rPr>
               <a:t>传统逻辑</a:t>
             </a:r>
+            <a:endParaRPr sz="2000" b="1">
+              <a:solidFill>
+                <a:srgbClr val="C04A43"/>
+              </a:solidFill>
+              <a:latin typeface="黑体" panose="02010609060101010101" charset="-122"/>
+            </a:endParaRPr>
           </a:p>
         </p:txBody>
       </p:sp>
@@ -11095,21 +11445,27 @@
           <a:noFill/>
         </p:spPr>
         <p:txBody>
-          <a:bodyPr wrap="square" lIns="27432" rIns="27432" tIns="9144" bIns="9144" anchor="t">
+          <a:bodyPr wrap="square" lIns="27432" tIns="9144" rIns="27432" bIns="9144" anchor="t">
             <a:spAutoFit/>
           </a:bodyPr>
           <a:lstStyle/>
           <a:p>
             <a:pPr algn="l"/>
             <a:r>
-              <a:rPr b="1" sz="2400">
+              <a:rPr sz="2400" b="1">
                 <a:solidFill>
                   <a:srgbClr val="12293A"/>
                 </a:solidFill>
-                <a:latin typeface="SimHei"/>
+                <a:latin typeface="黑体" panose="02010609060101010101" charset="-122"/>
               </a:rPr>
               <a:t>外部杀伤疾病</a:t>
             </a:r>
+            <a:endParaRPr sz="2400" b="1">
+              <a:solidFill>
+                <a:srgbClr val="12293A"/>
+              </a:solidFill>
+              <a:latin typeface="黑体" panose="02010609060101010101" charset="-122"/>
+            </a:endParaRPr>
           </a:p>
         </p:txBody>
       </p:sp>
@@ -11130,7 +11486,7 @@
           <a:noFill/>
         </p:spPr>
         <p:txBody>
-          <a:bodyPr wrap="square" lIns="36576" rIns="36576" tIns="9144" bIns="9144">
+          <a:bodyPr wrap="square" lIns="36576" tIns="9144" rIns="36576" bIns="9144">
             <a:spAutoFit/>
           </a:bodyPr>
           <a:lstStyle/>
@@ -11144,14 +11500,20 @@
               </a:spcAft>
             </a:pPr>
             <a:r>
-              <a:rPr b="0" sz="1420">
+              <a:rPr sz="1420" b="0">
                 <a:solidFill>
                   <a:srgbClr val="141A1F"/>
                 </a:solidFill>
-                <a:latin typeface="SimSun"/>
+                <a:latin typeface="宋体" panose="02010600030101010101" pitchFamily="2" charset="-122"/>
               </a:rPr>
               <a:t>手术切除</a:t>
             </a:r>
+            <a:endParaRPr sz="1420" b="0">
+              <a:solidFill>
+                <a:srgbClr val="141A1F"/>
+              </a:solidFill>
+              <a:latin typeface="宋体" panose="02010600030101010101" pitchFamily="2" charset="-122"/>
+            </a:endParaRPr>
           </a:p>
           <a:p>
             <a:pPr>
@@ -11163,14 +11525,20 @@
               </a:spcAft>
             </a:pPr>
             <a:r>
-              <a:rPr b="0" sz="1420">
+              <a:rPr sz="1420" b="0">
                 <a:solidFill>
                   <a:srgbClr val="141A1F"/>
                 </a:solidFill>
-                <a:latin typeface="SimSun"/>
+                <a:latin typeface="宋体" panose="02010600030101010101" pitchFamily="2" charset="-122"/>
               </a:rPr>
               <a:t>放疗破坏 DNA</a:t>
             </a:r>
+            <a:endParaRPr sz="1420" b="0">
+              <a:solidFill>
+                <a:srgbClr val="141A1F"/>
+              </a:solidFill>
+              <a:latin typeface="宋体" panose="02010600030101010101" pitchFamily="2" charset="-122"/>
+            </a:endParaRPr>
           </a:p>
           <a:p>
             <a:pPr>
@@ -11182,14 +11550,20 @@
               </a:spcAft>
             </a:pPr>
             <a:r>
-              <a:rPr b="0" sz="1420">
+              <a:rPr sz="1420" b="0">
                 <a:solidFill>
                   <a:srgbClr val="141A1F"/>
                 </a:solidFill>
-                <a:latin typeface="SimSun"/>
+                <a:latin typeface="宋体" panose="02010600030101010101" pitchFamily="2" charset="-122"/>
               </a:rPr>
               <a:t>化疗抑制增殖</a:t>
             </a:r>
+            <a:endParaRPr sz="1420" b="0">
+              <a:solidFill>
+                <a:srgbClr val="141A1F"/>
+              </a:solidFill>
+              <a:latin typeface="宋体" panose="02010600030101010101" pitchFamily="2" charset="-122"/>
+            </a:endParaRPr>
           </a:p>
         </p:txBody>
       </p:sp>
@@ -11210,21 +11584,27 @@
           <a:noFill/>
         </p:spPr>
         <p:txBody>
-          <a:bodyPr wrap="square" lIns="27432" rIns="27432" tIns="9144" bIns="9144" anchor="t">
-            <a:spAutoFit/>
-          </a:bodyPr>
-          <a:lstStyle/>
-          <a:p>
-            <a:pPr algn="ctr"/>
-            <a:r>
-              <a:rPr b="1" sz="3400">
+          <a:bodyPr wrap="square" lIns="27432" tIns="9144" rIns="27432" bIns="9144" anchor="t">
+            <a:spAutoFit/>
+          </a:bodyPr>
+          <a:lstStyle/>
+          <a:p>
+            <a:pPr algn="ctr"/>
+            <a:r>
+              <a:rPr sz="3400" b="1">
                 <a:solidFill>
                   <a:srgbClr val="586874"/>
                 </a:solidFill>
-                <a:latin typeface="SimHei"/>
+                <a:latin typeface="黑体" panose="02010609060101010101" charset="-122"/>
               </a:rPr>
               <a:t>→</a:t>
             </a:r>
+            <a:endParaRPr sz="3400" b="1">
+              <a:solidFill>
+                <a:srgbClr val="586874"/>
+              </a:solidFill>
+              <a:latin typeface="黑体" panose="02010609060101010101" charset="-122"/>
+            </a:endParaRPr>
           </a:p>
         </p:txBody>
       </p:sp>
@@ -11290,21 +11670,27 @@
           <a:noFill/>
         </p:spPr>
         <p:txBody>
-          <a:bodyPr wrap="square" lIns="27432" rIns="27432" tIns="9144" bIns="9144" anchor="t">
+          <a:bodyPr wrap="square" lIns="27432" tIns="9144" rIns="27432" bIns="9144" anchor="t">
             <a:spAutoFit/>
           </a:bodyPr>
           <a:lstStyle/>
           <a:p>
             <a:pPr algn="l"/>
             <a:r>
-              <a:rPr b="1" sz="2000">
+              <a:rPr sz="2000" b="1">
                 <a:solidFill>
                   <a:srgbClr val="1C908B"/>
                 </a:solidFill>
-                <a:latin typeface="SimHei"/>
+                <a:latin typeface="黑体" panose="02010609060101010101" charset="-122"/>
               </a:rPr>
               <a:t>新逻辑</a:t>
             </a:r>
+            <a:endParaRPr sz="2000" b="1">
+              <a:solidFill>
+                <a:srgbClr val="1C908B"/>
+              </a:solidFill>
+              <a:latin typeface="黑体" panose="02010609060101010101" charset="-122"/>
+            </a:endParaRPr>
           </a:p>
         </p:txBody>
       </p:sp>
@@ -11325,21 +11711,27 @@
           <a:noFill/>
         </p:spPr>
         <p:txBody>
-          <a:bodyPr wrap="square" lIns="27432" rIns="27432" tIns="9144" bIns="9144" anchor="t">
+          <a:bodyPr wrap="square" lIns="27432" tIns="9144" rIns="27432" bIns="9144" anchor="t">
             <a:spAutoFit/>
           </a:bodyPr>
           <a:lstStyle/>
           <a:p>
             <a:pPr algn="l"/>
             <a:r>
-              <a:rPr b="1" sz="2300">
+              <a:rPr sz="2300" b="1">
                 <a:solidFill>
                   <a:srgbClr val="12293A"/>
                 </a:solidFill>
-                <a:latin typeface="SimHei"/>
+                <a:latin typeface="黑体" panose="02010609060101010101" charset="-122"/>
               </a:rPr>
               <a:t>免疫系统成为治疗对象</a:t>
             </a:r>
+            <a:endParaRPr sz="2300" b="1">
+              <a:solidFill>
+                <a:srgbClr val="12293A"/>
+              </a:solidFill>
+              <a:latin typeface="黑体" panose="02010609060101010101" charset="-122"/>
+            </a:endParaRPr>
           </a:p>
         </p:txBody>
       </p:sp>
@@ -11360,7 +11752,7 @@
           <a:noFill/>
         </p:spPr>
         <p:txBody>
-          <a:bodyPr wrap="square" lIns="36576" rIns="36576" tIns="9144" bIns="9144">
+          <a:bodyPr wrap="square" lIns="36576" tIns="9144" rIns="36576" bIns="9144">
             <a:spAutoFit/>
           </a:bodyPr>
           <a:lstStyle/>
@@ -11374,14 +11766,20 @@
               </a:spcAft>
             </a:pPr>
             <a:r>
-              <a:rPr b="0" sz="1420">
+              <a:rPr sz="1420" b="0">
                 <a:solidFill>
                   <a:srgbClr val="141A1F"/>
                 </a:solidFill>
-                <a:latin typeface="SimSun"/>
+                <a:latin typeface="宋体" panose="02010600030101010101" pitchFamily="2" charset="-122"/>
               </a:rPr>
               <a:t>解除免疫抑制</a:t>
             </a:r>
+            <a:endParaRPr sz="1420" b="0">
+              <a:solidFill>
+                <a:srgbClr val="141A1F"/>
+              </a:solidFill>
+              <a:latin typeface="宋体" panose="02010600030101010101" pitchFamily="2" charset="-122"/>
+            </a:endParaRPr>
           </a:p>
           <a:p>
             <a:pPr>
@@ -11393,14 +11791,20 @@
               </a:spcAft>
             </a:pPr>
             <a:r>
-              <a:rPr b="0" sz="1420">
+              <a:rPr sz="1420" b="0">
                 <a:solidFill>
                   <a:srgbClr val="141A1F"/>
                 </a:solidFill>
-                <a:latin typeface="SimSun"/>
+                <a:latin typeface="宋体" panose="02010600030101010101" pitchFamily="2" charset="-122"/>
               </a:rPr>
               <a:t>工程化 T 细胞</a:t>
             </a:r>
+            <a:endParaRPr sz="1420" b="0">
+              <a:solidFill>
+                <a:srgbClr val="141A1F"/>
+              </a:solidFill>
+              <a:latin typeface="宋体" panose="02010600030101010101" pitchFamily="2" charset="-122"/>
+            </a:endParaRPr>
           </a:p>
           <a:p>
             <a:pPr>
@@ -11412,14 +11816,20 @@
               </a:spcAft>
             </a:pPr>
             <a:r>
-              <a:rPr b="0" sz="1420">
+              <a:rPr sz="1420" b="0">
                 <a:solidFill>
                   <a:srgbClr val="141A1F"/>
                 </a:solidFill>
-                <a:latin typeface="SimSun"/>
+                <a:latin typeface="宋体" panose="02010600030101010101" pitchFamily="2" charset="-122"/>
               </a:rPr>
               <a:t>放大已有免疫反应</a:t>
             </a:r>
+            <a:endParaRPr sz="1420" b="0">
+              <a:solidFill>
+                <a:srgbClr val="141A1F"/>
+              </a:solidFill>
+              <a:latin typeface="宋体" panose="02010600030101010101" pitchFamily="2" charset="-122"/>
+            </a:endParaRPr>
           </a:p>
         </p:txBody>
       </p:sp>
@@ -11432,7 +11842,7 @@
 </file>
 
 <file path=ppt/slides/slide3.xml><?xml version="1.0" encoding="utf-8"?>
-<p:sld xmlns:a="http://schemas.openxmlformats.org/drawingml/2006/main" xmlns:p="http://schemas.openxmlformats.org/presentationml/2006/main" xmlns:r="http://schemas.openxmlformats.org/officeDocument/2006/relationships">
+<p:sld xmlns:a="http://schemas.openxmlformats.org/drawingml/2006/main" xmlns:r="http://schemas.openxmlformats.org/officeDocument/2006/relationships" xmlns:p="http://schemas.openxmlformats.org/presentationml/2006/main">
   <p:cSld>
     <p:spTree>
       <p:nvGrpSpPr>
@@ -11548,21 +11958,27 @@
           <a:noFill/>
         </p:spPr>
         <p:txBody>
-          <a:bodyPr wrap="square" lIns="27432" rIns="27432" tIns="9144" bIns="9144" anchor="t">
+          <a:bodyPr wrap="square" lIns="27432" tIns="9144" rIns="27432" bIns="9144" anchor="t">
             <a:spAutoFit/>
           </a:bodyPr>
           <a:lstStyle/>
           <a:p>
             <a:pPr algn="l"/>
             <a:r>
-              <a:rPr b="1" sz="1100">
+              <a:rPr sz="1100" b="1">
                 <a:solidFill>
                   <a:srgbClr val="1C908B"/>
                 </a:solidFill>
-                <a:latin typeface="SimHei"/>
+                <a:latin typeface="黑体" panose="02010609060101010101" charset="-122"/>
               </a:rPr>
               <a:t>背景</a:t>
             </a:r>
+            <a:endParaRPr sz="1100" b="1">
+              <a:solidFill>
+                <a:srgbClr val="1C908B"/>
+              </a:solidFill>
+              <a:latin typeface="黑体" panose="02010609060101010101" charset="-122"/>
+            </a:endParaRPr>
           </a:p>
         </p:txBody>
       </p:sp>
@@ -11583,21 +11999,27 @@
           <a:noFill/>
         </p:spPr>
         <p:txBody>
-          <a:bodyPr wrap="square" lIns="27432" rIns="27432" tIns="9144" bIns="9144" anchor="t">
+          <a:bodyPr wrap="square" lIns="27432" tIns="9144" rIns="27432" bIns="9144" anchor="t">
             <a:spAutoFit/>
           </a:bodyPr>
           <a:lstStyle/>
           <a:p>
             <a:pPr algn="l"/>
             <a:r>
-              <a:rPr b="1" sz="2550">
+              <a:rPr sz="2550" b="1">
                 <a:solidFill>
                   <a:srgbClr val="12293A"/>
                 </a:solidFill>
-                <a:latin typeface="SimHei"/>
+                <a:latin typeface="黑体" panose="02010609060101010101" charset="-122"/>
               </a:rPr>
               <a:t>为什么癌症治疗需要新逻辑</a:t>
             </a:r>
+            <a:endParaRPr sz="2550" b="1">
+              <a:solidFill>
+                <a:srgbClr val="12293A"/>
+              </a:solidFill>
+              <a:latin typeface="黑体" panose="02010609060101010101" charset="-122"/>
+            </a:endParaRPr>
           </a:p>
         </p:txBody>
       </p:sp>
@@ -11663,21 +12085,27 @@
           <a:noFill/>
         </p:spPr>
         <p:txBody>
-          <a:bodyPr wrap="square" lIns="27432" rIns="27432" tIns="9144" bIns="9144" anchor="t">
+          <a:bodyPr wrap="square" lIns="27432" tIns="9144" rIns="27432" bIns="9144" anchor="t">
             <a:spAutoFit/>
           </a:bodyPr>
           <a:lstStyle/>
           <a:p>
             <a:pPr algn="l"/>
             <a:r>
-              <a:rPr b="1" sz="1420">
+              <a:rPr sz="1420" b="1">
                 <a:solidFill>
                   <a:srgbClr val="12293A"/>
                 </a:solidFill>
-                <a:latin typeface="SimHei"/>
+                <a:latin typeface="黑体" panose="02010609060101010101" charset="-122"/>
               </a:rPr>
               <a:t>癌症负担和复发耐药，推动医学寻找超越单纯杀伤的治疗路径。</a:t>
             </a:r>
+            <a:endParaRPr sz="1420" b="1">
+              <a:solidFill>
+                <a:srgbClr val="12293A"/>
+              </a:solidFill>
+              <a:latin typeface="黑体" panose="02010609060101010101" charset="-122"/>
+            </a:endParaRPr>
           </a:p>
         </p:txBody>
       </p:sp>
@@ -11698,56 +12126,27 @@
           <a:noFill/>
         </p:spPr>
         <p:txBody>
-          <a:bodyPr wrap="square" lIns="27432" rIns="27432" tIns="9144" bIns="9144" anchor="t">
+          <a:bodyPr wrap="square" lIns="27432" tIns="9144" rIns="27432" bIns="9144" anchor="t">
             <a:spAutoFit/>
           </a:bodyPr>
           <a:lstStyle/>
           <a:p>
             <a:pPr algn="l"/>
             <a:r>
-              <a:rPr b="1" sz="819">
+              <a:rPr sz="820" b="1">
                 <a:solidFill>
                   <a:srgbClr val="586874"/>
                 </a:solidFill>
-                <a:latin typeface="SimHei"/>
+                <a:latin typeface="黑体" panose="02010609060101010101" charset="-122"/>
               </a:rPr>
               <a:t>03/15</a:t>
             </a:r>
-          </a:p>
-        </p:txBody>
-      </p:sp>
-      <p:sp>
-        <p:nvSpPr>
-          <p:cNvPr id="9" name="TextBox 8"/>
-          <p:cNvSpPr txBox="1"/>
-          <p:nvPr/>
-        </p:nvSpPr>
-        <p:spPr>
-          <a:xfrm>
-            <a:off x="1060704" y="6400800"/>
-            <a:ext cx="10332720" cy="228600"/>
-          </a:xfrm>
-          <a:prstGeom prst="rect">
-            <a:avLst/>
-          </a:prstGeom>
-          <a:noFill/>
-        </p:spPr>
-        <p:txBody>
-          <a:bodyPr wrap="square" lIns="27432" rIns="27432" tIns="9144" bIns="9144" anchor="t">
-            <a:spAutoFit/>
-          </a:bodyPr>
-          <a:lstStyle/>
-          <a:p>
-            <a:pPr algn="l"/>
-            <a:r>
-              <a:rPr b="0" sz="800">
-                <a:solidFill>
-                  <a:srgbClr val="586874"/>
-                </a:solidFill>
-                <a:latin typeface="SimSun"/>
-              </a:rPr>
-              <a:t>资料：American Cancer Society Global Cancer Statistics 2024</a:t>
-            </a:r>
+            <a:endParaRPr sz="820" b="1">
+              <a:solidFill>
+                <a:srgbClr val="586874"/>
+              </a:solidFill>
+              <a:latin typeface="黑体" panose="02010609060101010101" charset="-122"/>
+            </a:endParaRPr>
           </a:p>
         </p:txBody>
       </p:sp>
@@ -11813,21 +12212,27 @@
           <a:noFill/>
         </p:spPr>
         <p:txBody>
-          <a:bodyPr wrap="square" lIns="27432" rIns="27432" tIns="9144" bIns="9144" anchor="t">
-            <a:spAutoFit/>
-          </a:bodyPr>
-          <a:lstStyle/>
-          <a:p>
-            <a:pPr algn="ctr"/>
-            <a:r>
-              <a:rPr b="1" sz="3100">
+          <a:bodyPr wrap="square" lIns="27432" tIns="9144" rIns="27432" bIns="9144" anchor="t">
+            <a:spAutoFit/>
+          </a:bodyPr>
+          <a:lstStyle/>
+          <a:p>
+            <a:pPr algn="ctr"/>
+            <a:r>
+              <a:rPr sz="3100" b="1">
                 <a:solidFill>
                   <a:srgbClr val="FFFFFF"/>
                 </a:solidFill>
-                <a:latin typeface="SimHei"/>
+                <a:latin typeface="黑体" panose="02010609060101010101" charset="-122"/>
               </a:rPr>
               <a:t>2000万</a:t>
             </a:r>
+            <a:endParaRPr sz="3100" b="1">
+              <a:solidFill>
+                <a:srgbClr val="FFFFFF"/>
+              </a:solidFill>
+              <a:latin typeface="黑体" panose="02010609060101010101" charset="-122"/>
+            </a:endParaRPr>
           </a:p>
         </p:txBody>
       </p:sp>
@@ -11848,21 +12253,27 @@
           <a:noFill/>
         </p:spPr>
         <p:txBody>
-          <a:bodyPr wrap="square" lIns="27432" rIns="27432" tIns="9144" bIns="9144" anchor="t">
-            <a:spAutoFit/>
-          </a:bodyPr>
-          <a:lstStyle/>
-          <a:p>
-            <a:pPr algn="ctr"/>
-            <a:r>
-              <a:rPr b="0" sz="1220">
+          <a:bodyPr wrap="square" lIns="27432" tIns="9144" rIns="27432" bIns="9144" anchor="t">
+            <a:spAutoFit/>
+          </a:bodyPr>
+          <a:lstStyle/>
+          <a:p>
+            <a:pPr algn="ctr"/>
+            <a:r>
+              <a:rPr sz="1220" b="0">
                 <a:solidFill>
                   <a:srgbClr val="E6F4F6"/>
                 </a:solidFill>
-                <a:latin typeface="SimSun"/>
+                <a:latin typeface="宋体" panose="02010600030101010101" pitchFamily="2" charset="-122"/>
               </a:rPr>
               <a:t>2022 年全球新发癌症病例</a:t>
             </a:r>
+            <a:endParaRPr sz="1220" b="0">
+              <a:solidFill>
+                <a:srgbClr val="E6F4F6"/>
+              </a:solidFill>
+              <a:latin typeface="宋体" panose="02010600030101010101" pitchFamily="2" charset="-122"/>
+            </a:endParaRPr>
           </a:p>
         </p:txBody>
       </p:sp>
@@ -11928,21 +12339,27 @@
           <a:noFill/>
         </p:spPr>
         <p:txBody>
-          <a:bodyPr wrap="square" lIns="27432" rIns="27432" tIns="9144" bIns="9144" anchor="t">
-            <a:spAutoFit/>
-          </a:bodyPr>
-          <a:lstStyle/>
-          <a:p>
-            <a:pPr algn="ctr"/>
-            <a:r>
-              <a:rPr b="1" sz="3100">
+          <a:bodyPr wrap="square" lIns="27432" tIns="9144" rIns="27432" bIns="9144" anchor="t">
+            <a:spAutoFit/>
+          </a:bodyPr>
+          <a:lstStyle/>
+          <a:p>
+            <a:pPr algn="ctr"/>
+            <a:r>
+              <a:rPr sz="3100" b="1">
                 <a:solidFill>
                   <a:srgbClr val="FFFFFF"/>
                 </a:solidFill>
-                <a:latin typeface="SimHei"/>
+                <a:latin typeface="黑体" panose="02010609060101010101" charset="-122"/>
               </a:rPr>
               <a:t>970万</a:t>
             </a:r>
+            <a:endParaRPr sz="3100" b="1">
+              <a:solidFill>
+                <a:srgbClr val="FFFFFF"/>
+              </a:solidFill>
+              <a:latin typeface="黑体" panose="02010609060101010101" charset="-122"/>
+            </a:endParaRPr>
           </a:p>
         </p:txBody>
       </p:sp>
@@ -11963,21 +12380,27 @@
           <a:noFill/>
         </p:spPr>
         <p:txBody>
-          <a:bodyPr wrap="square" lIns="27432" rIns="27432" tIns="9144" bIns="9144" anchor="t">
-            <a:spAutoFit/>
-          </a:bodyPr>
-          <a:lstStyle/>
-          <a:p>
-            <a:pPr algn="ctr"/>
-            <a:r>
-              <a:rPr b="0" sz="1220">
+          <a:bodyPr wrap="square" lIns="27432" tIns="9144" rIns="27432" bIns="9144" anchor="t">
+            <a:spAutoFit/>
+          </a:bodyPr>
+          <a:lstStyle/>
+          <a:p>
+            <a:pPr algn="ctr"/>
+            <a:r>
+              <a:rPr sz="1220" b="0">
                 <a:solidFill>
                   <a:srgbClr val="E6F4F6"/>
                 </a:solidFill>
-                <a:latin typeface="SimSun"/>
+                <a:latin typeface="宋体" panose="02010600030101010101" pitchFamily="2" charset="-122"/>
               </a:rPr>
               <a:t>2022 年全球癌症死亡</a:t>
             </a:r>
+            <a:endParaRPr sz="1220" b="0">
+              <a:solidFill>
+                <a:srgbClr val="E6F4F6"/>
+              </a:solidFill>
+              <a:latin typeface="宋体" panose="02010600030101010101" pitchFamily="2" charset="-122"/>
+            </a:endParaRPr>
           </a:p>
         </p:txBody>
       </p:sp>
@@ -12043,21 +12466,27 @@
           <a:noFill/>
         </p:spPr>
         <p:txBody>
-          <a:bodyPr wrap="square" lIns="27432" rIns="27432" tIns="9144" bIns="9144" anchor="t">
-            <a:spAutoFit/>
-          </a:bodyPr>
-          <a:lstStyle/>
-          <a:p>
-            <a:pPr algn="ctr"/>
-            <a:r>
-              <a:rPr b="1" sz="3100">
+          <a:bodyPr wrap="square" lIns="27432" tIns="9144" rIns="27432" bIns="9144" anchor="t">
+            <a:spAutoFit/>
+          </a:bodyPr>
+          <a:lstStyle/>
+          <a:p>
+            <a:pPr algn="ctr"/>
+            <a:r>
+              <a:rPr sz="3100" b="1">
                 <a:solidFill>
                   <a:srgbClr val="FFFFFF"/>
                 </a:solidFill>
-                <a:latin typeface="SimHei"/>
+                <a:latin typeface="黑体" panose="02010609060101010101" charset="-122"/>
               </a:rPr>
               <a:t>3500万</a:t>
             </a:r>
+            <a:endParaRPr sz="3100" b="1">
+              <a:solidFill>
+                <a:srgbClr val="FFFFFF"/>
+              </a:solidFill>
+              <a:latin typeface="黑体" panose="02010609060101010101" charset="-122"/>
+            </a:endParaRPr>
           </a:p>
         </p:txBody>
       </p:sp>
@@ -12078,21 +12507,27 @@
           <a:noFill/>
         </p:spPr>
         <p:txBody>
-          <a:bodyPr wrap="square" lIns="27432" rIns="27432" tIns="9144" bIns="9144" anchor="t">
-            <a:spAutoFit/>
-          </a:bodyPr>
-          <a:lstStyle/>
-          <a:p>
-            <a:pPr algn="ctr"/>
-            <a:r>
-              <a:rPr b="0" sz="1220">
+          <a:bodyPr wrap="square" lIns="27432" tIns="9144" rIns="27432" bIns="9144" anchor="t">
+            <a:spAutoFit/>
+          </a:bodyPr>
+          <a:lstStyle/>
+          <a:p>
+            <a:pPr algn="ctr"/>
+            <a:r>
+              <a:rPr sz="1220" b="0">
                 <a:solidFill>
                   <a:srgbClr val="E6F4F6"/>
                 </a:solidFill>
-                <a:latin typeface="SimSun"/>
+                <a:latin typeface="宋体" panose="02010600030101010101" pitchFamily="2" charset="-122"/>
               </a:rPr>
               <a:t>2050 年新发病例预计</a:t>
             </a:r>
+            <a:endParaRPr sz="1220" b="0">
+              <a:solidFill>
+                <a:srgbClr val="E6F4F6"/>
+              </a:solidFill>
+              <a:latin typeface="宋体" panose="02010600030101010101" pitchFamily="2" charset="-122"/>
+            </a:endParaRPr>
           </a:p>
         </p:txBody>
       </p:sp>
@@ -12158,21 +12593,27 @@
           <a:noFill/>
         </p:spPr>
         <p:txBody>
-          <a:bodyPr wrap="square" lIns="27432" rIns="27432" tIns="9144" bIns="9144" anchor="t">
+          <a:bodyPr wrap="square" lIns="27432" tIns="9144" rIns="27432" bIns="9144" anchor="t">
             <a:spAutoFit/>
           </a:bodyPr>
           <a:lstStyle/>
           <a:p>
             <a:pPr algn="l"/>
             <a:r>
-              <a:rPr b="1" sz="1650">
+              <a:rPr sz="1650" b="1">
                 <a:solidFill>
                   <a:srgbClr val="FFFFFF"/>
                 </a:solidFill>
-                <a:latin typeface="SimHei"/>
+                <a:latin typeface="黑体" panose="02010609060101010101" charset="-122"/>
               </a:rPr>
               <a:t>结论：问题不只是“还需要新药”，而是传统治疗逻辑面对长期负担时需要升级。</a:t>
             </a:r>
+            <a:endParaRPr sz="1650" b="1">
+              <a:solidFill>
+                <a:srgbClr val="FFFFFF"/>
+              </a:solidFill>
+              <a:latin typeface="黑体" panose="02010609060101010101" charset="-122"/>
+            </a:endParaRPr>
           </a:p>
         </p:txBody>
       </p:sp>
@@ -12185,7 +12626,7 @@
 </file>
 
 <file path=ppt/slides/slide4.xml><?xml version="1.0" encoding="utf-8"?>
-<p:sld xmlns:a="http://schemas.openxmlformats.org/drawingml/2006/main" xmlns:p="http://schemas.openxmlformats.org/presentationml/2006/main" xmlns:r="http://schemas.openxmlformats.org/officeDocument/2006/relationships">
+<p:sld xmlns:a="http://schemas.openxmlformats.org/drawingml/2006/main" xmlns:r="http://schemas.openxmlformats.org/officeDocument/2006/relationships" xmlns:p="http://schemas.openxmlformats.org/presentationml/2006/main">
   <p:cSld>
     <p:spTree>
       <p:nvGrpSpPr>
@@ -12301,21 +12742,27 @@
           <a:noFill/>
         </p:spPr>
         <p:txBody>
-          <a:bodyPr wrap="square" lIns="27432" rIns="27432" tIns="9144" bIns="9144" anchor="t">
+          <a:bodyPr wrap="square" lIns="27432" tIns="9144" rIns="27432" bIns="9144" anchor="t">
             <a:spAutoFit/>
           </a:bodyPr>
           <a:lstStyle/>
           <a:p>
             <a:pPr algn="l"/>
             <a:r>
-              <a:rPr b="1" sz="1100">
+              <a:rPr sz="1100" b="1">
                 <a:solidFill>
                   <a:srgbClr val="1C908B"/>
                 </a:solidFill>
-                <a:latin typeface="SimHei"/>
+                <a:latin typeface="黑体" panose="02010609060101010101" charset="-122"/>
               </a:rPr>
               <a:t>历史</a:t>
             </a:r>
+            <a:endParaRPr sz="1100" b="1">
+              <a:solidFill>
+                <a:srgbClr val="1C908B"/>
+              </a:solidFill>
+              <a:latin typeface="黑体" panose="02010609060101010101" charset="-122"/>
+            </a:endParaRPr>
           </a:p>
         </p:txBody>
       </p:sp>
@@ -12336,21 +12783,27 @@
           <a:noFill/>
         </p:spPr>
         <p:txBody>
-          <a:bodyPr wrap="square" lIns="27432" rIns="27432" tIns="9144" bIns="9144" anchor="t">
+          <a:bodyPr wrap="square" lIns="27432" tIns="9144" rIns="27432" bIns="9144" anchor="t">
             <a:spAutoFit/>
           </a:bodyPr>
           <a:lstStyle/>
           <a:p>
             <a:pPr algn="l"/>
             <a:r>
-              <a:rPr b="1" sz="2550">
+              <a:rPr sz="2550" b="1">
                 <a:solidFill>
                   <a:srgbClr val="12293A"/>
                 </a:solidFill>
-                <a:latin typeface="SimHei"/>
+                <a:latin typeface="黑体" panose="02010609060101010101" charset="-122"/>
               </a:rPr>
               <a:t>从外部杀伤到免疫重塑</a:t>
             </a:r>
+            <a:endParaRPr sz="2550" b="1">
+              <a:solidFill>
+                <a:srgbClr val="12293A"/>
+              </a:solidFill>
+              <a:latin typeface="黑体" panose="02010609060101010101" charset="-122"/>
+            </a:endParaRPr>
           </a:p>
         </p:txBody>
       </p:sp>
@@ -12416,21 +12869,27 @@
           <a:noFill/>
         </p:spPr>
         <p:txBody>
-          <a:bodyPr wrap="square" lIns="27432" rIns="27432" tIns="9144" bIns="9144" anchor="t">
+          <a:bodyPr wrap="square" lIns="27432" tIns="9144" rIns="27432" bIns="9144" anchor="t">
             <a:spAutoFit/>
           </a:bodyPr>
           <a:lstStyle/>
           <a:p>
             <a:pPr algn="l"/>
             <a:r>
-              <a:rPr b="1" sz="1420">
+              <a:rPr sz="1420" b="1">
                 <a:solidFill>
                   <a:srgbClr val="12293A"/>
                 </a:solidFill>
-                <a:latin typeface="SimHei"/>
+                <a:latin typeface="黑体" panose="02010609060101010101" charset="-122"/>
               </a:rPr>
               <a:t>医学治疗对象从肿瘤本身，逐渐扩展到免疫系统。</a:t>
             </a:r>
+            <a:endParaRPr sz="1420" b="1">
+              <a:solidFill>
+                <a:srgbClr val="12293A"/>
+              </a:solidFill>
+              <a:latin typeface="黑体" panose="02010609060101010101" charset="-122"/>
+            </a:endParaRPr>
           </a:p>
         </p:txBody>
       </p:sp>
@@ -12451,56 +12910,27 @@
           <a:noFill/>
         </p:spPr>
         <p:txBody>
-          <a:bodyPr wrap="square" lIns="27432" rIns="27432" tIns="9144" bIns="9144" anchor="t">
+          <a:bodyPr wrap="square" lIns="27432" tIns="9144" rIns="27432" bIns="9144" anchor="t">
             <a:spAutoFit/>
           </a:bodyPr>
           <a:lstStyle/>
           <a:p>
             <a:pPr algn="l"/>
             <a:r>
-              <a:rPr b="1" sz="819">
+              <a:rPr sz="820" b="1">
                 <a:solidFill>
                   <a:srgbClr val="586874"/>
                 </a:solidFill>
-                <a:latin typeface="SimHei"/>
+                <a:latin typeface="黑体" panose="02010609060101010101" charset="-122"/>
               </a:rPr>
               <a:t>04/15</a:t>
             </a:r>
-          </a:p>
-        </p:txBody>
-      </p:sp>
-      <p:sp>
-        <p:nvSpPr>
-          <p:cNvPr id="9" name="TextBox 8"/>
-          <p:cNvSpPr txBox="1"/>
-          <p:nvPr/>
-        </p:nvSpPr>
-        <p:spPr>
-          <a:xfrm>
-            <a:off x="1060704" y="6400800"/>
-            <a:ext cx="10332720" cy="228600"/>
-          </a:xfrm>
-          <a:prstGeom prst="rect">
-            <a:avLst/>
-          </a:prstGeom>
-          <a:noFill/>
-        </p:spPr>
-        <p:txBody>
-          <a:bodyPr wrap="square" lIns="27432" rIns="27432" tIns="9144" bIns="9144" anchor="t">
-            <a:spAutoFit/>
-          </a:bodyPr>
-          <a:lstStyle/>
-          <a:p>
-            <a:pPr algn="l"/>
-            <a:r>
-              <a:rPr b="0" sz="800">
-                <a:solidFill>
-                  <a:srgbClr val="586874"/>
-                </a:solidFill>
-                <a:latin typeface="SimSun"/>
-              </a:rPr>
-              <a:t>资料：NCI Milestones；NCI Methotrexate history；FDA Amtagvi</a:t>
-            </a:r>
+            <a:endParaRPr sz="820" b="1">
+              <a:solidFill>
+                <a:srgbClr val="586874"/>
+              </a:solidFill>
+              <a:latin typeface="黑体" panose="02010609060101010101" charset="-122"/>
+            </a:endParaRPr>
           </a:p>
         </p:txBody>
       </p:sp>
@@ -12611,21 +13041,27 @@
           <a:noFill/>
         </p:spPr>
         <p:txBody>
-          <a:bodyPr wrap="square" lIns="27432" rIns="27432" tIns="9144" bIns="9144" anchor="t">
-            <a:spAutoFit/>
-          </a:bodyPr>
-          <a:lstStyle/>
-          <a:p>
-            <a:pPr algn="ctr"/>
-            <a:r>
-              <a:rPr b="1" sz="1220">
+          <a:bodyPr wrap="square" lIns="27432" tIns="9144" rIns="27432" bIns="9144" anchor="t">
+            <a:spAutoFit/>
+          </a:bodyPr>
+          <a:lstStyle/>
+          <a:p>
+            <a:pPr algn="ctr"/>
+            <a:r>
+              <a:rPr sz="1220" b="1">
                 <a:solidFill>
                   <a:srgbClr val="586874"/>
                 </a:solidFill>
-                <a:latin typeface="SimHei"/>
+                <a:latin typeface="黑体" panose="02010609060101010101" charset="-122"/>
               </a:rPr>
               <a:t>传统</a:t>
             </a:r>
+            <a:endParaRPr sz="1220" b="1">
+              <a:solidFill>
+                <a:srgbClr val="586874"/>
+              </a:solidFill>
+              <a:latin typeface="黑体" panose="02010609060101010101" charset="-122"/>
+            </a:endParaRPr>
           </a:p>
         </p:txBody>
       </p:sp>
@@ -12646,21 +13082,27 @@
           <a:noFill/>
         </p:spPr>
         <p:txBody>
-          <a:bodyPr wrap="square" lIns="27432" rIns="27432" tIns="9144" bIns="9144" anchor="t">
-            <a:spAutoFit/>
-          </a:bodyPr>
-          <a:lstStyle/>
-          <a:p>
-            <a:pPr algn="ctr"/>
-            <a:r>
-              <a:rPr b="1" sz="1380">
+          <a:bodyPr wrap="square" lIns="27432" tIns="9144" rIns="27432" bIns="9144" anchor="t">
+            <a:spAutoFit/>
+          </a:bodyPr>
+          <a:lstStyle/>
+          <a:p>
+            <a:pPr algn="ctr"/>
+            <a:r>
+              <a:rPr sz="1380" b="1">
                 <a:solidFill>
                   <a:srgbClr val="12293A"/>
                 </a:solidFill>
-                <a:latin typeface="SimHei"/>
+                <a:latin typeface="黑体" panose="02010609060101010101" charset="-122"/>
               </a:rPr>
               <a:t>手术/放疗</a:t>
             </a:r>
+            <a:endParaRPr sz="1380" b="1">
+              <a:solidFill>
+                <a:srgbClr val="12293A"/>
+              </a:solidFill>
+              <a:latin typeface="黑体" panose="02010609060101010101" charset="-122"/>
+            </a:endParaRPr>
           </a:p>
         </p:txBody>
       </p:sp>
@@ -12681,21 +13123,27 @@
           <a:noFill/>
         </p:spPr>
         <p:txBody>
-          <a:bodyPr wrap="square" lIns="27432" rIns="27432" tIns="9144" bIns="9144" anchor="t">
-            <a:spAutoFit/>
-          </a:bodyPr>
-          <a:lstStyle/>
-          <a:p>
-            <a:pPr algn="ctr"/>
-            <a:r>
-              <a:rPr b="0" sz="1060">
+          <a:bodyPr wrap="square" lIns="27432" tIns="9144" rIns="27432" bIns="9144" anchor="t">
+            <a:spAutoFit/>
+          </a:bodyPr>
+          <a:lstStyle/>
+          <a:p>
+            <a:pPr algn="ctr"/>
+            <a:r>
+              <a:rPr sz="1060" b="0">
                 <a:solidFill>
                   <a:srgbClr val="141A1F"/>
                 </a:solidFill>
-                <a:latin typeface="SimSun"/>
+                <a:latin typeface="宋体" panose="02010600030101010101" pitchFamily="2" charset="-122"/>
               </a:rPr>
               <a:t>直接清除或破坏病灶</a:t>
             </a:r>
+            <a:endParaRPr sz="1060" b="0">
+              <a:solidFill>
+                <a:srgbClr val="141A1F"/>
+              </a:solidFill>
+              <a:latin typeface="宋体" panose="02010600030101010101" pitchFamily="2" charset="-122"/>
+            </a:endParaRPr>
           </a:p>
         </p:txBody>
       </p:sp>
@@ -12761,21 +13209,27 @@
           <a:noFill/>
         </p:spPr>
         <p:txBody>
-          <a:bodyPr wrap="square" lIns="27432" rIns="27432" tIns="9144" bIns="9144" anchor="t">
-            <a:spAutoFit/>
-          </a:bodyPr>
-          <a:lstStyle/>
-          <a:p>
-            <a:pPr algn="ctr"/>
-            <a:r>
-              <a:rPr b="1" sz="1220">
+          <a:bodyPr wrap="square" lIns="27432" tIns="9144" rIns="27432" bIns="9144" anchor="t">
+            <a:spAutoFit/>
+          </a:bodyPr>
+          <a:lstStyle/>
+          <a:p>
+            <a:pPr algn="ctr"/>
+            <a:r>
+              <a:rPr sz="1220" b="1">
                 <a:solidFill>
                   <a:srgbClr val="E59E3A"/>
                 </a:solidFill>
-                <a:latin typeface="SimHei"/>
+                <a:latin typeface="黑体" panose="02010609060101010101" charset="-122"/>
               </a:rPr>
               <a:t>1950s–1970s</a:t>
             </a:r>
+            <a:endParaRPr sz="1220" b="1">
+              <a:solidFill>
+                <a:srgbClr val="E59E3A"/>
+              </a:solidFill>
+              <a:latin typeface="黑体" panose="02010609060101010101" charset="-122"/>
+            </a:endParaRPr>
           </a:p>
         </p:txBody>
       </p:sp>
@@ -12796,21 +13250,27 @@
           <a:noFill/>
         </p:spPr>
         <p:txBody>
-          <a:bodyPr wrap="square" lIns="27432" rIns="27432" tIns="9144" bIns="9144" anchor="t">
-            <a:spAutoFit/>
-          </a:bodyPr>
-          <a:lstStyle/>
-          <a:p>
-            <a:pPr algn="ctr"/>
-            <a:r>
-              <a:rPr b="1" sz="1380">
+          <a:bodyPr wrap="square" lIns="27432" tIns="9144" rIns="27432" bIns="9144" anchor="t">
+            <a:spAutoFit/>
+          </a:bodyPr>
+          <a:lstStyle/>
+          <a:p>
+            <a:pPr algn="ctr"/>
+            <a:r>
+              <a:rPr sz="1380" b="1">
                 <a:solidFill>
                   <a:srgbClr val="12293A"/>
                 </a:solidFill>
-                <a:latin typeface="SimHei"/>
+                <a:latin typeface="黑体" panose="02010609060101010101" charset="-122"/>
               </a:rPr>
               <a:t>化疗发展</a:t>
             </a:r>
+            <a:endParaRPr sz="1380" b="1">
+              <a:solidFill>
+                <a:srgbClr val="12293A"/>
+              </a:solidFill>
+              <a:latin typeface="黑体" panose="02010609060101010101" charset="-122"/>
+            </a:endParaRPr>
           </a:p>
         </p:txBody>
       </p:sp>
@@ -12831,21 +13291,27 @@
           <a:noFill/>
         </p:spPr>
         <p:txBody>
-          <a:bodyPr wrap="square" lIns="27432" rIns="27432" tIns="9144" bIns="9144" anchor="t">
-            <a:spAutoFit/>
-          </a:bodyPr>
-          <a:lstStyle/>
-          <a:p>
-            <a:pPr algn="ctr"/>
-            <a:r>
-              <a:rPr b="0" sz="1060">
+          <a:bodyPr wrap="square" lIns="27432" tIns="9144" rIns="27432" bIns="9144" anchor="t">
+            <a:spAutoFit/>
+          </a:bodyPr>
+          <a:lstStyle/>
+          <a:p>
+            <a:pPr algn="ctr"/>
+            <a:r>
+              <a:rPr sz="1060" b="0">
                 <a:solidFill>
                   <a:srgbClr val="141A1F"/>
                 </a:solidFill>
-                <a:latin typeface="SimSun"/>
+                <a:latin typeface="宋体" panose="02010600030101010101" pitchFamily="2" charset="-122"/>
               </a:rPr>
               <a:t>用药物抑制快速增殖</a:t>
             </a:r>
+            <a:endParaRPr sz="1060" b="0">
+              <a:solidFill>
+                <a:srgbClr val="141A1F"/>
+              </a:solidFill>
+              <a:latin typeface="宋体" panose="02010600030101010101" pitchFamily="2" charset="-122"/>
+            </a:endParaRPr>
           </a:p>
         </p:txBody>
       </p:sp>
@@ -12911,21 +13377,27 @@
           <a:noFill/>
         </p:spPr>
         <p:txBody>
-          <a:bodyPr wrap="square" lIns="27432" rIns="27432" tIns="9144" bIns="9144" anchor="t">
-            <a:spAutoFit/>
-          </a:bodyPr>
-          <a:lstStyle/>
-          <a:p>
-            <a:pPr algn="ctr"/>
-            <a:r>
-              <a:rPr b="1" sz="1220">
+          <a:bodyPr wrap="square" lIns="27432" tIns="9144" rIns="27432" bIns="9144" anchor="t">
+            <a:spAutoFit/>
+          </a:bodyPr>
+          <a:lstStyle/>
+          <a:p>
+            <a:pPr algn="ctr"/>
+            <a:r>
+              <a:rPr sz="1220" b="1">
                 <a:solidFill>
                   <a:srgbClr val="46915B"/>
                 </a:solidFill>
-                <a:latin typeface="SimHei"/>
+                <a:latin typeface="黑体" panose="02010609060101010101" charset="-122"/>
               </a:rPr>
               <a:t>1997</a:t>
             </a:r>
+            <a:endParaRPr sz="1220" b="1">
+              <a:solidFill>
+                <a:srgbClr val="46915B"/>
+              </a:solidFill>
+              <a:latin typeface="黑体" panose="02010609060101010101" charset="-122"/>
+            </a:endParaRPr>
           </a:p>
         </p:txBody>
       </p:sp>
@@ -12946,21 +13418,27 @@
           <a:noFill/>
         </p:spPr>
         <p:txBody>
-          <a:bodyPr wrap="square" lIns="27432" rIns="27432" tIns="9144" bIns="9144" anchor="t">
-            <a:spAutoFit/>
-          </a:bodyPr>
-          <a:lstStyle/>
-          <a:p>
-            <a:pPr algn="ctr"/>
-            <a:r>
-              <a:rPr b="1" sz="1380">
+          <a:bodyPr wrap="square" lIns="27432" tIns="9144" rIns="27432" bIns="9144" anchor="t">
+            <a:spAutoFit/>
+          </a:bodyPr>
+          <a:lstStyle/>
+          <a:p>
+            <a:pPr algn="ctr"/>
+            <a:r>
+              <a:rPr sz="1380" b="1">
                 <a:solidFill>
                   <a:srgbClr val="12293A"/>
                 </a:solidFill>
-                <a:latin typeface="SimHei"/>
+                <a:latin typeface="黑体" panose="02010609060101010101" charset="-122"/>
               </a:rPr>
               <a:t>单克隆抗体</a:t>
             </a:r>
+            <a:endParaRPr sz="1380" b="1">
+              <a:solidFill>
+                <a:srgbClr val="12293A"/>
+              </a:solidFill>
+              <a:latin typeface="黑体" panose="02010609060101010101" charset="-122"/>
+            </a:endParaRPr>
           </a:p>
         </p:txBody>
       </p:sp>
@@ -12981,21 +13459,27 @@
           <a:noFill/>
         </p:spPr>
         <p:txBody>
-          <a:bodyPr wrap="square" lIns="27432" rIns="27432" tIns="9144" bIns="9144" anchor="t">
-            <a:spAutoFit/>
-          </a:bodyPr>
-          <a:lstStyle/>
-          <a:p>
-            <a:pPr algn="ctr"/>
-            <a:r>
-              <a:rPr b="0" sz="1060">
+          <a:bodyPr wrap="square" lIns="27432" tIns="9144" rIns="27432" bIns="9144" anchor="t">
+            <a:spAutoFit/>
+          </a:bodyPr>
+          <a:lstStyle/>
+          <a:p>
+            <a:pPr algn="ctr"/>
+            <a:r>
+              <a:rPr sz="1060" b="0">
                 <a:solidFill>
                   <a:srgbClr val="141A1F"/>
                 </a:solidFill>
-                <a:latin typeface="SimSun"/>
+                <a:latin typeface="宋体" panose="02010600030101010101" pitchFamily="2" charset="-122"/>
               </a:rPr>
               <a:t>识别特定靶点</a:t>
             </a:r>
+            <a:endParaRPr sz="1060" b="0">
+              <a:solidFill>
+                <a:srgbClr val="141A1F"/>
+              </a:solidFill>
+              <a:latin typeface="宋体" panose="02010600030101010101" pitchFamily="2" charset="-122"/>
+            </a:endParaRPr>
           </a:p>
         </p:txBody>
       </p:sp>
@@ -13061,21 +13545,27 @@
           <a:noFill/>
         </p:spPr>
         <p:txBody>
-          <a:bodyPr wrap="square" lIns="27432" rIns="27432" tIns="9144" bIns="9144" anchor="t">
-            <a:spAutoFit/>
-          </a:bodyPr>
-          <a:lstStyle/>
-          <a:p>
-            <a:pPr algn="ctr"/>
-            <a:r>
-              <a:rPr b="1" sz="1220">
+          <a:bodyPr wrap="square" lIns="27432" tIns="9144" rIns="27432" bIns="9144" anchor="t">
+            <a:spAutoFit/>
+          </a:bodyPr>
+          <a:lstStyle/>
+          <a:p>
+            <a:pPr algn="ctr"/>
+            <a:r>
+              <a:rPr sz="1220" b="1">
                 <a:solidFill>
                   <a:srgbClr val="1C908B"/>
                 </a:solidFill>
-                <a:latin typeface="SimHei"/>
+                <a:latin typeface="黑体" panose="02010609060101010101" charset="-122"/>
               </a:rPr>
               <a:t>2011</a:t>
             </a:r>
+            <a:endParaRPr sz="1220" b="1">
+              <a:solidFill>
+                <a:srgbClr val="1C908B"/>
+              </a:solidFill>
+              <a:latin typeface="黑体" panose="02010609060101010101" charset="-122"/>
+            </a:endParaRPr>
           </a:p>
         </p:txBody>
       </p:sp>
@@ -13096,21 +13586,27 @@
           <a:noFill/>
         </p:spPr>
         <p:txBody>
-          <a:bodyPr wrap="square" lIns="27432" rIns="27432" tIns="9144" bIns="9144" anchor="t">
-            <a:spAutoFit/>
-          </a:bodyPr>
-          <a:lstStyle/>
-          <a:p>
-            <a:pPr algn="ctr"/>
-            <a:r>
-              <a:rPr b="1" sz="1380">
+          <a:bodyPr wrap="square" lIns="27432" tIns="9144" rIns="27432" bIns="9144" anchor="t">
+            <a:spAutoFit/>
+          </a:bodyPr>
+          <a:lstStyle/>
+          <a:p>
+            <a:pPr algn="ctr"/>
+            <a:r>
+              <a:rPr sz="1380" b="1">
                 <a:solidFill>
                   <a:srgbClr val="12293A"/>
                 </a:solidFill>
-                <a:latin typeface="SimHei"/>
+                <a:latin typeface="黑体" panose="02010609060101010101" charset="-122"/>
               </a:rPr>
               <a:t>检查点抑制剂</a:t>
             </a:r>
+            <a:endParaRPr sz="1380" b="1">
+              <a:solidFill>
+                <a:srgbClr val="12293A"/>
+              </a:solidFill>
+              <a:latin typeface="黑体" panose="02010609060101010101" charset="-122"/>
+            </a:endParaRPr>
           </a:p>
         </p:txBody>
       </p:sp>
@@ -13131,21 +13627,27 @@
           <a:noFill/>
         </p:spPr>
         <p:txBody>
-          <a:bodyPr wrap="square" lIns="27432" rIns="27432" tIns="9144" bIns="9144" anchor="t">
-            <a:spAutoFit/>
-          </a:bodyPr>
-          <a:lstStyle/>
-          <a:p>
-            <a:pPr algn="ctr"/>
-            <a:r>
-              <a:rPr b="0" sz="1060">
+          <a:bodyPr wrap="square" lIns="27432" tIns="9144" rIns="27432" bIns="9144" anchor="t">
+            <a:spAutoFit/>
+          </a:bodyPr>
+          <a:lstStyle/>
+          <a:p>
+            <a:pPr algn="ctr"/>
+            <a:r>
+              <a:rPr sz="1060" b="0">
                 <a:solidFill>
                   <a:srgbClr val="141A1F"/>
                 </a:solidFill>
-                <a:latin typeface="SimSun"/>
+                <a:latin typeface="宋体" panose="02010600030101010101" pitchFamily="2" charset="-122"/>
               </a:rPr>
               <a:t>解除免疫刹车</a:t>
             </a:r>
+            <a:endParaRPr sz="1060" b="0">
+              <a:solidFill>
+                <a:srgbClr val="141A1F"/>
+              </a:solidFill>
+              <a:latin typeface="宋体" panose="02010600030101010101" pitchFamily="2" charset="-122"/>
+            </a:endParaRPr>
           </a:p>
         </p:txBody>
       </p:sp>
@@ -13211,21 +13713,27 @@
           <a:noFill/>
         </p:spPr>
         <p:txBody>
-          <a:bodyPr wrap="square" lIns="27432" rIns="27432" tIns="9144" bIns="9144" anchor="t">
-            <a:spAutoFit/>
-          </a:bodyPr>
-          <a:lstStyle/>
-          <a:p>
-            <a:pPr algn="ctr"/>
-            <a:r>
-              <a:rPr b="1" sz="1220">
+          <a:bodyPr wrap="square" lIns="27432" tIns="9144" rIns="27432" bIns="9144" anchor="t">
+            <a:spAutoFit/>
+          </a:bodyPr>
+          <a:lstStyle/>
+          <a:p>
+            <a:pPr algn="ctr"/>
+            <a:r>
+              <a:rPr sz="1220" b="1">
                 <a:solidFill>
                   <a:srgbClr val="1C3848"/>
                 </a:solidFill>
-                <a:latin typeface="SimHei"/>
+                <a:latin typeface="黑体" panose="02010609060101010101" charset="-122"/>
               </a:rPr>
               <a:t>2017</a:t>
             </a:r>
+            <a:endParaRPr sz="1220" b="1">
+              <a:solidFill>
+                <a:srgbClr val="1C3848"/>
+              </a:solidFill>
+              <a:latin typeface="黑体" panose="02010609060101010101" charset="-122"/>
+            </a:endParaRPr>
           </a:p>
         </p:txBody>
       </p:sp>
@@ -13246,21 +13754,27 @@
           <a:noFill/>
         </p:spPr>
         <p:txBody>
-          <a:bodyPr wrap="square" lIns="27432" rIns="27432" tIns="9144" bIns="9144" anchor="t">
-            <a:spAutoFit/>
-          </a:bodyPr>
-          <a:lstStyle/>
-          <a:p>
-            <a:pPr algn="ctr"/>
-            <a:r>
-              <a:rPr b="1" sz="1380">
+          <a:bodyPr wrap="square" lIns="27432" tIns="9144" rIns="27432" bIns="9144" anchor="t">
+            <a:spAutoFit/>
+          </a:bodyPr>
+          <a:lstStyle/>
+          <a:p>
+            <a:pPr algn="ctr"/>
+            <a:r>
+              <a:rPr sz="1380" b="1">
                 <a:solidFill>
                   <a:srgbClr val="12293A"/>
                 </a:solidFill>
-                <a:latin typeface="SimHei"/>
+                <a:latin typeface="黑体" panose="02010609060101010101" charset="-122"/>
               </a:rPr>
               <a:t>CAR-T</a:t>
             </a:r>
+            <a:endParaRPr sz="1380" b="1">
+              <a:solidFill>
+                <a:srgbClr val="12293A"/>
+              </a:solidFill>
+              <a:latin typeface="黑体" panose="02010609060101010101" charset="-122"/>
+            </a:endParaRPr>
           </a:p>
         </p:txBody>
       </p:sp>
@@ -13281,21 +13795,27 @@
           <a:noFill/>
         </p:spPr>
         <p:txBody>
-          <a:bodyPr wrap="square" lIns="27432" rIns="27432" tIns="9144" bIns="9144" anchor="t">
-            <a:spAutoFit/>
-          </a:bodyPr>
-          <a:lstStyle/>
-          <a:p>
-            <a:pPr algn="ctr"/>
-            <a:r>
-              <a:rPr b="0" sz="1060">
+          <a:bodyPr wrap="square" lIns="27432" tIns="9144" rIns="27432" bIns="9144" anchor="t">
+            <a:spAutoFit/>
+          </a:bodyPr>
+          <a:lstStyle/>
+          <a:p>
+            <a:pPr algn="ctr"/>
+            <a:r>
+              <a:rPr sz="1060" b="0">
                 <a:solidFill>
                   <a:srgbClr val="141A1F"/>
                 </a:solidFill>
-                <a:latin typeface="SimSun"/>
+                <a:latin typeface="宋体" panose="02010600030101010101" pitchFamily="2" charset="-122"/>
               </a:rPr>
               <a:t>改造患者 T 细胞</a:t>
             </a:r>
+            <a:endParaRPr sz="1060" b="0">
+              <a:solidFill>
+                <a:srgbClr val="141A1F"/>
+              </a:solidFill>
+              <a:latin typeface="宋体" panose="02010600030101010101" pitchFamily="2" charset="-122"/>
+            </a:endParaRPr>
           </a:p>
         </p:txBody>
       </p:sp>
@@ -13361,21 +13881,27 @@
           <a:noFill/>
         </p:spPr>
         <p:txBody>
-          <a:bodyPr wrap="square" lIns="27432" rIns="27432" tIns="9144" bIns="9144" anchor="t">
-            <a:spAutoFit/>
-          </a:bodyPr>
-          <a:lstStyle/>
-          <a:p>
-            <a:pPr algn="ctr"/>
-            <a:r>
-              <a:rPr b="1" sz="1220">
+          <a:bodyPr wrap="square" lIns="27432" tIns="9144" rIns="27432" bIns="9144" anchor="t">
+            <a:spAutoFit/>
+          </a:bodyPr>
+          <a:lstStyle/>
+          <a:p>
+            <a:pPr algn="ctr"/>
+            <a:r>
+              <a:rPr sz="1220" b="1">
                 <a:solidFill>
                   <a:srgbClr val="C04A43"/>
                 </a:solidFill>
-                <a:latin typeface="SimHei"/>
+                <a:latin typeface="黑体" panose="02010609060101010101" charset="-122"/>
               </a:rPr>
               <a:t>2024</a:t>
             </a:r>
+            <a:endParaRPr sz="1220" b="1">
+              <a:solidFill>
+                <a:srgbClr val="C04A43"/>
+              </a:solidFill>
+              <a:latin typeface="黑体" panose="02010609060101010101" charset="-122"/>
+            </a:endParaRPr>
           </a:p>
         </p:txBody>
       </p:sp>
@@ -13396,21 +13922,27 @@
           <a:noFill/>
         </p:spPr>
         <p:txBody>
-          <a:bodyPr wrap="square" lIns="27432" rIns="27432" tIns="9144" bIns="9144" anchor="t">
-            <a:spAutoFit/>
-          </a:bodyPr>
-          <a:lstStyle/>
-          <a:p>
-            <a:pPr algn="ctr"/>
-            <a:r>
-              <a:rPr b="1" sz="1380">
+          <a:bodyPr wrap="square" lIns="27432" tIns="9144" rIns="27432" bIns="9144" anchor="t">
+            <a:spAutoFit/>
+          </a:bodyPr>
+          <a:lstStyle/>
+          <a:p>
+            <a:pPr algn="ctr"/>
+            <a:r>
+              <a:rPr sz="1380" b="1">
                 <a:solidFill>
                   <a:srgbClr val="12293A"/>
                 </a:solidFill>
-                <a:latin typeface="SimHei"/>
+                <a:latin typeface="黑体" panose="02010609060101010101" charset="-122"/>
               </a:rPr>
               <a:t>TIL</a:t>
             </a:r>
+            <a:endParaRPr sz="1380" b="1">
+              <a:solidFill>
+                <a:srgbClr val="12293A"/>
+              </a:solidFill>
+              <a:latin typeface="黑体" panose="02010609060101010101" charset="-122"/>
+            </a:endParaRPr>
           </a:p>
         </p:txBody>
       </p:sp>
@@ -13431,21 +13963,27 @@
           <a:noFill/>
         </p:spPr>
         <p:txBody>
-          <a:bodyPr wrap="square" lIns="27432" rIns="27432" tIns="9144" bIns="9144" anchor="t">
-            <a:spAutoFit/>
-          </a:bodyPr>
-          <a:lstStyle/>
-          <a:p>
-            <a:pPr algn="ctr"/>
-            <a:r>
-              <a:rPr b="0" sz="1060">
+          <a:bodyPr wrap="square" lIns="27432" tIns="9144" rIns="27432" bIns="9144" anchor="t">
+            <a:spAutoFit/>
+          </a:bodyPr>
+          <a:lstStyle/>
+          <a:p>
+            <a:pPr algn="ctr"/>
+            <a:r>
+              <a:rPr sz="1060" b="0">
                 <a:solidFill>
                   <a:srgbClr val="141A1F"/>
                 </a:solidFill>
-                <a:latin typeface="SimSun"/>
+                <a:latin typeface="宋体" panose="02010600030101010101" pitchFamily="2" charset="-122"/>
               </a:rPr>
               <a:t>放大肿瘤内 T 细胞</a:t>
             </a:r>
+            <a:endParaRPr sz="1060" b="0">
+              <a:solidFill>
+                <a:srgbClr val="141A1F"/>
+              </a:solidFill>
+              <a:latin typeface="宋体" panose="02010600030101010101" pitchFamily="2" charset="-122"/>
+            </a:endParaRPr>
           </a:p>
         </p:txBody>
       </p:sp>
@@ -13466,21 +14004,27 @@
           <a:noFill/>
         </p:spPr>
         <p:txBody>
-          <a:bodyPr wrap="square" lIns="27432" rIns="27432" tIns="9144" bIns="9144" anchor="t">
-            <a:spAutoFit/>
-          </a:bodyPr>
-          <a:lstStyle/>
-          <a:p>
-            <a:pPr algn="ctr"/>
-            <a:r>
-              <a:rPr b="1" sz="1800">
+          <a:bodyPr wrap="square" lIns="27432" tIns="9144" rIns="27432" bIns="9144" anchor="t">
+            <a:spAutoFit/>
+          </a:bodyPr>
+          <a:lstStyle/>
+          <a:p>
+            <a:pPr algn="ctr"/>
+            <a:r>
+              <a:rPr sz="1800" b="1">
                 <a:solidFill>
                   <a:srgbClr val="12293A"/>
                 </a:solidFill>
-                <a:latin typeface="SimHei"/>
+                <a:latin typeface="黑体" panose="02010609060101010101" charset="-122"/>
               </a:rPr>
               <a:t>变化主线：从“打击肿瘤”走向“利用人体系统对抗肿瘤”。</a:t>
             </a:r>
+            <a:endParaRPr sz="1800" b="1">
+              <a:solidFill>
+                <a:srgbClr val="12293A"/>
+              </a:solidFill>
+              <a:latin typeface="黑体" panose="02010609060101010101" charset="-122"/>
+            </a:endParaRPr>
           </a:p>
         </p:txBody>
       </p:sp>
@@ -13493,7 +14037,7 @@
 </file>
 
 <file path=ppt/slides/slide5.xml><?xml version="1.0" encoding="utf-8"?>
-<p:sld xmlns:a="http://schemas.openxmlformats.org/drawingml/2006/main" xmlns:p="http://schemas.openxmlformats.org/presentationml/2006/main" xmlns:r="http://schemas.openxmlformats.org/officeDocument/2006/relationships">
+<p:sld xmlns:a="http://schemas.openxmlformats.org/drawingml/2006/main" xmlns:r="http://schemas.openxmlformats.org/officeDocument/2006/relationships" xmlns:p="http://schemas.openxmlformats.org/presentationml/2006/main">
   <p:cSld>
     <p:spTree>
       <p:nvGrpSpPr>
@@ -13609,21 +14153,27 @@
           <a:noFill/>
         </p:spPr>
         <p:txBody>
-          <a:bodyPr wrap="square" lIns="27432" rIns="27432" tIns="9144" bIns="9144" anchor="t">
+          <a:bodyPr wrap="square" lIns="27432" tIns="9144" rIns="27432" bIns="9144" anchor="t">
             <a:spAutoFit/>
           </a:bodyPr>
           <a:lstStyle/>
           <a:p>
             <a:pPr algn="l"/>
             <a:r>
-              <a:rPr b="1" sz="1100">
+              <a:rPr sz="1100" b="1">
                 <a:solidFill>
                   <a:srgbClr val="1C908B"/>
                 </a:solidFill>
-                <a:latin typeface="SimHei"/>
+                <a:latin typeface="黑体" panose="02010609060101010101" charset="-122"/>
               </a:rPr>
               <a:t>框架</a:t>
             </a:r>
+            <a:endParaRPr sz="1100" b="1">
+              <a:solidFill>
+                <a:srgbClr val="1C908B"/>
+              </a:solidFill>
+              <a:latin typeface="黑体" panose="02010609060101010101" charset="-122"/>
+            </a:endParaRPr>
           </a:p>
         </p:txBody>
       </p:sp>
@@ -13644,21 +14194,27 @@
           <a:noFill/>
         </p:spPr>
         <p:txBody>
-          <a:bodyPr wrap="square" lIns="27432" rIns="27432" tIns="9144" bIns="9144" anchor="t">
+          <a:bodyPr wrap="square" lIns="27432" tIns="9144" rIns="27432" bIns="9144" anchor="t">
             <a:spAutoFit/>
           </a:bodyPr>
           <a:lstStyle/>
           <a:p>
             <a:pPr algn="l"/>
             <a:r>
-              <a:rPr b="1" sz="2550">
+              <a:rPr sz="2550" b="1">
                 <a:solidFill>
                   <a:srgbClr val="12293A"/>
                 </a:solidFill>
-                <a:latin typeface="SimHei"/>
+                <a:latin typeface="黑体" panose="02010609060101010101" charset="-122"/>
               </a:rPr>
               <a:t>三条路线：解除刹车、改造细胞、放大反应</a:t>
             </a:r>
+            <a:endParaRPr sz="2550" b="1">
+              <a:solidFill>
+                <a:srgbClr val="12293A"/>
+              </a:solidFill>
+              <a:latin typeface="黑体" panose="02010609060101010101" charset="-122"/>
+            </a:endParaRPr>
           </a:p>
         </p:txBody>
       </p:sp>
@@ -13724,21 +14280,27 @@
           <a:noFill/>
         </p:spPr>
         <p:txBody>
-          <a:bodyPr wrap="square" lIns="27432" rIns="27432" tIns="9144" bIns="9144" anchor="t">
+          <a:bodyPr wrap="square" lIns="27432" tIns="9144" rIns="27432" bIns="9144" anchor="t">
             <a:spAutoFit/>
           </a:bodyPr>
           <a:lstStyle/>
           <a:p>
             <a:pPr algn="l"/>
             <a:r>
-              <a:rPr b="1" sz="1420">
+              <a:rPr sz="1420" b="1">
                 <a:solidFill>
                   <a:srgbClr val="12293A"/>
                 </a:solidFill>
-                <a:latin typeface="SimHei"/>
+                <a:latin typeface="黑体" panose="02010609060101010101" charset="-122"/>
               </a:rPr>
               <a:t>三类技术代表三种调动免疫系统的方法。</a:t>
             </a:r>
+            <a:endParaRPr sz="1420" b="1">
+              <a:solidFill>
+                <a:srgbClr val="12293A"/>
+              </a:solidFill>
+              <a:latin typeface="黑体" panose="02010609060101010101" charset="-122"/>
+            </a:endParaRPr>
           </a:p>
         </p:txBody>
       </p:sp>
@@ -13759,56 +14321,27 @@
           <a:noFill/>
         </p:spPr>
         <p:txBody>
-          <a:bodyPr wrap="square" lIns="27432" rIns="27432" tIns="9144" bIns="9144" anchor="t">
+          <a:bodyPr wrap="square" lIns="27432" tIns="9144" rIns="27432" bIns="9144" anchor="t">
             <a:spAutoFit/>
           </a:bodyPr>
           <a:lstStyle/>
           <a:p>
             <a:pPr algn="l"/>
             <a:r>
-              <a:rPr b="1" sz="819">
+              <a:rPr sz="820" b="1">
                 <a:solidFill>
                   <a:srgbClr val="586874"/>
                 </a:solidFill>
-                <a:latin typeface="SimHei"/>
+                <a:latin typeface="黑体" panose="02010609060101010101" charset="-122"/>
               </a:rPr>
               <a:t>05/15</a:t>
             </a:r>
-          </a:p>
-        </p:txBody>
-      </p:sp>
-      <p:sp>
-        <p:nvSpPr>
-          <p:cNvPr id="9" name="TextBox 8"/>
-          <p:cNvSpPr txBox="1"/>
-          <p:nvPr/>
-        </p:nvSpPr>
-        <p:spPr>
-          <a:xfrm>
-            <a:off x="1060704" y="6400800"/>
-            <a:ext cx="10332720" cy="228600"/>
-          </a:xfrm>
-          <a:prstGeom prst="rect">
-            <a:avLst/>
-          </a:prstGeom>
-          <a:noFill/>
-        </p:spPr>
-        <p:txBody>
-          <a:bodyPr wrap="square" lIns="27432" rIns="27432" tIns="9144" bIns="9144" anchor="t">
-            <a:spAutoFit/>
-          </a:bodyPr>
-          <a:lstStyle/>
-          <a:p>
-            <a:pPr algn="l"/>
-            <a:r>
-              <a:rPr b="0" sz="800">
-                <a:solidFill>
-                  <a:srgbClr val="586874"/>
-                </a:solidFill>
-                <a:latin typeface="SimSun"/>
-              </a:rPr>
-              <a:t>资料：NCI Immunotherapy；NCI CAR T Cells；FDA Amtagvi</a:t>
-            </a:r>
+            <a:endParaRPr sz="820" b="1">
+              <a:solidFill>
+                <a:srgbClr val="586874"/>
+              </a:solidFill>
+              <a:latin typeface="黑体" panose="02010609060101010101" charset="-122"/>
+            </a:endParaRPr>
           </a:p>
         </p:txBody>
       </p:sp>
@@ -13919,21 +14452,27 @@
           <a:noFill/>
         </p:spPr>
         <p:txBody>
-          <a:bodyPr wrap="square" lIns="27432" rIns="27432" tIns="9144" bIns="9144" anchor="t">
-            <a:spAutoFit/>
-          </a:bodyPr>
-          <a:lstStyle/>
-          <a:p>
-            <a:pPr algn="ctr"/>
-            <a:r>
-              <a:rPr b="1" sz="1650">
+          <a:bodyPr wrap="square" lIns="27432" tIns="9144" rIns="27432" bIns="9144" anchor="t">
+            <a:spAutoFit/>
+          </a:bodyPr>
+          <a:lstStyle/>
+          <a:p>
+            <a:pPr algn="ctr"/>
+            <a:r>
+              <a:rPr sz="1650" b="1">
                 <a:solidFill>
                   <a:srgbClr val="FFFFFF"/>
                 </a:solidFill>
-                <a:latin typeface="SimHei"/>
+                <a:latin typeface="黑体" panose="02010609060101010101" charset="-122"/>
               </a:rPr>
               <a:t>解除刹车</a:t>
             </a:r>
+            <a:endParaRPr sz="1650" b="1">
+              <a:solidFill>
+                <a:srgbClr val="FFFFFF"/>
+              </a:solidFill>
+              <a:latin typeface="黑体" panose="02010609060101010101" charset="-122"/>
+            </a:endParaRPr>
           </a:p>
         </p:txBody>
       </p:sp>
@@ -13954,21 +14493,27 @@
           <a:noFill/>
         </p:spPr>
         <p:txBody>
-          <a:bodyPr wrap="square" lIns="27432" rIns="27432" tIns="9144" bIns="9144" anchor="t">
-            <a:spAutoFit/>
-          </a:bodyPr>
-          <a:lstStyle/>
-          <a:p>
-            <a:pPr algn="ctr"/>
-            <a:r>
-              <a:rPr b="1" sz="2200">
+          <a:bodyPr wrap="square" lIns="27432" tIns="9144" rIns="27432" bIns="9144" anchor="t">
+            <a:spAutoFit/>
+          </a:bodyPr>
+          <a:lstStyle/>
+          <a:p>
+            <a:pPr algn="ctr"/>
+            <a:r>
+              <a:rPr sz="2200" b="1">
                 <a:solidFill>
                   <a:srgbClr val="12293A"/>
                 </a:solidFill>
-                <a:latin typeface="SimHei"/>
+                <a:latin typeface="黑体" panose="02010609060101010101" charset="-122"/>
               </a:rPr>
               <a:t>免疫检查点</a:t>
             </a:r>
+            <a:endParaRPr sz="2200" b="1">
+              <a:solidFill>
+                <a:srgbClr val="12293A"/>
+              </a:solidFill>
+              <a:latin typeface="黑体" panose="02010609060101010101" charset="-122"/>
+            </a:endParaRPr>
           </a:p>
         </p:txBody>
       </p:sp>
@@ -13989,21 +14534,27 @@
           <a:noFill/>
         </p:spPr>
         <p:txBody>
-          <a:bodyPr wrap="square" lIns="27432" rIns="27432" tIns="9144" bIns="9144" anchor="t">
-            <a:spAutoFit/>
-          </a:bodyPr>
-          <a:lstStyle/>
-          <a:p>
-            <a:pPr algn="ctr"/>
-            <a:r>
-              <a:rPr b="0" sz="1340">
+          <a:bodyPr wrap="square" lIns="27432" tIns="9144" rIns="27432" bIns="9144" anchor="t">
+            <a:spAutoFit/>
+          </a:bodyPr>
+          <a:lstStyle/>
+          <a:p>
+            <a:pPr algn="ctr"/>
+            <a:r>
+              <a:rPr sz="1340" b="0">
                 <a:solidFill>
                   <a:srgbClr val="141A1F"/>
                 </a:solidFill>
-                <a:latin typeface="SimSun"/>
+                <a:latin typeface="宋体" panose="02010600030101010101" pitchFamily="2" charset="-122"/>
               </a:rPr>
               <a:t>让 T 细胞重新攻击</a:t>
             </a:r>
+            <a:endParaRPr sz="1340" b="0">
+              <a:solidFill>
+                <a:srgbClr val="141A1F"/>
+              </a:solidFill>
+              <a:latin typeface="宋体" panose="02010600030101010101" pitchFamily="2" charset="-122"/>
+            </a:endParaRPr>
           </a:p>
         </p:txBody>
       </p:sp>
@@ -14114,21 +14665,27 @@
           <a:noFill/>
         </p:spPr>
         <p:txBody>
-          <a:bodyPr wrap="square" lIns="27432" rIns="27432" tIns="9144" bIns="9144" anchor="t">
-            <a:spAutoFit/>
-          </a:bodyPr>
-          <a:lstStyle/>
-          <a:p>
-            <a:pPr algn="ctr"/>
-            <a:r>
-              <a:rPr b="1" sz="1650">
+          <a:bodyPr wrap="square" lIns="27432" tIns="9144" rIns="27432" bIns="9144" anchor="t">
+            <a:spAutoFit/>
+          </a:bodyPr>
+          <a:lstStyle/>
+          <a:p>
+            <a:pPr algn="ctr"/>
+            <a:r>
+              <a:rPr sz="1650" b="1">
                 <a:solidFill>
                   <a:srgbClr val="FFFFFF"/>
                 </a:solidFill>
-                <a:latin typeface="SimHei"/>
+                <a:latin typeface="黑体" panose="02010609060101010101" charset="-122"/>
               </a:rPr>
               <a:t>改造细胞</a:t>
             </a:r>
+            <a:endParaRPr sz="1650" b="1">
+              <a:solidFill>
+                <a:srgbClr val="FFFFFF"/>
+              </a:solidFill>
+              <a:latin typeface="黑体" panose="02010609060101010101" charset="-122"/>
+            </a:endParaRPr>
           </a:p>
         </p:txBody>
       </p:sp>
@@ -14149,21 +14706,27 @@
           <a:noFill/>
         </p:spPr>
         <p:txBody>
-          <a:bodyPr wrap="square" lIns="27432" rIns="27432" tIns="9144" bIns="9144" anchor="t">
-            <a:spAutoFit/>
-          </a:bodyPr>
-          <a:lstStyle/>
-          <a:p>
-            <a:pPr algn="ctr"/>
-            <a:r>
-              <a:rPr b="1" sz="2200">
+          <a:bodyPr wrap="square" lIns="27432" tIns="9144" rIns="27432" bIns="9144" anchor="t">
+            <a:spAutoFit/>
+          </a:bodyPr>
+          <a:lstStyle/>
+          <a:p>
+            <a:pPr algn="ctr"/>
+            <a:r>
+              <a:rPr sz="2200" b="1">
                 <a:solidFill>
                   <a:srgbClr val="12293A"/>
                 </a:solidFill>
-                <a:latin typeface="SimHei"/>
+                <a:latin typeface="黑体" panose="02010609060101010101" charset="-122"/>
               </a:rPr>
               <a:t>CAR-T</a:t>
             </a:r>
+            <a:endParaRPr sz="2200" b="1">
+              <a:solidFill>
+                <a:srgbClr val="12293A"/>
+              </a:solidFill>
+              <a:latin typeface="黑体" panose="02010609060101010101" charset="-122"/>
+            </a:endParaRPr>
           </a:p>
         </p:txBody>
       </p:sp>
@@ -14184,21 +14747,27 @@
           <a:noFill/>
         </p:spPr>
         <p:txBody>
-          <a:bodyPr wrap="square" lIns="27432" rIns="27432" tIns="9144" bIns="9144" anchor="t">
-            <a:spAutoFit/>
-          </a:bodyPr>
-          <a:lstStyle/>
-          <a:p>
-            <a:pPr algn="ctr"/>
-            <a:r>
-              <a:rPr b="0" sz="1340">
+          <a:bodyPr wrap="square" lIns="27432" tIns="9144" rIns="27432" bIns="9144" anchor="t">
+            <a:spAutoFit/>
+          </a:bodyPr>
+          <a:lstStyle/>
+          <a:p>
+            <a:pPr algn="ctr"/>
+            <a:r>
+              <a:rPr sz="1340" b="0">
                 <a:solidFill>
                   <a:srgbClr val="141A1F"/>
                 </a:solidFill>
-                <a:latin typeface="SimSun"/>
+                <a:latin typeface="宋体" panose="02010600030101010101" pitchFamily="2" charset="-122"/>
               </a:rPr>
               <a:t>给 T 细胞新识别能力</a:t>
             </a:r>
+            <a:endParaRPr sz="1340" b="0">
+              <a:solidFill>
+                <a:srgbClr val="141A1F"/>
+              </a:solidFill>
+              <a:latin typeface="宋体" panose="02010600030101010101" pitchFamily="2" charset="-122"/>
+            </a:endParaRPr>
           </a:p>
         </p:txBody>
       </p:sp>
@@ -14309,21 +14878,27 @@
           <a:noFill/>
         </p:spPr>
         <p:txBody>
-          <a:bodyPr wrap="square" lIns="27432" rIns="27432" tIns="9144" bIns="9144" anchor="t">
-            <a:spAutoFit/>
-          </a:bodyPr>
-          <a:lstStyle/>
-          <a:p>
-            <a:pPr algn="ctr"/>
-            <a:r>
-              <a:rPr b="1" sz="1650">
+          <a:bodyPr wrap="square" lIns="27432" tIns="9144" rIns="27432" bIns="9144" anchor="t">
+            <a:spAutoFit/>
+          </a:bodyPr>
+          <a:lstStyle/>
+          <a:p>
+            <a:pPr algn="ctr"/>
+            <a:r>
+              <a:rPr sz="1650" b="1">
                 <a:solidFill>
                   <a:srgbClr val="FFFFFF"/>
                 </a:solidFill>
-                <a:latin typeface="SimHei"/>
+                <a:latin typeface="黑体" panose="02010609060101010101" charset="-122"/>
               </a:rPr>
               <a:t>放大反应</a:t>
             </a:r>
+            <a:endParaRPr sz="1650" b="1">
+              <a:solidFill>
+                <a:srgbClr val="FFFFFF"/>
+              </a:solidFill>
+              <a:latin typeface="黑体" panose="02010609060101010101" charset="-122"/>
+            </a:endParaRPr>
           </a:p>
         </p:txBody>
       </p:sp>
@@ -14344,21 +14919,27 @@
           <a:noFill/>
         </p:spPr>
         <p:txBody>
-          <a:bodyPr wrap="square" lIns="27432" rIns="27432" tIns="9144" bIns="9144" anchor="t">
-            <a:spAutoFit/>
-          </a:bodyPr>
-          <a:lstStyle/>
-          <a:p>
-            <a:pPr algn="ctr"/>
-            <a:r>
-              <a:rPr b="1" sz="2200">
+          <a:bodyPr wrap="square" lIns="27432" tIns="9144" rIns="27432" bIns="9144" anchor="t">
+            <a:spAutoFit/>
+          </a:bodyPr>
+          <a:lstStyle/>
+          <a:p>
+            <a:pPr algn="ctr"/>
+            <a:r>
+              <a:rPr sz="2200" b="1">
                 <a:solidFill>
                   <a:srgbClr val="12293A"/>
                 </a:solidFill>
-                <a:latin typeface="SimHei"/>
+                <a:latin typeface="黑体" panose="02010609060101010101" charset="-122"/>
               </a:rPr>
               <a:t>TIL</a:t>
             </a:r>
+            <a:endParaRPr sz="2200" b="1">
+              <a:solidFill>
+                <a:srgbClr val="12293A"/>
+              </a:solidFill>
+              <a:latin typeface="黑体" panose="02010609060101010101" charset="-122"/>
+            </a:endParaRPr>
           </a:p>
         </p:txBody>
       </p:sp>
@@ -14379,21 +14960,27 @@
           <a:noFill/>
         </p:spPr>
         <p:txBody>
-          <a:bodyPr wrap="square" lIns="27432" rIns="27432" tIns="9144" bIns="9144" anchor="t">
-            <a:spAutoFit/>
-          </a:bodyPr>
-          <a:lstStyle/>
-          <a:p>
-            <a:pPr algn="ctr"/>
-            <a:r>
-              <a:rPr b="0" sz="1340">
+          <a:bodyPr wrap="square" lIns="27432" tIns="9144" rIns="27432" bIns="9144" anchor="t">
+            <a:spAutoFit/>
+          </a:bodyPr>
+          <a:lstStyle/>
+          <a:p>
+            <a:pPr algn="ctr"/>
+            <a:r>
+              <a:rPr sz="1340" b="0">
                 <a:solidFill>
                   <a:srgbClr val="141A1F"/>
                 </a:solidFill>
-                <a:latin typeface="SimSun"/>
+                <a:latin typeface="宋体" panose="02010600030101010101" pitchFamily="2" charset="-122"/>
               </a:rPr>
               <a:t>扩增已有抗肿瘤反应</a:t>
             </a:r>
+            <a:endParaRPr sz="1340" b="0">
+              <a:solidFill>
+                <a:srgbClr val="141A1F"/>
+              </a:solidFill>
+              <a:latin typeface="宋体" panose="02010600030101010101" pitchFamily="2" charset="-122"/>
+            </a:endParaRPr>
           </a:p>
         </p:txBody>
       </p:sp>
@@ -14406,7 +14993,7 @@
 </file>
 
 <file path=ppt/slides/slide6.xml><?xml version="1.0" encoding="utf-8"?>
-<p:sld xmlns:a="http://schemas.openxmlformats.org/drawingml/2006/main" xmlns:p="http://schemas.openxmlformats.org/presentationml/2006/main" xmlns:r="http://schemas.openxmlformats.org/officeDocument/2006/relationships">
+<p:sld xmlns:a="http://schemas.openxmlformats.org/drawingml/2006/main" xmlns:r="http://schemas.openxmlformats.org/officeDocument/2006/relationships" xmlns:p="http://schemas.openxmlformats.org/presentationml/2006/main">
   <p:cSld>
     <p:spTree>
       <p:nvGrpSpPr>
@@ -14522,21 +15109,27 @@
           <a:noFill/>
         </p:spPr>
         <p:txBody>
-          <a:bodyPr wrap="square" lIns="27432" rIns="27432" tIns="9144" bIns="9144" anchor="t">
+          <a:bodyPr wrap="square" lIns="27432" tIns="9144" rIns="27432" bIns="9144" anchor="t">
             <a:spAutoFit/>
           </a:bodyPr>
           <a:lstStyle/>
           <a:p>
             <a:pPr algn="l"/>
             <a:r>
-              <a:rPr b="1" sz="1100">
+              <a:rPr sz="1100" b="1">
                 <a:solidFill>
                   <a:srgbClr val="1C908B"/>
                 </a:solidFill>
-                <a:latin typeface="SimHei"/>
+                <a:latin typeface="黑体" panose="02010609060101010101" charset="-122"/>
               </a:rPr>
               <a:t>技术一</a:t>
             </a:r>
+            <a:endParaRPr sz="1100" b="1">
+              <a:solidFill>
+                <a:srgbClr val="1C908B"/>
+              </a:solidFill>
+              <a:latin typeface="黑体" panose="02010609060101010101" charset="-122"/>
+            </a:endParaRPr>
           </a:p>
         </p:txBody>
       </p:sp>
@@ -14557,21 +15150,27 @@
           <a:noFill/>
         </p:spPr>
         <p:txBody>
-          <a:bodyPr wrap="square" lIns="27432" rIns="27432" tIns="9144" bIns="9144" anchor="t">
+          <a:bodyPr wrap="square" lIns="27432" tIns="9144" rIns="27432" bIns="9144" anchor="t">
             <a:spAutoFit/>
           </a:bodyPr>
           <a:lstStyle/>
           <a:p>
             <a:pPr algn="l"/>
             <a:r>
-              <a:rPr b="1" sz="2550">
+              <a:rPr sz="2550" b="1">
                 <a:solidFill>
                   <a:srgbClr val="12293A"/>
                 </a:solidFill>
-                <a:latin typeface="SimHei"/>
+                <a:latin typeface="黑体" panose="02010609060101010101" charset="-122"/>
               </a:rPr>
               <a:t>检查点抑制剂：不是直接杀癌，而是解除免疫刹车</a:t>
             </a:r>
+            <a:endParaRPr sz="2550" b="1">
+              <a:solidFill>
+                <a:srgbClr val="12293A"/>
+              </a:solidFill>
+              <a:latin typeface="黑体" panose="02010609060101010101" charset="-122"/>
+            </a:endParaRPr>
           </a:p>
         </p:txBody>
       </p:sp>
@@ -14637,21 +15236,27 @@
           <a:noFill/>
         </p:spPr>
         <p:txBody>
-          <a:bodyPr wrap="square" lIns="27432" rIns="27432" tIns="9144" bIns="9144" anchor="t">
+          <a:bodyPr wrap="square" lIns="27432" tIns="9144" rIns="27432" bIns="9144" anchor="t">
             <a:spAutoFit/>
           </a:bodyPr>
           <a:lstStyle/>
           <a:p>
             <a:pPr algn="l"/>
             <a:r>
-              <a:rPr b="1" sz="1420">
+              <a:rPr sz="1420" b="1">
                 <a:solidFill>
                   <a:srgbClr val="12293A"/>
                 </a:solidFill>
-                <a:latin typeface="SimHei"/>
+                <a:latin typeface="黑体" panose="02010609060101010101" charset="-122"/>
               </a:rPr>
               <a:t>治疗目标从杀死癌细胞，转向解除免疫抑制。</a:t>
             </a:r>
+            <a:endParaRPr sz="1420" b="1">
+              <a:solidFill>
+                <a:srgbClr val="12293A"/>
+              </a:solidFill>
+              <a:latin typeface="黑体" panose="02010609060101010101" charset="-122"/>
+            </a:endParaRPr>
           </a:p>
         </p:txBody>
       </p:sp>
@@ -14672,56 +15277,27 @@
           <a:noFill/>
         </p:spPr>
         <p:txBody>
-          <a:bodyPr wrap="square" lIns="27432" rIns="27432" tIns="9144" bIns="9144" anchor="t">
+          <a:bodyPr wrap="square" lIns="27432" tIns="9144" rIns="27432" bIns="9144" anchor="t">
             <a:spAutoFit/>
           </a:bodyPr>
           <a:lstStyle/>
           <a:p>
             <a:pPr algn="l"/>
             <a:r>
-              <a:rPr b="1" sz="819">
+              <a:rPr sz="820" b="1">
                 <a:solidFill>
                   <a:srgbClr val="586874"/>
                 </a:solidFill>
-                <a:latin typeface="SimHei"/>
+                <a:latin typeface="黑体" panose="02010609060101010101" charset="-122"/>
               </a:rPr>
               <a:t>06/15</a:t>
             </a:r>
-          </a:p>
-        </p:txBody>
-      </p:sp>
-      <p:sp>
-        <p:nvSpPr>
-          <p:cNvPr id="9" name="TextBox 8"/>
-          <p:cNvSpPr txBox="1"/>
-          <p:nvPr/>
-        </p:nvSpPr>
-        <p:spPr>
-          <a:xfrm>
-            <a:off x="1060704" y="6400800"/>
-            <a:ext cx="10332720" cy="228600"/>
-          </a:xfrm>
-          <a:prstGeom prst="rect">
-            <a:avLst/>
-          </a:prstGeom>
-          <a:noFill/>
-        </p:spPr>
-        <p:txBody>
-          <a:bodyPr wrap="square" lIns="27432" rIns="27432" tIns="9144" bIns="9144" anchor="t">
-            <a:spAutoFit/>
-          </a:bodyPr>
-          <a:lstStyle/>
-          <a:p>
-            <a:pPr algn="l"/>
-            <a:r>
-              <a:rPr b="0" sz="800">
-                <a:solidFill>
-                  <a:srgbClr val="586874"/>
-                </a:solidFill>
-                <a:latin typeface="SimSun"/>
-              </a:rPr>
-              <a:t>资料：NCI Immunotherapy；Nobel Prize 2018；FDA Pembrolizumab TMB-H</a:t>
-            </a:r>
+            <a:endParaRPr sz="820" b="1">
+              <a:solidFill>
+                <a:srgbClr val="586874"/>
+              </a:solidFill>
+              <a:latin typeface="黑体" panose="02010609060101010101" charset="-122"/>
+            </a:endParaRPr>
           </a:p>
         </p:txBody>
       </p:sp>
@@ -14779,14 +15355,14 @@
           <p:nvPr/>
         </p:nvPicPr>
         <p:blipFill>
-          <a:blip r:embed="rId2"/>
+          <a:blip r:embed="rId1"/>
           <a:stretch>
             <a:fillRect/>
           </a:stretch>
         </p:blipFill>
         <p:spPr>
           <a:xfrm>
-            <a:off x="960120" y="2424683"/>
+            <a:off x="873125" y="2424683"/>
             <a:ext cx="5029200" cy="2849880"/>
           </a:xfrm>
           <a:prstGeom prst="rect">
@@ -14856,21 +15432,27 @@
           <a:noFill/>
         </p:spPr>
         <p:txBody>
-          <a:bodyPr wrap="square" lIns="27432" rIns="27432" tIns="9144" bIns="9144" anchor="t">
+          <a:bodyPr wrap="square" lIns="27432" tIns="9144" rIns="27432" bIns="9144" anchor="t">
             <a:spAutoFit/>
           </a:bodyPr>
           <a:lstStyle/>
           <a:p>
             <a:pPr algn="l"/>
             <a:r>
-              <a:rPr b="1" sz="1320">
+              <a:rPr sz="1320" b="1">
                 <a:solidFill>
                   <a:srgbClr val="1C908B"/>
                 </a:solidFill>
-                <a:latin typeface="SimHei"/>
+                <a:latin typeface="黑体" panose="02010609060101010101" charset="-122"/>
               </a:rPr>
               <a:t>关键词</a:t>
             </a:r>
+            <a:endParaRPr sz="1320" b="1">
+              <a:solidFill>
+                <a:srgbClr val="1C908B"/>
+              </a:solidFill>
+              <a:latin typeface="黑体" panose="02010609060101010101" charset="-122"/>
+            </a:endParaRPr>
           </a:p>
         </p:txBody>
       </p:sp>
@@ -14891,21 +15473,27 @@
           <a:noFill/>
         </p:spPr>
         <p:txBody>
-          <a:bodyPr wrap="square" lIns="27432" rIns="27432" tIns="9144" bIns="9144" anchor="t">
+          <a:bodyPr wrap="square" lIns="27432" tIns="9144" rIns="27432" bIns="9144" anchor="t">
             <a:spAutoFit/>
           </a:bodyPr>
           <a:lstStyle/>
           <a:p>
             <a:pPr algn="l"/>
             <a:r>
-              <a:rPr b="0" sz="1200">
+              <a:rPr sz="1200" b="0">
                 <a:solidFill>
                   <a:srgbClr val="141A1F"/>
                 </a:solidFill>
-                <a:latin typeface="SimSun"/>
+                <a:latin typeface="宋体" panose="02010600030101010101" pitchFamily="2" charset="-122"/>
               </a:rPr>
               <a:t>CTLA-4 / PD-1 / PD-L1</a:t>
             </a:r>
+            <a:endParaRPr sz="1200" b="0">
+              <a:solidFill>
+                <a:srgbClr val="141A1F"/>
+              </a:solidFill>
+              <a:latin typeface="宋体" panose="02010600030101010101" pitchFamily="2" charset="-122"/>
+            </a:endParaRPr>
           </a:p>
         </p:txBody>
       </p:sp>
@@ -14971,21 +15559,27 @@
           <a:noFill/>
         </p:spPr>
         <p:txBody>
-          <a:bodyPr wrap="square" lIns="27432" rIns="27432" tIns="9144" bIns="9144" anchor="t">
+          <a:bodyPr wrap="square" lIns="27432" tIns="9144" rIns="27432" bIns="9144" anchor="t">
             <a:spAutoFit/>
           </a:bodyPr>
           <a:lstStyle/>
           <a:p>
             <a:pPr algn="l"/>
             <a:r>
-              <a:rPr b="1" sz="1320">
+              <a:rPr sz="1320" b="1">
                 <a:solidFill>
                   <a:srgbClr val="E59E3A"/>
                 </a:solidFill>
-                <a:latin typeface="SimHei"/>
+                <a:latin typeface="黑体" panose="02010609060101010101" charset="-122"/>
               </a:rPr>
               <a:t>历史节点</a:t>
             </a:r>
+            <a:endParaRPr sz="1320" b="1">
+              <a:solidFill>
+                <a:srgbClr val="E59E3A"/>
+              </a:solidFill>
+              <a:latin typeface="黑体" panose="02010609060101010101" charset="-122"/>
+            </a:endParaRPr>
           </a:p>
         </p:txBody>
       </p:sp>
@@ -15006,21 +15600,27 @@
           <a:noFill/>
         </p:spPr>
         <p:txBody>
-          <a:bodyPr wrap="square" lIns="27432" rIns="27432" tIns="9144" bIns="9144" anchor="t">
+          <a:bodyPr wrap="square" lIns="27432" tIns="9144" rIns="27432" bIns="9144" anchor="t">
             <a:spAutoFit/>
           </a:bodyPr>
           <a:lstStyle/>
           <a:p>
             <a:pPr algn="l"/>
             <a:r>
-              <a:rPr b="0" sz="1200">
+              <a:rPr sz="1200" b="0">
                 <a:solidFill>
                   <a:srgbClr val="141A1F"/>
                 </a:solidFill>
-                <a:latin typeface="SimSun"/>
+                <a:latin typeface="宋体" panose="02010600030101010101" pitchFamily="2" charset="-122"/>
               </a:rPr>
               <a:t>2018 年诺奖：抑制免疫负调节治疗癌症。</a:t>
             </a:r>
+            <a:endParaRPr sz="1200" b="0">
+              <a:solidFill>
+                <a:srgbClr val="141A1F"/>
+              </a:solidFill>
+              <a:latin typeface="宋体" panose="02010600030101010101" pitchFamily="2" charset="-122"/>
+            </a:endParaRPr>
           </a:p>
         </p:txBody>
       </p:sp>
@@ -15086,21 +15686,27 @@
           <a:noFill/>
         </p:spPr>
         <p:txBody>
-          <a:bodyPr wrap="square" lIns="27432" rIns="27432" tIns="9144" bIns="9144" anchor="t">
+          <a:bodyPr wrap="square" lIns="27432" tIns="9144" rIns="27432" bIns="9144" anchor="t">
             <a:spAutoFit/>
           </a:bodyPr>
           <a:lstStyle/>
           <a:p>
             <a:pPr algn="l"/>
             <a:r>
-              <a:rPr b="1" sz="1320">
+              <a:rPr sz="1320" b="1">
                 <a:solidFill>
                   <a:srgbClr val="C04A43"/>
                 </a:solidFill>
-                <a:latin typeface="SimHei"/>
+                <a:latin typeface="黑体" panose="02010609060101010101" charset="-122"/>
               </a:rPr>
               <a:t>实例证据</a:t>
             </a:r>
+            <a:endParaRPr sz="1320" b="1">
+              <a:solidFill>
+                <a:srgbClr val="C04A43"/>
+              </a:solidFill>
+              <a:latin typeface="黑体" panose="02010609060101010101" charset="-122"/>
+            </a:endParaRPr>
           </a:p>
         </p:txBody>
       </p:sp>
@@ -15121,21 +15727,27 @@
           <a:noFill/>
         </p:spPr>
         <p:txBody>
-          <a:bodyPr wrap="square" lIns="27432" rIns="27432" tIns="9144" bIns="9144" anchor="t">
+          <a:bodyPr wrap="square" lIns="27432" tIns="9144" rIns="27432" bIns="9144" anchor="t">
             <a:spAutoFit/>
           </a:bodyPr>
           <a:lstStyle/>
           <a:p>
             <a:pPr algn="l"/>
             <a:r>
-              <a:rPr b="0" sz="1200">
+              <a:rPr sz="1200" b="0">
                 <a:solidFill>
                   <a:srgbClr val="141A1F"/>
                 </a:solidFill>
-                <a:latin typeface="SimSun"/>
+                <a:latin typeface="宋体" panose="02010600030101010101" pitchFamily="2" charset="-122"/>
               </a:rPr>
               <a:t>Pembrolizumab 用于 TMB-H 实体瘤，ORR 29%。</a:t>
             </a:r>
+            <a:endParaRPr sz="1200" b="0">
+              <a:solidFill>
+                <a:srgbClr val="141A1F"/>
+              </a:solidFill>
+              <a:latin typeface="宋体" panose="02010600030101010101" pitchFamily="2" charset="-122"/>
+            </a:endParaRPr>
           </a:p>
         </p:txBody>
       </p:sp>
@@ -15148,7 +15760,7 @@
 </file>
 
 <file path=ppt/slides/slide7.xml><?xml version="1.0" encoding="utf-8"?>
-<p:sld xmlns:a="http://schemas.openxmlformats.org/drawingml/2006/main" xmlns:p="http://schemas.openxmlformats.org/presentationml/2006/main" xmlns:r="http://schemas.openxmlformats.org/officeDocument/2006/relationships">
+<p:sld xmlns:a="http://schemas.openxmlformats.org/drawingml/2006/main" xmlns:r="http://schemas.openxmlformats.org/officeDocument/2006/relationships" xmlns:p="http://schemas.openxmlformats.org/presentationml/2006/main">
   <p:cSld>
     <p:spTree>
       <p:nvGrpSpPr>
@@ -15264,21 +15876,27 @@
           <a:noFill/>
         </p:spPr>
         <p:txBody>
-          <a:bodyPr wrap="square" lIns="27432" rIns="27432" tIns="9144" bIns="9144" anchor="t">
+          <a:bodyPr wrap="square" lIns="27432" tIns="9144" rIns="27432" bIns="9144" anchor="t">
             <a:spAutoFit/>
           </a:bodyPr>
           <a:lstStyle/>
           <a:p>
             <a:pPr algn="l"/>
             <a:r>
-              <a:rPr b="1" sz="1100">
+              <a:rPr sz="1100" b="1">
                 <a:solidFill>
                   <a:srgbClr val="1C908B"/>
                 </a:solidFill>
-                <a:latin typeface="SimHei"/>
+                <a:latin typeface="黑体" panose="02010609060101010101" charset="-122"/>
               </a:rPr>
               <a:t>技术二</a:t>
             </a:r>
+            <a:endParaRPr sz="1100" b="1">
+              <a:solidFill>
+                <a:srgbClr val="1C908B"/>
+              </a:solidFill>
+              <a:latin typeface="黑体" panose="02010609060101010101" charset="-122"/>
+            </a:endParaRPr>
           </a:p>
         </p:txBody>
       </p:sp>
@@ -15299,21 +15917,27 @@
           <a:noFill/>
         </p:spPr>
         <p:txBody>
-          <a:bodyPr wrap="square" lIns="27432" rIns="27432" tIns="9144" bIns="9144" anchor="t">
+          <a:bodyPr wrap="square" lIns="27432" tIns="9144" rIns="27432" bIns="9144" anchor="t">
             <a:spAutoFit/>
           </a:bodyPr>
           <a:lstStyle/>
           <a:p>
             <a:pPr algn="l"/>
             <a:r>
-              <a:rPr b="1" sz="2550">
+              <a:rPr sz="2550" b="1">
                 <a:solidFill>
                   <a:srgbClr val="12293A"/>
                 </a:solidFill>
-                <a:latin typeface="SimHei"/>
+                <a:latin typeface="黑体" panose="02010609060101010101" charset="-122"/>
               </a:rPr>
               <a:t>CAR-T：把患者 T 细胞改造成“活的药物”</a:t>
             </a:r>
+            <a:endParaRPr sz="2550" b="1">
+              <a:solidFill>
+                <a:srgbClr val="12293A"/>
+              </a:solidFill>
+              <a:latin typeface="黑体" panose="02010609060101010101" charset="-122"/>
+            </a:endParaRPr>
           </a:p>
         </p:txBody>
       </p:sp>
@@ -15379,21 +16003,27 @@
           <a:noFill/>
         </p:spPr>
         <p:txBody>
-          <a:bodyPr wrap="square" lIns="27432" rIns="27432" tIns="9144" bIns="9144" anchor="t">
+          <a:bodyPr wrap="square" lIns="27432" tIns="9144" rIns="27432" bIns="9144" anchor="t">
             <a:spAutoFit/>
           </a:bodyPr>
           <a:lstStyle/>
           <a:p>
             <a:pPr algn="l"/>
             <a:r>
-              <a:rPr b="1" sz="1420">
+              <a:rPr sz="1420" b="1">
                 <a:solidFill>
                   <a:srgbClr val="12293A"/>
                 </a:solidFill>
-                <a:latin typeface="SimHei"/>
+                <a:latin typeface="黑体" panose="02010609060101010101" charset="-122"/>
               </a:rPr>
               <a:t>患者细胞本身成为治疗材料，药物形态从分子扩展到活细胞。</a:t>
             </a:r>
+            <a:endParaRPr sz="1420" b="1">
+              <a:solidFill>
+                <a:srgbClr val="12293A"/>
+              </a:solidFill>
+              <a:latin typeface="黑体" panose="02010609060101010101" charset="-122"/>
+            </a:endParaRPr>
           </a:p>
         </p:txBody>
       </p:sp>
@@ -15414,56 +16044,27 @@
           <a:noFill/>
         </p:spPr>
         <p:txBody>
-          <a:bodyPr wrap="square" lIns="27432" rIns="27432" tIns="9144" bIns="9144" anchor="t">
+          <a:bodyPr wrap="square" lIns="27432" tIns="9144" rIns="27432" bIns="9144" anchor="t">
             <a:spAutoFit/>
           </a:bodyPr>
           <a:lstStyle/>
           <a:p>
             <a:pPr algn="l"/>
             <a:r>
-              <a:rPr b="1" sz="819">
+              <a:rPr sz="820" b="1">
                 <a:solidFill>
                   <a:srgbClr val="586874"/>
                 </a:solidFill>
-                <a:latin typeface="SimHei"/>
+                <a:latin typeface="黑体" panose="02010609060101010101" charset="-122"/>
               </a:rPr>
               <a:t>07/15</a:t>
             </a:r>
-          </a:p>
-        </p:txBody>
-      </p:sp>
-      <p:sp>
-        <p:nvSpPr>
-          <p:cNvPr id="9" name="TextBox 8"/>
-          <p:cNvSpPr txBox="1"/>
-          <p:nvPr/>
-        </p:nvSpPr>
-        <p:spPr>
-          <a:xfrm>
-            <a:off x="1060704" y="6400800"/>
-            <a:ext cx="10332720" cy="228600"/>
-          </a:xfrm>
-          <a:prstGeom prst="rect">
-            <a:avLst/>
-          </a:prstGeom>
-          <a:noFill/>
-        </p:spPr>
-        <p:txBody>
-          <a:bodyPr wrap="square" lIns="27432" rIns="27432" tIns="9144" bIns="9144" anchor="t">
-            <a:spAutoFit/>
-          </a:bodyPr>
-          <a:lstStyle/>
-          <a:p>
-            <a:pPr algn="l"/>
-            <a:r>
-              <a:rPr b="0" sz="800">
-                <a:solidFill>
-                  <a:srgbClr val="586874"/>
-                </a:solidFill>
-                <a:latin typeface="SimSun"/>
-              </a:rPr>
-              <a:t>资料：NCI Kymriah article；NCI CAR T Cells</a:t>
-            </a:r>
+            <a:endParaRPr sz="820" b="1">
+              <a:solidFill>
+                <a:srgbClr val="586874"/>
+              </a:solidFill>
+              <a:latin typeface="黑体" panose="02010609060101010101" charset="-122"/>
+            </a:endParaRPr>
           </a:p>
         </p:txBody>
       </p:sp>
@@ -15619,21 +16220,27 @@
           <a:noFill/>
         </p:spPr>
         <p:txBody>
-          <a:bodyPr wrap="square" lIns="27432" rIns="27432" tIns="9144" bIns="9144" anchor="t">
-            <a:spAutoFit/>
-          </a:bodyPr>
-          <a:lstStyle/>
-          <a:p>
-            <a:pPr algn="ctr"/>
-            <a:r>
-              <a:rPr b="1" sz="1180">
+          <a:bodyPr wrap="square" lIns="27432" tIns="9144" rIns="27432" bIns="9144" anchor="t">
+            <a:spAutoFit/>
+          </a:bodyPr>
+          <a:lstStyle/>
+          <a:p>
+            <a:pPr algn="ctr"/>
+            <a:r>
+              <a:rPr sz="1180" b="1">
                 <a:solidFill>
                   <a:srgbClr val="FFFFFF"/>
                 </a:solidFill>
-                <a:latin typeface="SimHei"/>
+                <a:latin typeface="黑体" panose="02010609060101010101" charset="-122"/>
               </a:rPr>
               <a:t>1</a:t>
             </a:r>
+            <a:endParaRPr sz="1180" b="1">
+              <a:solidFill>
+                <a:srgbClr val="FFFFFF"/>
+              </a:solidFill>
+              <a:latin typeface="黑体" panose="02010609060101010101" charset="-122"/>
+            </a:endParaRPr>
           </a:p>
         </p:txBody>
       </p:sp>
@@ -15654,21 +16261,27 @@
           <a:noFill/>
         </p:spPr>
         <p:txBody>
-          <a:bodyPr wrap="square" lIns="27432" rIns="27432" tIns="9144" bIns="9144" anchor="t">
-            <a:spAutoFit/>
-          </a:bodyPr>
-          <a:lstStyle/>
-          <a:p>
-            <a:pPr algn="ctr"/>
-            <a:r>
-              <a:rPr b="1" sz="1300">
+          <a:bodyPr wrap="square" lIns="27432" tIns="9144" rIns="27432" bIns="9144" anchor="t">
+            <a:spAutoFit/>
+          </a:bodyPr>
+          <a:lstStyle/>
+          <a:p>
+            <a:pPr algn="ctr"/>
+            <a:r>
+              <a:rPr sz="1300" b="1">
                 <a:solidFill>
                   <a:srgbClr val="12293A"/>
                 </a:solidFill>
-                <a:latin typeface="SimHei"/>
+                <a:latin typeface="黑体" panose="02010609060101010101" charset="-122"/>
               </a:rPr>
               <a:t>采集</a:t>
             </a:r>
+            <a:endParaRPr sz="1300" b="1">
+              <a:solidFill>
+                <a:srgbClr val="12293A"/>
+              </a:solidFill>
+              <a:latin typeface="黑体" panose="02010609060101010101" charset="-122"/>
+            </a:endParaRPr>
           </a:p>
         </p:txBody>
       </p:sp>
@@ -15689,21 +16302,27 @@
           <a:noFill/>
         </p:spPr>
         <p:txBody>
-          <a:bodyPr wrap="square" lIns="27432" rIns="27432" tIns="9144" bIns="9144" anchor="t">
-            <a:spAutoFit/>
-          </a:bodyPr>
-          <a:lstStyle/>
-          <a:p>
-            <a:pPr algn="ctr"/>
-            <a:r>
-              <a:rPr b="0" sz="1050">
+          <a:bodyPr wrap="square" lIns="27432" tIns="9144" rIns="27432" bIns="9144" anchor="t">
+            <a:spAutoFit/>
+          </a:bodyPr>
+          <a:lstStyle/>
+          <a:p>
+            <a:pPr algn="ctr"/>
+            <a:r>
+              <a:rPr sz="1050" b="0">
                 <a:solidFill>
                   <a:srgbClr val="586874"/>
                 </a:solidFill>
-                <a:latin typeface="SimSun"/>
+                <a:latin typeface="宋体" panose="02010600030101010101" pitchFamily="2" charset="-122"/>
               </a:rPr>
               <a:t>分离 T 细胞</a:t>
             </a:r>
+            <a:endParaRPr sz="1050" b="0">
+              <a:solidFill>
+                <a:srgbClr val="586874"/>
+              </a:solidFill>
+              <a:latin typeface="宋体" panose="02010600030101010101" pitchFamily="2" charset="-122"/>
+            </a:endParaRPr>
           </a:p>
         </p:txBody>
       </p:sp>
@@ -15859,21 +16478,27 @@
           <a:noFill/>
         </p:spPr>
         <p:txBody>
-          <a:bodyPr wrap="square" lIns="27432" rIns="27432" tIns="9144" bIns="9144" anchor="t">
-            <a:spAutoFit/>
-          </a:bodyPr>
-          <a:lstStyle/>
-          <a:p>
-            <a:pPr algn="ctr"/>
-            <a:r>
-              <a:rPr b="1" sz="1180">
+          <a:bodyPr wrap="square" lIns="27432" tIns="9144" rIns="27432" bIns="9144" anchor="t">
+            <a:spAutoFit/>
+          </a:bodyPr>
+          <a:lstStyle/>
+          <a:p>
+            <a:pPr algn="ctr"/>
+            <a:r>
+              <a:rPr sz="1180" b="1">
                 <a:solidFill>
                   <a:srgbClr val="FFFFFF"/>
                 </a:solidFill>
-                <a:latin typeface="SimHei"/>
+                <a:latin typeface="黑体" panose="02010609060101010101" charset="-122"/>
               </a:rPr>
               <a:t>2</a:t>
             </a:r>
+            <a:endParaRPr sz="1180" b="1">
+              <a:solidFill>
+                <a:srgbClr val="FFFFFF"/>
+              </a:solidFill>
+              <a:latin typeface="黑体" panose="02010609060101010101" charset="-122"/>
+            </a:endParaRPr>
           </a:p>
         </p:txBody>
       </p:sp>
@@ -15894,21 +16519,27 @@
           <a:noFill/>
         </p:spPr>
         <p:txBody>
-          <a:bodyPr wrap="square" lIns="27432" rIns="27432" tIns="9144" bIns="9144" anchor="t">
-            <a:spAutoFit/>
-          </a:bodyPr>
-          <a:lstStyle/>
-          <a:p>
-            <a:pPr algn="ctr"/>
-            <a:r>
-              <a:rPr b="1" sz="1300">
+          <a:bodyPr wrap="square" lIns="27432" tIns="9144" rIns="27432" bIns="9144" anchor="t">
+            <a:spAutoFit/>
+          </a:bodyPr>
+          <a:lstStyle/>
+          <a:p>
+            <a:pPr algn="ctr"/>
+            <a:r>
+              <a:rPr sz="1300" b="1">
                 <a:solidFill>
                   <a:srgbClr val="12293A"/>
                 </a:solidFill>
-                <a:latin typeface="SimHei"/>
+                <a:latin typeface="黑体" panose="02010609060101010101" charset="-122"/>
               </a:rPr>
               <a:t>工程化</a:t>
             </a:r>
+            <a:endParaRPr sz="1300" b="1">
+              <a:solidFill>
+                <a:srgbClr val="12293A"/>
+              </a:solidFill>
+              <a:latin typeface="黑体" panose="02010609060101010101" charset="-122"/>
+            </a:endParaRPr>
           </a:p>
         </p:txBody>
       </p:sp>
@@ -15929,21 +16560,27 @@
           <a:noFill/>
         </p:spPr>
         <p:txBody>
-          <a:bodyPr wrap="square" lIns="27432" rIns="27432" tIns="9144" bIns="9144" anchor="t">
-            <a:spAutoFit/>
-          </a:bodyPr>
-          <a:lstStyle/>
-          <a:p>
-            <a:pPr algn="ctr"/>
-            <a:r>
-              <a:rPr b="0" sz="1050">
+          <a:bodyPr wrap="square" lIns="27432" tIns="9144" rIns="27432" bIns="9144" anchor="t">
+            <a:spAutoFit/>
+          </a:bodyPr>
+          <a:lstStyle/>
+          <a:p>
+            <a:pPr algn="ctr"/>
+            <a:r>
+              <a:rPr sz="1050" b="0">
                 <a:solidFill>
                   <a:srgbClr val="586874"/>
                 </a:solidFill>
-                <a:latin typeface="SimSun"/>
+                <a:latin typeface="宋体" panose="02010600030101010101" pitchFamily="2" charset="-122"/>
               </a:rPr>
               <a:t>加入 CAR 结构</a:t>
             </a:r>
+            <a:endParaRPr sz="1050" b="0">
+              <a:solidFill>
+                <a:srgbClr val="586874"/>
+              </a:solidFill>
+              <a:latin typeface="宋体" panose="02010600030101010101" pitchFamily="2" charset="-122"/>
+            </a:endParaRPr>
           </a:p>
         </p:txBody>
       </p:sp>
@@ -16099,21 +16736,27 @@
           <a:noFill/>
         </p:spPr>
         <p:txBody>
-          <a:bodyPr wrap="square" lIns="27432" rIns="27432" tIns="9144" bIns="9144" anchor="t">
-            <a:spAutoFit/>
-          </a:bodyPr>
-          <a:lstStyle/>
-          <a:p>
-            <a:pPr algn="ctr"/>
-            <a:r>
-              <a:rPr b="1" sz="1180">
+          <a:bodyPr wrap="square" lIns="27432" tIns="9144" rIns="27432" bIns="9144" anchor="t">
+            <a:spAutoFit/>
+          </a:bodyPr>
+          <a:lstStyle/>
+          <a:p>
+            <a:pPr algn="ctr"/>
+            <a:r>
+              <a:rPr sz="1180" b="1">
                 <a:solidFill>
                   <a:srgbClr val="FFFFFF"/>
                 </a:solidFill>
-                <a:latin typeface="SimHei"/>
+                <a:latin typeface="黑体" panose="02010609060101010101" charset="-122"/>
               </a:rPr>
               <a:t>3</a:t>
             </a:r>
+            <a:endParaRPr sz="1180" b="1">
+              <a:solidFill>
+                <a:srgbClr val="FFFFFF"/>
+              </a:solidFill>
+              <a:latin typeface="黑体" panose="02010609060101010101" charset="-122"/>
+            </a:endParaRPr>
           </a:p>
         </p:txBody>
       </p:sp>
@@ -16134,21 +16777,27 @@
           <a:noFill/>
         </p:spPr>
         <p:txBody>
-          <a:bodyPr wrap="square" lIns="27432" rIns="27432" tIns="9144" bIns="9144" anchor="t">
-            <a:spAutoFit/>
-          </a:bodyPr>
-          <a:lstStyle/>
-          <a:p>
-            <a:pPr algn="ctr"/>
-            <a:r>
-              <a:rPr b="1" sz="1300">
+          <a:bodyPr wrap="square" lIns="27432" tIns="9144" rIns="27432" bIns="9144" anchor="t">
+            <a:spAutoFit/>
+          </a:bodyPr>
+          <a:lstStyle/>
+          <a:p>
+            <a:pPr algn="ctr"/>
+            <a:r>
+              <a:rPr sz="1300" b="1">
                 <a:solidFill>
                   <a:srgbClr val="12293A"/>
                 </a:solidFill>
-                <a:latin typeface="SimHei"/>
+                <a:latin typeface="黑体" panose="02010609060101010101" charset="-122"/>
               </a:rPr>
               <a:t>扩增</a:t>
             </a:r>
+            <a:endParaRPr sz="1300" b="1">
+              <a:solidFill>
+                <a:srgbClr val="12293A"/>
+              </a:solidFill>
+              <a:latin typeface="黑体" panose="02010609060101010101" charset="-122"/>
+            </a:endParaRPr>
           </a:p>
         </p:txBody>
       </p:sp>
@@ -16169,21 +16818,27 @@
           <a:noFill/>
         </p:spPr>
         <p:txBody>
-          <a:bodyPr wrap="square" lIns="27432" rIns="27432" tIns="9144" bIns="9144" anchor="t">
-            <a:spAutoFit/>
-          </a:bodyPr>
-          <a:lstStyle/>
-          <a:p>
-            <a:pPr algn="ctr"/>
-            <a:r>
-              <a:rPr b="0" sz="1050">
+          <a:bodyPr wrap="square" lIns="27432" tIns="9144" rIns="27432" bIns="9144" anchor="t">
+            <a:spAutoFit/>
+          </a:bodyPr>
+          <a:lstStyle/>
+          <a:p>
+            <a:pPr algn="ctr"/>
+            <a:r>
+              <a:rPr sz="1050" b="0">
                 <a:solidFill>
                   <a:srgbClr val="586874"/>
                 </a:solidFill>
-                <a:latin typeface="SimSun"/>
+                <a:latin typeface="宋体" panose="02010600030101010101" pitchFamily="2" charset="-122"/>
               </a:rPr>
               <a:t>体外扩增</a:t>
             </a:r>
+            <a:endParaRPr sz="1050" b="0">
+              <a:solidFill>
+                <a:srgbClr val="586874"/>
+              </a:solidFill>
+              <a:latin typeface="宋体" panose="02010600030101010101" pitchFamily="2" charset="-122"/>
+            </a:endParaRPr>
           </a:p>
         </p:txBody>
       </p:sp>
@@ -16339,21 +16994,27 @@
           <a:noFill/>
         </p:spPr>
         <p:txBody>
-          <a:bodyPr wrap="square" lIns="27432" rIns="27432" tIns="9144" bIns="9144" anchor="t">
-            <a:spAutoFit/>
-          </a:bodyPr>
-          <a:lstStyle/>
-          <a:p>
-            <a:pPr algn="ctr"/>
-            <a:r>
-              <a:rPr b="1" sz="1180">
+          <a:bodyPr wrap="square" lIns="27432" tIns="9144" rIns="27432" bIns="9144" anchor="t">
+            <a:spAutoFit/>
+          </a:bodyPr>
+          <a:lstStyle/>
+          <a:p>
+            <a:pPr algn="ctr"/>
+            <a:r>
+              <a:rPr sz="1180" b="1">
                 <a:solidFill>
                   <a:srgbClr val="FFFFFF"/>
                 </a:solidFill>
-                <a:latin typeface="SimHei"/>
+                <a:latin typeface="黑体" panose="02010609060101010101" charset="-122"/>
               </a:rPr>
               <a:t>4</a:t>
             </a:r>
+            <a:endParaRPr sz="1180" b="1">
+              <a:solidFill>
+                <a:srgbClr val="FFFFFF"/>
+              </a:solidFill>
+              <a:latin typeface="黑体" panose="02010609060101010101" charset="-122"/>
+            </a:endParaRPr>
           </a:p>
         </p:txBody>
       </p:sp>
@@ -16374,21 +17035,27 @@
           <a:noFill/>
         </p:spPr>
         <p:txBody>
-          <a:bodyPr wrap="square" lIns="27432" rIns="27432" tIns="9144" bIns="9144" anchor="t">
-            <a:spAutoFit/>
-          </a:bodyPr>
-          <a:lstStyle/>
-          <a:p>
-            <a:pPr algn="ctr"/>
-            <a:r>
-              <a:rPr b="1" sz="1300">
+          <a:bodyPr wrap="square" lIns="27432" tIns="9144" rIns="27432" bIns="9144" anchor="t">
+            <a:spAutoFit/>
+          </a:bodyPr>
+          <a:lstStyle/>
+          <a:p>
+            <a:pPr algn="ctr"/>
+            <a:r>
+              <a:rPr sz="1300" b="1">
                 <a:solidFill>
                   <a:srgbClr val="12293A"/>
                 </a:solidFill>
-                <a:latin typeface="SimHei"/>
+                <a:latin typeface="黑体" panose="02010609060101010101" charset="-122"/>
               </a:rPr>
               <a:t>预处理</a:t>
             </a:r>
+            <a:endParaRPr sz="1300" b="1">
+              <a:solidFill>
+                <a:srgbClr val="12293A"/>
+              </a:solidFill>
+              <a:latin typeface="黑体" panose="02010609060101010101" charset="-122"/>
+            </a:endParaRPr>
           </a:p>
         </p:txBody>
       </p:sp>
@@ -16409,21 +17076,27 @@
           <a:noFill/>
         </p:spPr>
         <p:txBody>
-          <a:bodyPr wrap="square" lIns="27432" rIns="27432" tIns="9144" bIns="9144" anchor="t">
-            <a:spAutoFit/>
-          </a:bodyPr>
-          <a:lstStyle/>
-          <a:p>
-            <a:pPr algn="ctr"/>
-            <a:r>
-              <a:rPr b="0" sz="1050">
+          <a:bodyPr wrap="square" lIns="27432" tIns="9144" rIns="27432" bIns="9144" anchor="t">
+            <a:spAutoFit/>
+          </a:bodyPr>
+          <a:lstStyle/>
+          <a:p>
+            <a:pPr algn="ctr"/>
+            <a:r>
+              <a:rPr sz="1050" b="0">
                 <a:solidFill>
                   <a:srgbClr val="586874"/>
                 </a:solidFill>
-                <a:latin typeface="SimSun"/>
+                <a:latin typeface="宋体" panose="02010600030101010101" pitchFamily="2" charset="-122"/>
               </a:rPr>
               <a:t>淋巴清除</a:t>
             </a:r>
+            <a:endParaRPr sz="1050" b="0">
+              <a:solidFill>
+                <a:srgbClr val="586874"/>
+              </a:solidFill>
+              <a:latin typeface="宋体" panose="02010600030101010101" pitchFamily="2" charset="-122"/>
+            </a:endParaRPr>
           </a:p>
         </p:txBody>
       </p:sp>
@@ -16579,21 +17252,27 @@
           <a:noFill/>
         </p:spPr>
         <p:txBody>
-          <a:bodyPr wrap="square" lIns="27432" rIns="27432" tIns="9144" bIns="9144" anchor="t">
-            <a:spAutoFit/>
-          </a:bodyPr>
-          <a:lstStyle/>
-          <a:p>
-            <a:pPr algn="ctr"/>
-            <a:r>
-              <a:rPr b="1" sz="1180">
+          <a:bodyPr wrap="square" lIns="27432" tIns="9144" rIns="27432" bIns="9144" anchor="t">
+            <a:spAutoFit/>
+          </a:bodyPr>
+          <a:lstStyle/>
+          <a:p>
+            <a:pPr algn="ctr"/>
+            <a:r>
+              <a:rPr sz="1180" b="1">
                 <a:solidFill>
                   <a:srgbClr val="FFFFFF"/>
                 </a:solidFill>
-                <a:latin typeface="SimHei"/>
+                <a:latin typeface="黑体" panose="02010609060101010101" charset="-122"/>
               </a:rPr>
               <a:t>5</a:t>
             </a:r>
+            <a:endParaRPr sz="1180" b="1">
+              <a:solidFill>
+                <a:srgbClr val="FFFFFF"/>
+              </a:solidFill>
+              <a:latin typeface="黑体" panose="02010609060101010101" charset="-122"/>
+            </a:endParaRPr>
           </a:p>
         </p:txBody>
       </p:sp>
@@ -16614,21 +17293,27 @@
           <a:noFill/>
         </p:spPr>
         <p:txBody>
-          <a:bodyPr wrap="square" lIns="27432" rIns="27432" tIns="9144" bIns="9144" anchor="t">
-            <a:spAutoFit/>
-          </a:bodyPr>
-          <a:lstStyle/>
-          <a:p>
-            <a:pPr algn="ctr"/>
-            <a:r>
-              <a:rPr b="1" sz="1300">
+          <a:bodyPr wrap="square" lIns="27432" tIns="9144" rIns="27432" bIns="9144" anchor="t">
+            <a:spAutoFit/>
+          </a:bodyPr>
+          <a:lstStyle/>
+          <a:p>
+            <a:pPr algn="ctr"/>
+            <a:r>
+              <a:rPr sz="1300" b="1">
                 <a:solidFill>
                   <a:srgbClr val="12293A"/>
                 </a:solidFill>
-                <a:latin typeface="SimHei"/>
+                <a:latin typeface="黑体" panose="02010609060101010101" charset="-122"/>
               </a:rPr>
               <a:t>回输</a:t>
             </a:r>
+            <a:endParaRPr sz="1300" b="1">
+              <a:solidFill>
+                <a:srgbClr val="12293A"/>
+              </a:solidFill>
+              <a:latin typeface="黑体" panose="02010609060101010101" charset="-122"/>
+            </a:endParaRPr>
           </a:p>
         </p:txBody>
       </p:sp>
@@ -16649,21 +17334,27 @@
           <a:noFill/>
         </p:spPr>
         <p:txBody>
-          <a:bodyPr wrap="square" lIns="27432" rIns="27432" tIns="9144" bIns="9144" anchor="t">
-            <a:spAutoFit/>
-          </a:bodyPr>
-          <a:lstStyle/>
-          <a:p>
-            <a:pPr algn="ctr"/>
-            <a:r>
-              <a:rPr b="0" sz="1050">
+          <a:bodyPr wrap="square" lIns="27432" tIns="9144" rIns="27432" bIns="9144" anchor="t">
+            <a:spAutoFit/>
+          </a:bodyPr>
+          <a:lstStyle/>
+          <a:p>
+            <a:pPr algn="ctr"/>
+            <a:r>
+              <a:rPr sz="1050" b="0">
                 <a:solidFill>
                   <a:srgbClr val="586874"/>
                 </a:solidFill>
-                <a:latin typeface="SimSun"/>
+                <a:latin typeface="宋体" panose="02010600030101010101" pitchFamily="2" charset="-122"/>
               </a:rPr>
               <a:t>回输体内</a:t>
             </a:r>
+            <a:endParaRPr sz="1050" b="0">
+              <a:solidFill>
+                <a:srgbClr val="586874"/>
+              </a:solidFill>
+              <a:latin typeface="宋体" panose="02010600030101010101" pitchFamily="2" charset="-122"/>
+            </a:endParaRPr>
           </a:p>
         </p:txBody>
       </p:sp>
@@ -16819,21 +17510,27 @@
           <a:noFill/>
         </p:spPr>
         <p:txBody>
-          <a:bodyPr wrap="square" lIns="27432" rIns="27432" tIns="9144" bIns="9144" anchor="t">
-            <a:spAutoFit/>
-          </a:bodyPr>
-          <a:lstStyle/>
-          <a:p>
-            <a:pPr algn="ctr"/>
-            <a:r>
-              <a:rPr b="1" sz="1180">
+          <a:bodyPr wrap="square" lIns="27432" tIns="9144" rIns="27432" bIns="9144" anchor="t">
+            <a:spAutoFit/>
+          </a:bodyPr>
+          <a:lstStyle/>
+          <a:p>
+            <a:pPr algn="ctr"/>
+            <a:r>
+              <a:rPr sz="1180" b="1">
                 <a:solidFill>
                   <a:srgbClr val="FFFFFF"/>
                 </a:solidFill>
-                <a:latin typeface="SimHei"/>
+                <a:latin typeface="黑体" panose="02010609060101010101" charset="-122"/>
               </a:rPr>
               <a:t>6</a:t>
             </a:r>
+            <a:endParaRPr sz="1180" b="1">
+              <a:solidFill>
+                <a:srgbClr val="FFFFFF"/>
+              </a:solidFill>
+              <a:latin typeface="黑体" panose="02010609060101010101" charset="-122"/>
+            </a:endParaRPr>
           </a:p>
         </p:txBody>
       </p:sp>
@@ -16854,21 +17551,27 @@
           <a:noFill/>
         </p:spPr>
         <p:txBody>
-          <a:bodyPr wrap="square" lIns="27432" rIns="27432" tIns="9144" bIns="9144" anchor="t">
-            <a:spAutoFit/>
-          </a:bodyPr>
-          <a:lstStyle/>
-          <a:p>
-            <a:pPr algn="ctr"/>
-            <a:r>
-              <a:rPr b="1" sz="1300">
+          <a:bodyPr wrap="square" lIns="27432" tIns="9144" rIns="27432" bIns="9144" anchor="t">
+            <a:spAutoFit/>
+          </a:bodyPr>
+          <a:lstStyle/>
+          <a:p>
+            <a:pPr algn="ctr"/>
+            <a:r>
+              <a:rPr sz="1300" b="1">
                 <a:solidFill>
                   <a:srgbClr val="12293A"/>
                 </a:solidFill>
-                <a:latin typeface="SimHei"/>
+                <a:latin typeface="黑体" panose="02010609060101010101" charset="-122"/>
               </a:rPr>
               <a:t>监测</a:t>
             </a:r>
+            <a:endParaRPr sz="1300" b="1">
+              <a:solidFill>
+                <a:srgbClr val="12293A"/>
+              </a:solidFill>
+              <a:latin typeface="黑体" panose="02010609060101010101" charset="-122"/>
+            </a:endParaRPr>
           </a:p>
         </p:txBody>
       </p:sp>
@@ -16889,21 +17592,27 @@
           <a:noFill/>
         </p:spPr>
         <p:txBody>
-          <a:bodyPr wrap="square" lIns="27432" rIns="27432" tIns="9144" bIns="9144" anchor="t">
-            <a:spAutoFit/>
-          </a:bodyPr>
-          <a:lstStyle/>
-          <a:p>
-            <a:pPr algn="ctr"/>
-            <a:r>
-              <a:rPr b="0" sz="1050">
+          <a:bodyPr wrap="square" lIns="27432" tIns="9144" rIns="27432" bIns="9144" anchor="t">
+            <a:spAutoFit/>
+          </a:bodyPr>
+          <a:lstStyle/>
+          <a:p>
+            <a:pPr algn="ctr"/>
+            <a:r>
+              <a:rPr sz="1050" b="0">
                 <a:solidFill>
                   <a:srgbClr val="586874"/>
                 </a:solidFill>
-                <a:latin typeface="SimSun"/>
+                <a:latin typeface="宋体" panose="02010600030101010101" pitchFamily="2" charset="-122"/>
               </a:rPr>
               <a:t>CRS / ICANS</a:t>
             </a:r>
+            <a:endParaRPr sz="1050" b="0">
+              <a:solidFill>
+                <a:srgbClr val="586874"/>
+              </a:solidFill>
+              <a:latin typeface="宋体" panose="02010600030101010101" pitchFamily="2" charset="-122"/>
+            </a:endParaRPr>
           </a:p>
         </p:txBody>
       </p:sp>
@@ -16969,21 +17678,27 @@
           <a:noFill/>
         </p:spPr>
         <p:txBody>
-          <a:bodyPr wrap="square" lIns="27432" rIns="27432" tIns="9144" bIns="9144" anchor="t">
-            <a:spAutoFit/>
-          </a:bodyPr>
-          <a:lstStyle/>
-          <a:p>
-            <a:pPr algn="ctr"/>
-            <a:r>
-              <a:rPr b="1" sz="1320">
+          <a:bodyPr wrap="square" lIns="27432" tIns="9144" rIns="27432" bIns="9144" anchor="t">
+            <a:spAutoFit/>
+          </a:bodyPr>
+          <a:lstStyle/>
+          <a:p>
+            <a:pPr algn="ctr"/>
+            <a:r>
+              <a:rPr sz="1320" b="1">
                 <a:solidFill>
                   <a:srgbClr val="FFFFFF"/>
                 </a:solidFill>
-                <a:latin typeface="SimHei"/>
+                <a:latin typeface="黑体" panose="02010609060101010101" charset="-122"/>
               </a:rPr>
               <a:t>关键点：不是把药片送进身体，而是把能识别肿瘤的免疫细胞送回身体。</a:t>
             </a:r>
+            <a:endParaRPr sz="1320" b="1">
+              <a:solidFill>
+                <a:srgbClr val="FFFFFF"/>
+              </a:solidFill>
+              <a:latin typeface="黑体" panose="02010609060101010101" charset="-122"/>
+            </a:endParaRPr>
           </a:p>
         </p:txBody>
       </p:sp>
@@ -16996,7 +17711,7 @@
 </file>
 
 <file path=ppt/slides/slide8.xml><?xml version="1.0" encoding="utf-8"?>
-<p:sld xmlns:a="http://schemas.openxmlformats.org/drawingml/2006/main" xmlns:p="http://schemas.openxmlformats.org/presentationml/2006/main" xmlns:r="http://schemas.openxmlformats.org/officeDocument/2006/relationships">
+<p:sld xmlns:a="http://schemas.openxmlformats.org/drawingml/2006/main" xmlns:r="http://schemas.openxmlformats.org/officeDocument/2006/relationships" xmlns:p="http://schemas.openxmlformats.org/presentationml/2006/main">
   <p:cSld>
     <p:spTree>
       <p:nvGrpSpPr>
@@ -17112,21 +17827,27 @@
           <a:noFill/>
         </p:spPr>
         <p:txBody>
-          <a:bodyPr wrap="square" lIns="27432" rIns="27432" tIns="9144" bIns="9144" anchor="t">
+          <a:bodyPr wrap="square" lIns="27432" tIns="9144" rIns="27432" bIns="9144" anchor="t">
             <a:spAutoFit/>
           </a:bodyPr>
           <a:lstStyle/>
           <a:p>
             <a:pPr algn="l"/>
             <a:r>
-              <a:rPr b="1" sz="1100">
+              <a:rPr sz="1100" b="1">
                 <a:solidFill>
                   <a:srgbClr val="1C908B"/>
                 </a:solidFill>
-                <a:latin typeface="SimHei"/>
+                <a:latin typeface="黑体" panose="02010609060101010101" charset="-122"/>
               </a:rPr>
               <a:t>CAR-T 证据</a:t>
             </a:r>
+            <a:endParaRPr sz="1100" b="1">
+              <a:solidFill>
+                <a:srgbClr val="1C908B"/>
+              </a:solidFill>
+              <a:latin typeface="黑体" panose="02010609060101010101" charset="-122"/>
+            </a:endParaRPr>
           </a:p>
         </p:txBody>
       </p:sp>
@@ -17147,21 +17868,27 @@
           <a:noFill/>
         </p:spPr>
         <p:txBody>
-          <a:bodyPr wrap="square" lIns="27432" rIns="27432" tIns="9144" bIns="9144" anchor="t">
+          <a:bodyPr wrap="square" lIns="27432" tIns="9144" rIns="27432" bIns="9144" anchor="t">
             <a:spAutoFit/>
           </a:bodyPr>
           <a:lstStyle/>
           <a:p>
             <a:pPr algn="l"/>
             <a:r>
-              <a:rPr b="1" sz="2550">
+              <a:rPr sz="2550" b="1">
                 <a:solidFill>
                   <a:srgbClr val="12293A"/>
                 </a:solidFill>
-                <a:latin typeface="SimHei"/>
+                <a:latin typeface="黑体" panose="02010609060101010101" charset="-122"/>
               </a:rPr>
               <a:t>CAR-T 证据与风险：有效，但要求高</a:t>
             </a:r>
+            <a:endParaRPr sz="2550" b="1">
+              <a:solidFill>
+                <a:srgbClr val="12293A"/>
+              </a:solidFill>
+              <a:latin typeface="黑体" panose="02010609060101010101" charset="-122"/>
+            </a:endParaRPr>
           </a:p>
         </p:txBody>
       </p:sp>
@@ -17227,21 +17954,27 @@
           <a:noFill/>
         </p:spPr>
         <p:txBody>
-          <a:bodyPr wrap="square" lIns="27432" rIns="27432" tIns="9144" bIns="9144" anchor="t">
+          <a:bodyPr wrap="square" lIns="27432" tIns="9144" rIns="27432" bIns="9144" anchor="t">
             <a:spAutoFit/>
           </a:bodyPr>
           <a:lstStyle/>
           <a:p>
             <a:pPr algn="l"/>
             <a:r>
-              <a:rPr b="1" sz="1420">
+              <a:rPr sz="1420" b="1">
                 <a:solidFill>
                   <a:srgbClr val="12293A"/>
                 </a:solidFill>
-                <a:latin typeface="SimHei"/>
+                <a:latin typeface="黑体" panose="02010609060101010101" charset="-122"/>
               </a:rPr>
               <a:t>CAR-T 是高反应、高管理要求的治疗。</a:t>
             </a:r>
+            <a:endParaRPr sz="1420" b="1">
+              <a:solidFill>
+                <a:srgbClr val="12293A"/>
+              </a:solidFill>
+              <a:latin typeface="黑体" panose="02010609060101010101" charset="-122"/>
+            </a:endParaRPr>
           </a:p>
         </p:txBody>
       </p:sp>
@@ -17262,56 +17995,27 @@
           <a:noFill/>
         </p:spPr>
         <p:txBody>
-          <a:bodyPr wrap="square" lIns="27432" rIns="27432" tIns="9144" bIns="9144" anchor="t">
+          <a:bodyPr wrap="square" lIns="27432" tIns="9144" rIns="27432" bIns="9144" anchor="t">
             <a:spAutoFit/>
           </a:bodyPr>
           <a:lstStyle/>
           <a:p>
             <a:pPr algn="l"/>
             <a:r>
-              <a:rPr b="1" sz="819">
+              <a:rPr sz="820" b="1">
                 <a:solidFill>
                   <a:srgbClr val="586874"/>
                 </a:solidFill>
-                <a:latin typeface="SimHei"/>
+                <a:latin typeface="黑体" panose="02010609060101010101" charset="-122"/>
               </a:rPr>
               <a:t>08/15</a:t>
             </a:r>
-          </a:p>
-        </p:txBody>
-      </p:sp>
-      <p:sp>
-        <p:nvSpPr>
-          <p:cNvPr id="9" name="TextBox 8"/>
-          <p:cNvSpPr txBox="1"/>
-          <p:nvPr/>
-        </p:nvSpPr>
-        <p:spPr>
-          <a:xfrm>
-            <a:off x="1060704" y="6400800"/>
-            <a:ext cx="10332720" cy="228600"/>
-          </a:xfrm>
-          <a:prstGeom prst="rect">
-            <a:avLst/>
-          </a:prstGeom>
-          <a:noFill/>
-        </p:spPr>
-        <p:txBody>
-          <a:bodyPr wrap="square" lIns="27432" rIns="27432" tIns="9144" bIns="9144" anchor="t">
-            <a:spAutoFit/>
-          </a:bodyPr>
-          <a:lstStyle/>
-          <a:p>
-            <a:pPr algn="l"/>
-            <a:r>
-              <a:rPr b="0" sz="800">
-                <a:solidFill>
-                  <a:srgbClr val="586874"/>
-                </a:solidFill>
-                <a:latin typeface="SimSun"/>
-              </a:rPr>
-              <a:t>资料：NCI Kymriah article；FDA Aucatzyl Approval；NCI CAR T Cells</a:t>
-            </a:r>
+            <a:endParaRPr sz="820" b="1">
+              <a:solidFill>
+                <a:srgbClr val="586874"/>
+              </a:solidFill>
+              <a:latin typeface="黑体" panose="02010609060101010101" charset="-122"/>
+            </a:endParaRPr>
           </a:p>
         </p:txBody>
       </p:sp>
@@ -17422,21 +18126,27 @@
           <a:noFill/>
         </p:spPr>
         <p:txBody>
-          <a:bodyPr wrap="square" lIns="27432" rIns="27432" tIns="9144" bIns="9144" anchor="t">
-            <a:spAutoFit/>
-          </a:bodyPr>
-          <a:lstStyle/>
-          <a:p>
-            <a:pPr algn="ctr"/>
-            <a:r>
-              <a:rPr b="1" sz="1700">
+          <a:bodyPr wrap="square" lIns="27432" tIns="9144" rIns="27432" bIns="9144" anchor="t">
+            <a:spAutoFit/>
+          </a:bodyPr>
+          <a:lstStyle/>
+          <a:p>
+            <a:pPr algn="ctr"/>
+            <a:r>
+              <a:rPr sz="1700" b="1">
                 <a:solidFill>
                   <a:srgbClr val="FFFFFF"/>
                 </a:solidFill>
-                <a:latin typeface="SimHei"/>
+                <a:latin typeface="黑体" panose="02010609060101010101" charset="-122"/>
               </a:rPr>
               <a:t>疗效</a:t>
             </a:r>
+            <a:endParaRPr sz="1700" b="1">
+              <a:solidFill>
+                <a:srgbClr val="FFFFFF"/>
+              </a:solidFill>
+              <a:latin typeface="黑体" panose="02010609060101010101" charset="-122"/>
+            </a:endParaRPr>
           </a:p>
         </p:txBody>
       </p:sp>
@@ -17457,7 +18167,7 @@
           <a:noFill/>
         </p:spPr>
         <p:txBody>
-          <a:bodyPr wrap="square" lIns="36576" rIns="36576" tIns="9144" bIns="9144">
+          <a:bodyPr wrap="square" lIns="36576" tIns="9144" rIns="36576" bIns="9144">
             <a:spAutoFit/>
           </a:bodyPr>
           <a:lstStyle/>
@@ -17471,14 +18181,20 @@
               </a:spcAft>
             </a:pPr>
             <a:r>
-              <a:rPr b="0" sz="1320">
+              <a:rPr sz="1320" b="0">
                 <a:solidFill>
                   <a:srgbClr val="141A1F"/>
                 </a:solidFill>
-                <a:latin typeface="SimSun"/>
+                <a:latin typeface="宋体" panose="02010600030101010101" pitchFamily="2" charset="-122"/>
               </a:rPr>
               <a:t>• Kymriah：B-ALL，3 个月总体缓解率 83%</a:t>
             </a:r>
+            <a:endParaRPr sz="1320" b="0">
+              <a:solidFill>
+                <a:srgbClr val="141A1F"/>
+              </a:solidFill>
+              <a:latin typeface="宋体" panose="02010600030101010101" pitchFamily="2" charset="-122"/>
+            </a:endParaRPr>
           </a:p>
           <a:p>
             <a:pPr>
@@ -17490,14 +18206,20 @@
               </a:spcAft>
             </a:pPr>
             <a:r>
-              <a:rPr b="0" sz="1320">
+              <a:rPr sz="1320" b="0">
                 <a:solidFill>
                   <a:srgbClr val="141A1F"/>
                 </a:solidFill>
-                <a:latin typeface="SimSun"/>
+                <a:latin typeface="宋体" panose="02010600030101010101" pitchFamily="2" charset="-122"/>
               </a:rPr>
               <a:t>• Aucatzyl：B-ALL，3 个月内 CR 42%</a:t>
             </a:r>
+            <a:endParaRPr sz="1320" b="0">
+              <a:solidFill>
+                <a:srgbClr val="141A1F"/>
+              </a:solidFill>
+              <a:latin typeface="宋体" panose="02010600030101010101" pitchFamily="2" charset="-122"/>
+            </a:endParaRPr>
           </a:p>
         </p:txBody>
       </p:sp>
@@ -17608,21 +18330,27 @@
           <a:noFill/>
         </p:spPr>
         <p:txBody>
-          <a:bodyPr wrap="square" lIns="27432" rIns="27432" tIns="9144" bIns="9144" anchor="t">
-            <a:spAutoFit/>
-          </a:bodyPr>
-          <a:lstStyle/>
-          <a:p>
-            <a:pPr algn="ctr"/>
-            <a:r>
-              <a:rPr b="1" sz="1700">
+          <a:bodyPr wrap="square" lIns="27432" tIns="9144" rIns="27432" bIns="9144" anchor="t">
+            <a:spAutoFit/>
+          </a:bodyPr>
+          <a:lstStyle/>
+          <a:p>
+            <a:pPr algn="ctr"/>
+            <a:r>
+              <a:rPr sz="1700" b="1">
                 <a:solidFill>
                   <a:srgbClr val="FFFFFF"/>
                 </a:solidFill>
-                <a:latin typeface="SimHei"/>
+                <a:latin typeface="黑体" panose="02010609060101010101" charset="-122"/>
               </a:rPr>
               <a:t>风险</a:t>
             </a:r>
+            <a:endParaRPr sz="1700" b="1">
+              <a:solidFill>
+                <a:srgbClr val="FFFFFF"/>
+              </a:solidFill>
+              <a:latin typeface="黑体" panose="02010609060101010101" charset="-122"/>
+            </a:endParaRPr>
           </a:p>
         </p:txBody>
       </p:sp>
@@ -17643,7 +18371,7 @@
           <a:noFill/>
         </p:spPr>
         <p:txBody>
-          <a:bodyPr wrap="square" lIns="36576" rIns="36576" tIns="9144" bIns="9144">
+          <a:bodyPr wrap="square" lIns="36576" tIns="9144" rIns="36576" bIns="9144">
             <a:spAutoFit/>
           </a:bodyPr>
           <a:lstStyle/>
@@ -17657,14 +18385,20 @@
               </a:spcAft>
             </a:pPr>
             <a:r>
-              <a:rPr b="0" sz="1320">
+              <a:rPr sz="1320" b="0">
                 <a:solidFill>
                   <a:srgbClr val="141A1F"/>
                 </a:solidFill>
-                <a:latin typeface="SimSun"/>
+                <a:latin typeface="宋体" panose="02010600030101010101" pitchFamily="2" charset="-122"/>
               </a:rPr>
               <a:t>• CRS、ICANS 需要规范处理</a:t>
             </a:r>
+            <a:endParaRPr sz="1320" b="0">
+              <a:solidFill>
+                <a:srgbClr val="141A1F"/>
+              </a:solidFill>
+              <a:latin typeface="宋体" panose="02010600030101010101" pitchFamily="2" charset="-122"/>
+            </a:endParaRPr>
           </a:p>
           <a:p>
             <a:pPr>
@@ -17676,14 +18410,20 @@
               </a:spcAft>
             </a:pPr>
             <a:r>
-              <a:rPr b="0" sz="1320">
+              <a:rPr sz="1320" b="0">
                 <a:solidFill>
                   <a:srgbClr val="141A1F"/>
                 </a:solidFill>
-                <a:latin typeface="SimSun"/>
+                <a:latin typeface="宋体" panose="02010600030101010101" pitchFamily="2" charset="-122"/>
               </a:rPr>
               <a:t>• Aucatzyl：CRS 75%，ICANS 24%</a:t>
             </a:r>
+            <a:endParaRPr sz="1320" b="0">
+              <a:solidFill>
+                <a:srgbClr val="141A1F"/>
+              </a:solidFill>
+              <a:latin typeface="宋体" panose="02010600030101010101" pitchFamily="2" charset="-122"/>
+            </a:endParaRPr>
           </a:p>
         </p:txBody>
       </p:sp>
@@ -17794,21 +18534,27 @@
           <a:noFill/>
         </p:spPr>
         <p:txBody>
-          <a:bodyPr wrap="square" lIns="27432" rIns="27432" tIns="9144" bIns="9144" anchor="t">
-            <a:spAutoFit/>
-          </a:bodyPr>
-          <a:lstStyle/>
-          <a:p>
-            <a:pPr algn="ctr"/>
-            <a:r>
-              <a:rPr b="1" sz="1700">
+          <a:bodyPr wrap="square" lIns="27432" tIns="9144" rIns="27432" bIns="9144" anchor="t">
+            <a:spAutoFit/>
+          </a:bodyPr>
+          <a:lstStyle/>
+          <a:p>
+            <a:pPr algn="ctr"/>
+            <a:r>
+              <a:rPr sz="1700" b="1">
                 <a:solidFill>
                   <a:srgbClr val="FFFFFF"/>
                 </a:solidFill>
-                <a:latin typeface="SimHei"/>
+                <a:latin typeface="黑体" panose="02010609060101010101" charset="-122"/>
               </a:rPr>
               <a:t>条件</a:t>
             </a:r>
+            <a:endParaRPr sz="1700" b="1">
+              <a:solidFill>
+                <a:srgbClr val="FFFFFF"/>
+              </a:solidFill>
+              <a:latin typeface="黑体" panose="02010609060101010101" charset="-122"/>
+            </a:endParaRPr>
           </a:p>
         </p:txBody>
       </p:sp>
@@ -17829,7 +18575,7 @@
           <a:noFill/>
         </p:spPr>
         <p:txBody>
-          <a:bodyPr wrap="square" lIns="36576" rIns="36576" tIns="9144" bIns="9144">
+          <a:bodyPr wrap="square" lIns="36576" tIns="9144" rIns="36576" bIns="9144">
             <a:spAutoFit/>
           </a:bodyPr>
           <a:lstStyle/>
@@ -17843,14 +18589,20 @@
               </a:spcAft>
             </a:pPr>
             <a:r>
-              <a:rPr b="0" sz="1320">
+              <a:rPr sz="1320" b="0">
                 <a:solidFill>
                   <a:srgbClr val="141A1F"/>
                 </a:solidFill>
-                <a:latin typeface="SimSun"/>
+                <a:latin typeface="宋体" panose="02010600030101010101" pitchFamily="2" charset="-122"/>
               </a:rPr>
               <a:t>• 个体化制造与等待周期</a:t>
             </a:r>
+            <a:endParaRPr sz="1320" b="0">
+              <a:solidFill>
+                <a:srgbClr val="141A1F"/>
+              </a:solidFill>
+              <a:latin typeface="宋体" panose="02010600030101010101" pitchFamily="2" charset="-122"/>
+            </a:endParaRPr>
           </a:p>
           <a:p>
             <a:pPr>
@@ -17862,14 +18614,20 @@
               </a:spcAft>
             </a:pPr>
             <a:r>
-              <a:rPr b="0" sz="1320">
+              <a:rPr sz="1320" b="0">
                 <a:solidFill>
                   <a:srgbClr val="141A1F"/>
                 </a:solidFill>
-                <a:latin typeface="SimSun"/>
+                <a:latin typeface="宋体" panose="02010600030101010101" pitchFamily="2" charset="-122"/>
               </a:rPr>
               <a:t>• 需要具备毒性处理能力的治疗中心</a:t>
             </a:r>
+            <a:endParaRPr sz="1320" b="0">
+              <a:solidFill>
+                <a:srgbClr val="141A1F"/>
+              </a:solidFill>
+              <a:latin typeface="宋体" panose="02010600030101010101" pitchFamily="2" charset="-122"/>
+            </a:endParaRPr>
           </a:p>
         </p:txBody>
       </p:sp>
@@ -17890,21 +18648,27 @@
           <a:noFill/>
         </p:spPr>
         <p:txBody>
-          <a:bodyPr wrap="square" lIns="27432" rIns="27432" tIns="9144" bIns="9144" anchor="t">
-            <a:spAutoFit/>
-          </a:bodyPr>
-          <a:lstStyle/>
-          <a:p>
-            <a:pPr algn="ctr"/>
-            <a:r>
-              <a:rPr b="1" sz="1700">
+          <a:bodyPr wrap="square" lIns="27432" tIns="9144" rIns="27432" bIns="9144" anchor="t">
+            <a:spAutoFit/>
+          </a:bodyPr>
+          <a:lstStyle/>
+          <a:p>
+            <a:pPr algn="ctr"/>
+            <a:r>
+              <a:rPr sz="1700" b="1">
                 <a:solidFill>
                   <a:srgbClr val="12293A"/>
                 </a:solidFill>
-                <a:latin typeface="SimHei"/>
+                <a:latin typeface="黑体" panose="02010609060101010101" charset="-122"/>
               </a:rPr>
               <a:t>判断方式：疗效数字不能脱离风险和治疗条件。</a:t>
             </a:r>
+            <a:endParaRPr sz="1700" b="1">
+              <a:solidFill>
+                <a:srgbClr val="12293A"/>
+              </a:solidFill>
+              <a:latin typeface="黑体" panose="02010609060101010101" charset="-122"/>
+            </a:endParaRPr>
           </a:p>
         </p:txBody>
       </p:sp>
@@ -17917,7 +18681,7 @@
 </file>
 
 <file path=ppt/slides/slide9.xml><?xml version="1.0" encoding="utf-8"?>
-<p:sld xmlns:a="http://schemas.openxmlformats.org/drawingml/2006/main" xmlns:p="http://schemas.openxmlformats.org/presentationml/2006/main" xmlns:r="http://schemas.openxmlformats.org/officeDocument/2006/relationships">
+<p:sld xmlns:a="http://schemas.openxmlformats.org/drawingml/2006/main" xmlns:r="http://schemas.openxmlformats.org/officeDocument/2006/relationships" xmlns:p="http://schemas.openxmlformats.org/presentationml/2006/main">
   <p:cSld>
     <p:spTree>
       <p:nvGrpSpPr>
@@ -18033,21 +18797,27 @@
           <a:noFill/>
         </p:spPr>
         <p:txBody>
-          <a:bodyPr wrap="square" lIns="27432" rIns="27432" tIns="9144" bIns="9144" anchor="t">
+          <a:bodyPr wrap="square" lIns="27432" tIns="9144" rIns="27432" bIns="9144" anchor="t">
             <a:spAutoFit/>
           </a:bodyPr>
           <a:lstStyle/>
           <a:p>
             <a:pPr algn="l"/>
             <a:r>
-              <a:rPr b="1" sz="1100">
+              <a:rPr sz="1100" b="1">
                 <a:solidFill>
                   <a:srgbClr val="1C908B"/>
                 </a:solidFill>
-                <a:latin typeface="SimHei"/>
+                <a:latin typeface="黑体" panose="02010609060101010101" charset="-122"/>
               </a:rPr>
               <a:t>技术三</a:t>
             </a:r>
+            <a:endParaRPr sz="1100" b="1">
+              <a:solidFill>
+                <a:srgbClr val="1C908B"/>
+              </a:solidFill>
+              <a:latin typeface="黑体" panose="02010609060101010101" charset="-122"/>
+            </a:endParaRPr>
           </a:p>
         </p:txBody>
       </p:sp>
@@ -18068,21 +18838,27 @@
           <a:noFill/>
         </p:spPr>
         <p:txBody>
-          <a:bodyPr wrap="square" lIns="27432" rIns="27432" tIns="9144" bIns="9144" anchor="t">
+          <a:bodyPr wrap="square" lIns="27432" tIns="9144" rIns="27432" bIns="9144" anchor="t">
             <a:spAutoFit/>
           </a:bodyPr>
           <a:lstStyle/>
           <a:p>
             <a:pPr algn="l"/>
             <a:r>
-              <a:rPr b="1" sz="2550">
+              <a:rPr sz="2550" b="1">
                 <a:solidFill>
                   <a:srgbClr val="12293A"/>
                 </a:solidFill>
-                <a:latin typeface="SimHei"/>
+                <a:latin typeface="黑体" panose="02010609060101010101" charset="-122"/>
               </a:rPr>
               <a:t>TIL：放大患者体内已经存在的抗肿瘤反应</a:t>
             </a:r>
+            <a:endParaRPr sz="2550" b="1">
+              <a:solidFill>
+                <a:srgbClr val="12293A"/>
+              </a:solidFill>
+              <a:latin typeface="黑体" panose="02010609060101010101" charset="-122"/>
+            </a:endParaRPr>
           </a:p>
         </p:txBody>
       </p:sp>
@@ -18148,21 +18924,27 @@
           <a:noFill/>
         </p:spPr>
         <p:txBody>
-          <a:bodyPr wrap="square" lIns="27432" rIns="27432" tIns="9144" bIns="9144" anchor="t">
+          <a:bodyPr wrap="square" lIns="27432" tIns="9144" rIns="27432" bIns="9144" anchor="t">
             <a:spAutoFit/>
           </a:bodyPr>
           <a:lstStyle/>
           <a:p>
             <a:pPr algn="l"/>
             <a:r>
-              <a:rPr b="1" sz="1420">
+              <a:rPr sz="1420" b="1">
                 <a:solidFill>
                   <a:srgbClr val="12293A"/>
                 </a:solidFill>
-                <a:latin typeface="SimHei"/>
+                <a:latin typeface="黑体" panose="02010609060101010101" charset="-122"/>
               </a:rPr>
               <a:t>TIL 把患者已有免疫反应筛出并放大，实体瘤意义明确但边界仍在。</a:t>
             </a:r>
+            <a:endParaRPr sz="1420" b="1">
+              <a:solidFill>
+                <a:srgbClr val="12293A"/>
+              </a:solidFill>
+              <a:latin typeface="黑体" panose="02010609060101010101" charset="-122"/>
+            </a:endParaRPr>
           </a:p>
         </p:txBody>
       </p:sp>
@@ -18183,56 +18965,27 @@
           <a:noFill/>
         </p:spPr>
         <p:txBody>
-          <a:bodyPr wrap="square" lIns="27432" rIns="27432" tIns="9144" bIns="9144" anchor="t">
+          <a:bodyPr wrap="square" lIns="27432" tIns="9144" rIns="27432" bIns="9144" anchor="t">
             <a:spAutoFit/>
           </a:bodyPr>
           <a:lstStyle/>
           <a:p>
             <a:pPr algn="l"/>
             <a:r>
-              <a:rPr b="1" sz="819">
+              <a:rPr sz="820" b="1">
                 <a:solidFill>
                   <a:srgbClr val="586874"/>
                 </a:solidFill>
-                <a:latin typeface="SimHei"/>
+                <a:latin typeface="黑体" panose="02010609060101010101" charset="-122"/>
               </a:rPr>
               <a:t>09/15</a:t>
             </a:r>
-          </a:p>
-        </p:txBody>
-      </p:sp>
-      <p:sp>
-        <p:nvSpPr>
-          <p:cNvPr id="9" name="TextBox 8"/>
-          <p:cNvSpPr txBox="1"/>
-          <p:nvPr/>
-        </p:nvSpPr>
-        <p:spPr>
-          <a:xfrm>
-            <a:off x="1060704" y="6400800"/>
-            <a:ext cx="10332720" cy="228600"/>
-          </a:xfrm>
-          <a:prstGeom prst="rect">
-            <a:avLst/>
-          </a:prstGeom>
-          <a:noFill/>
-        </p:spPr>
-        <p:txBody>
-          <a:bodyPr wrap="square" lIns="27432" rIns="27432" tIns="9144" bIns="9144" anchor="t">
-            <a:spAutoFit/>
-          </a:bodyPr>
-          <a:lstStyle/>
-          <a:p>
-            <a:pPr algn="l"/>
-            <a:r>
-              <a:rPr b="0" sz="800">
-                <a:solidFill>
-                  <a:srgbClr val="586874"/>
-                </a:solidFill>
-                <a:latin typeface="SimSun"/>
-              </a:rPr>
-              <a:t>资料：FDA Amtagvi；NCI TIL therapy article</a:t>
-            </a:r>
+            <a:endParaRPr sz="820" b="1">
+              <a:solidFill>
+                <a:srgbClr val="586874"/>
+              </a:solidFill>
+              <a:latin typeface="黑体" panose="02010609060101010101" charset="-122"/>
+            </a:endParaRPr>
           </a:p>
         </p:txBody>
       </p:sp>
@@ -18290,7 +19043,7 @@
           <p:nvPr/>
         </p:nvPicPr>
         <p:blipFill>
-          <a:blip r:embed="rId2"/>
+          <a:blip r:embed="rId1"/>
           <a:stretch>
             <a:fillRect/>
           </a:stretch>
@@ -18367,21 +19120,27 @@
           <a:noFill/>
         </p:spPr>
         <p:txBody>
-          <a:bodyPr wrap="square" lIns="27432" rIns="27432" tIns="9144" bIns="9144" anchor="t">
+          <a:bodyPr wrap="square" lIns="27432" tIns="9144" rIns="27432" bIns="9144" anchor="t">
             <a:spAutoFit/>
           </a:bodyPr>
           <a:lstStyle/>
           <a:p>
             <a:pPr algn="l"/>
             <a:r>
-              <a:rPr b="1" sz="1320">
+              <a:rPr sz="1320" b="1">
                 <a:solidFill>
                   <a:srgbClr val="1C908B"/>
                 </a:solidFill>
-                <a:latin typeface="SimHei"/>
+                <a:latin typeface="黑体" panose="02010609060101010101" charset="-122"/>
               </a:rPr>
               <a:t>机制</a:t>
             </a:r>
+            <a:endParaRPr sz="1320" b="1">
+              <a:solidFill>
+                <a:srgbClr val="1C908B"/>
+              </a:solidFill>
+              <a:latin typeface="黑体" panose="02010609060101010101" charset="-122"/>
+            </a:endParaRPr>
           </a:p>
         </p:txBody>
       </p:sp>
@@ -18402,21 +19161,27 @@
           <a:noFill/>
         </p:spPr>
         <p:txBody>
-          <a:bodyPr wrap="square" lIns="27432" rIns="27432" tIns="9144" bIns="9144" anchor="t">
+          <a:bodyPr wrap="square" lIns="27432" tIns="9144" rIns="27432" bIns="9144" anchor="t">
             <a:spAutoFit/>
           </a:bodyPr>
           <a:lstStyle/>
           <a:p>
             <a:pPr algn="l"/>
             <a:r>
-              <a:rPr b="0" sz="1200">
+              <a:rPr sz="1200" b="0">
                 <a:solidFill>
                   <a:srgbClr val="141A1F"/>
                 </a:solidFill>
-                <a:latin typeface="SimSun"/>
+                <a:latin typeface="宋体" panose="02010600030101010101" pitchFamily="2" charset="-122"/>
               </a:rPr>
               <a:t>从肿瘤组织分离 T 细胞，体外扩增后回输。</a:t>
             </a:r>
+            <a:endParaRPr sz="1200" b="0">
+              <a:solidFill>
+                <a:srgbClr val="141A1F"/>
+              </a:solidFill>
+              <a:latin typeface="宋体" panose="02010600030101010101" pitchFamily="2" charset="-122"/>
+            </a:endParaRPr>
           </a:p>
         </p:txBody>
       </p:sp>
@@ -18482,21 +19247,27 @@
           <a:noFill/>
         </p:spPr>
         <p:txBody>
-          <a:bodyPr wrap="square" lIns="27432" rIns="27432" tIns="9144" bIns="9144" anchor="t">
+          <a:bodyPr wrap="square" lIns="27432" tIns="9144" rIns="27432" bIns="9144" anchor="t">
             <a:spAutoFit/>
           </a:bodyPr>
           <a:lstStyle/>
           <a:p>
             <a:pPr algn="l"/>
             <a:r>
-              <a:rPr b="1" sz="1320">
+              <a:rPr sz="1320" b="1">
                 <a:solidFill>
                   <a:srgbClr val="C04A43"/>
                 </a:solidFill>
-                <a:latin typeface="SimHei"/>
+                <a:latin typeface="黑体" panose="02010609060101010101" charset="-122"/>
               </a:rPr>
               <a:t>实例</a:t>
             </a:r>
+            <a:endParaRPr sz="1320" b="1">
+              <a:solidFill>
+                <a:srgbClr val="C04A43"/>
+              </a:solidFill>
+              <a:latin typeface="黑体" panose="02010609060101010101" charset="-122"/>
+            </a:endParaRPr>
           </a:p>
         </p:txBody>
       </p:sp>
@@ -18517,21 +19288,27 @@
           <a:noFill/>
         </p:spPr>
         <p:txBody>
-          <a:bodyPr wrap="square" lIns="27432" rIns="27432" tIns="9144" bIns="9144" anchor="t">
+          <a:bodyPr wrap="square" lIns="27432" tIns="9144" rIns="27432" bIns="9144" anchor="t">
             <a:spAutoFit/>
           </a:bodyPr>
           <a:lstStyle/>
           <a:p>
             <a:pPr algn="l"/>
             <a:r>
-              <a:rPr b="0" sz="1200">
+              <a:rPr sz="1200" b="0">
                 <a:solidFill>
                   <a:srgbClr val="141A1F"/>
                 </a:solidFill>
-                <a:latin typeface="SimSun"/>
+                <a:latin typeface="宋体" panose="02010600030101010101" pitchFamily="2" charset="-122"/>
               </a:rPr>
               <a:t>Amtagvi 推荐剂量患者 ORR 31.5%。</a:t>
             </a:r>
+            <a:endParaRPr sz="1200" b="0">
+              <a:solidFill>
+                <a:srgbClr val="141A1F"/>
+              </a:solidFill>
+              <a:latin typeface="宋体" panose="02010600030101010101" pitchFamily="2" charset="-122"/>
+            </a:endParaRPr>
           </a:p>
         </p:txBody>
       </p:sp>
@@ -18597,21 +19374,27 @@
           <a:noFill/>
         </p:spPr>
         <p:txBody>
-          <a:bodyPr wrap="square" lIns="27432" rIns="27432" tIns="9144" bIns="9144" anchor="t">
+          <a:bodyPr wrap="square" lIns="27432" tIns="9144" rIns="27432" bIns="9144" anchor="t">
             <a:spAutoFit/>
           </a:bodyPr>
           <a:lstStyle/>
           <a:p>
             <a:pPr algn="l"/>
             <a:r>
-              <a:rPr b="1" sz="1320">
+              <a:rPr sz="1320" b="1">
                 <a:solidFill>
                   <a:srgbClr val="E59E3A"/>
                 </a:solidFill>
-                <a:latin typeface="SimHei"/>
+                <a:latin typeface="黑体" panose="02010609060101010101" charset="-122"/>
               </a:rPr>
               <a:t>边界</a:t>
             </a:r>
+            <a:endParaRPr sz="1320" b="1">
+              <a:solidFill>
+                <a:srgbClr val="E59E3A"/>
+              </a:solidFill>
+              <a:latin typeface="黑体" panose="02010609060101010101" charset="-122"/>
+            </a:endParaRPr>
           </a:p>
         </p:txBody>
       </p:sp>
@@ -18632,21 +19415,27 @@
           <a:noFill/>
         </p:spPr>
         <p:txBody>
-          <a:bodyPr wrap="square" lIns="27432" rIns="27432" tIns="9144" bIns="9144" anchor="t">
+          <a:bodyPr wrap="square" lIns="27432" tIns="9144" rIns="27432" bIns="9144" anchor="t">
             <a:spAutoFit/>
           </a:bodyPr>
           <a:lstStyle/>
           <a:p>
             <a:pPr algn="l"/>
             <a:r>
-              <a:rPr b="0" sz="1200">
+              <a:rPr sz="1200" b="0">
                 <a:solidFill>
                   <a:srgbClr val="141A1F"/>
                 </a:solidFill>
-                <a:latin typeface="SimSun"/>
+                <a:latin typeface="宋体" panose="02010600030101010101" pitchFamily="2" charset="-122"/>
               </a:rPr>
               <a:t>加速批准仍需确认性试验验证临床获益。</a:t>
             </a:r>
+            <a:endParaRPr sz="1200" b="0">
+              <a:solidFill>
+                <a:srgbClr val="141A1F"/>
+              </a:solidFill>
+              <a:latin typeface="宋体" panose="02010600030101010101" pitchFamily="2" charset="-122"/>
+            </a:endParaRPr>
           </a:p>
         </p:txBody>
       </p:sp>
@@ -18974,6 +19763,10 @@
       </a:style>
     </a:lnDef>
   </a:objectDefaults>
-  <a:extraClrSchemeLst/>
+  <a:extLst>
+    <a:ext uri="{05A4C25C-085E-4340-85A3-A5531E510DB2}">
+      <thm15:themeFamily xmlns:thm15="http://schemas.microsoft.com/office/thememl/2012/main" name="Office Theme" id="{62F939B6-93AF-4DB8-9C6B-D6C7DFDC589F}" vid="{4A3C46E8-61CC-4603-A589-7422A47A8E4A}"/>
+    </a:ext>
+  </a:extLst>
 </a:theme>
 </file>